--- a/SAKINA_Pitch_Deck.pptx
+++ b/SAKINA_Pitch_Deck.pptx
@@ -4,6 +4,9 @@
   <p:sldMasterIdLst>
     <p:sldMasterId id="2147483648" r:id="rId1"/>
   </p:sldMasterIdLst>
+  <p:notesMasterIdLst>
+    <p:notesMasterId r:id="rId14"/>
+  </p:notesMasterIdLst>
   <p:sldIdLst>
     <p:sldId id="256" r:id="rId2"/>
     <p:sldId id="257" r:id="rId3"/>
@@ -18,9 +21,6 @@
     <p:sldId id="266" r:id="rId12"/>
     <p:sldId id="267" r:id="rId13"/>
   </p:sldIdLst>
-  <p:notesMasterIdLst>
-    <p:notesMasterId r:id="rId14"/>
-  </p:notesMasterIdLst>
   <p:sldSz cx="12192000" cy="6858000"/>
   <p:notesSz cx="6858000" cy="12192000"/>
   <p:defaultTextStyle>
@@ -115,6 +115,11 @@
       </a:defRPr>
     </a:lvl9pPr>
   </p:defaultTextStyle>
+  <p:extLst>
+    <p:ext uri="{EFAFB233-063F-42B5-8137-9DF3F51BA10A}">
+      <p15:sldGuideLst xmlns:p15="http://schemas.microsoft.com/office/powerpoint/2012/main"/>
+    </p:ext>
+  </p:extLst>
 </p:presentation>
 </file>
 
@@ -140,234 +145,10 @@
           <a:chExt cx="0" cy="0"/>
         </a:xfrm>
       </p:grpSpPr>
-      <p:sp>
-        <p:nvSpPr>
-          <p:cNvPr id="2" name="Header Placeholder 1"/>
-          <p:cNvSpPr>
-            <a:spLocks noGrp="1"/>
-          </p:cNvSpPr>
-          <p:nvPr>
-            <p:ph type="hdr" sz="quarter"/>
-          </p:nvPr>
-        </p:nvSpPr>
-        <p:spPr>
-          <a:xfrm>
-            <a:off x="0" y="0"/>
-            <a:ext cx="2971800" cy="458788"/>
-          </a:xfrm>
-          <a:prstGeom prst="rect">
-            <a:avLst/>
-          </a:prstGeom>
-        </p:spPr>
-        <p:txBody>
-          <a:bodyPr vert="horz" lIns="91440" tIns="45720" rIns="91440" bIns="45720" rtlCol="0"/>
-          <a:lstStyle>
-            <a:lvl1pPr algn="l">
-              <a:defRPr sz="1200"/>
-            </a:lvl1pPr>
-          </a:lstStyle>
-          <a:p>
-            <a:endParaRPr lang="en-US"/>
-          </a:p>
-        </p:txBody>
-      </p:sp>
-      <p:sp>
-        <p:nvSpPr>
-          <p:cNvPr id="3" name="Date Placeholder 2"/>
-          <p:cNvSpPr>
-            <a:spLocks noGrp="1"/>
-          </p:cNvSpPr>
-          <p:nvPr>
-            <p:ph type="dt" idx="1"/>
-          </p:nvPr>
-        </p:nvSpPr>
-        <p:spPr>
-          <a:xfrm>
-            <a:off x="3884613" y="0"/>
-            <a:ext cx="2971800" cy="458788"/>
-          </a:xfrm>
-          <a:prstGeom prst="rect">
-            <a:avLst/>
-          </a:prstGeom>
-        </p:spPr>
-        <p:txBody>
-          <a:bodyPr vert="horz" lIns="91440" tIns="45720" rIns="91440" bIns="45720" rtlCol="0"/>
-          <a:lstStyle>
-            <a:lvl1pPr algn="r">
-              <a:defRPr sz="1200"/>
-            </a:lvl1pPr>
-          </a:lstStyle>
-          <a:p>
-            <a:fld id="{5282F153-3F37-0F45-9E97-73ACFA13230C}" type="datetimeFigureOut">
-              <a:rPr lang="en-US"/>
-              <a:t>7/23/19</a:t>
-            </a:fld>
-            <a:endParaRPr lang="en-US"/>
-          </a:p>
-        </p:txBody>
-      </p:sp>
-      <p:sp>
-        <p:nvSpPr>
-          <p:cNvPr id="4" name="Slide Image Placeholder 3"/>
-          <p:cNvSpPr>
-            <a:spLocks noGrp="1" noRot="1" noChangeAspect="1"/>
-          </p:cNvSpPr>
-          <p:nvPr>
-            <p:ph type="sldImg" idx="2"/>
-          </p:nvPr>
-        </p:nvSpPr>
-        <p:spPr>
-          <a:xfrm>
-            <a:off x="685800" y="1143000"/>
-            <a:ext cx="5486400" cy="3086100"/>
-          </a:xfrm>
-          <a:prstGeom prst="rect">
-            <a:avLst/>
-          </a:prstGeom>
-          <a:noFill/>
-          <a:ln w="12700">
-            <a:solidFill>
-              <a:prstClr val="black"/>
-            </a:solidFill>
-          </a:ln>
-        </p:spPr>
-        <p:txBody>
-          <a:bodyPr vert="horz" lIns="91440" tIns="45720" rIns="91440" bIns="45720" rtlCol="0" anchor="ctr"/>
-          <a:lstStyle/>
-          <a:p>
-            <a:endParaRPr lang="en-US"/>
-          </a:p>
-        </p:txBody>
-      </p:sp>
-      <p:sp>
-        <p:nvSpPr>
-          <p:cNvPr id="5" name="Notes Placeholder 4"/>
-          <p:cNvSpPr>
-            <a:spLocks noGrp="1"/>
-          </p:cNvSpPr>
-          <p:nvPr>
-            <p:ph type="body" sz="quarter" idx="3"/>
-          </p:nvPr>
-        </p:nvSpPr>
-        <p:spPr>
-          <a:xfrm>
-            <a:off x="685800" y="4400550"/>
-            <a:ext cx="5486400" cy="3600450"/>
-          </a:xfrm>
-          <a:prstGeom prst="rect">
-            <a:avLst/>
-          </a:prstGeom>
-        </p:spPr>
-        <p:txBody>
-          <a:bodyPr vert="horz" lIns="91440" tIns="45720" rIns="91440" bIns="45720" rtlCol="0"/>
-          <a:lstStyle/>
-          <a:p>
-            <a:pPr lvl="0"/>
-            <a:r>
-              <a:rPr lang="en-US"/>
-              <a:t>Click to edit Master text styles</a:t>
-            </a:r>
-          </a:p>
-          <a:p>
-            <a:pPr lvl="1"/>
-            <a:r>
-              <a:rPr lang="en-US"/>
-              <a:t>Second level</a:t>
-            </a:r>
-          </a:p>
-          <a:p>
-            <a:pPr lvl="2"/>
-            <a:r>
-              <a:rPr lang="en-US"/>
-              <a:t>Third level</a:t>
-            </a:r>
-          </a:p>
-          <a:p>
-            <a:pPr lvl="3"/>
-            <a:r>
-              <a:rPr lang="en-US"/>
-              <a:t>Fourth level</a:t>
-            </a:r>
-          </a:p>
-          <a:p>
-            <a:pPr lvl="4"/>
-            <a:r>
-              <a:rPr lang="en-US"/>
-              <a:t>Fifth level</a:t>
-            </a:r>
-          </a:p>
-        </p:txBody>
-      </p:sp>
-      <p:sp>
-        <p:nvSpPr>
-          <p:cNvPr id="6" name="Footer Placeholder 5"/>
-          <p:cNvSpPr>
-            <a:spLocks noGrp="1"/>
-          </p:cNvSpPr>
-          <p:nvPr>
-            <p:ph type="ftr" sz="quarter" idx="4"/>
-          </p:nvPr>
-        </p:nvSpPr>
-        <p:spPr>
-          <a:xfrm>
-            <a:off x="0" y="8685213"/>
-            <a:ext cx="2971800" cy="458787"/>
-          </a:xfrm>
-          <a:prstGeom prst="rect">
-            <a:avLst/>
-          </a:prstGeom>
-        </p:spPr>
-        <p:txBody>
-          <a:bodyPr vert="horz" lIns="91440" tIns="45720" rIns="91440" bIns="45720" rtlCol="0" anchor="b"/>
-          <a:lstStyle>
-            <a:lvl1pPr algn="l">
-              <a:defRPr sz="1200"/>
-            </a:lvl1pPr>
-          </a:lstStyle>
-          <a:p>
-            <a:endParaRPr lang="en-US"/>
-          </a:p>
-        </p:txBody>
-      </p:sp>
-      <p:sp>
-        <p:nvSpPr>
-          <p:cNvPr id="7" name="Slide Number Placeholder 6"/>
-          <p:cNvSpPr>
-            <a:spLocks noGrp="1"/>
-          </p:cNvSpPr>
-          <p:nvPr>
-            <p:ph type="sldNum" sz="quarter" idx="5"/>
-          </p:nvPr>
-        </p:nvSpPr>
-        <p:spPr>
-          <a:xfrm>
-            <a:off x="3884613" y="8685213"/>
-            <a:ext cx="2971800" cy="458787"/>
-          </a:xfrm>
-          <a:prstGeom prst="rect">
-            <a:avLst/>
-          </a:prstGeom>
-        </p:spPr>
-        <p:txBody>
-          <a:bodyPr vert="horz" lIns="91440" tIns="45720" rIns="91440" bIns="45720" rtlCol="0" anchor="b"/>
-          <a:lstStyle>
-            <a:lvl1pPr algn="r">
-              <a:defRPr sz="1200"/>
-            </a:lvl1pPr>
-          </a:lstStyle>
-          <a:p>
-            <a:fld id="{CE5E9CC1-C706-0F49-92D6-E571CC5EEA8F}" type="slidenum">
-              <a:rPr lang="en-US"/>
-              <a:t>‹#›</a:t>
-            </a:fld>
-            <a:endParaRPr lang="en-US"/>
-          </a:p>
-        </p:txBody>
-      </p:sp>
     </p:spTree>
     <p:extLst>
       <p:ext uri="{BB962C8B-B14F-4D97-AF65-F5344CB8AC3E}">
-        <p14:creationId xmlns:p14="http://schemas.microsoft.com/office/powerpoint/2010/main" val="1024086991"/>
+        <p14:creationId xmlns:p14="http://schemas.microsoft.com/office/powerpoint/2010/main" val="429997920"/>
       </p:ext>
     </p:extLst>
   </p:cSld>
@@ -511,10 +292,6 @@
           <a:bodyPr/>
           <a:lstStyle/>
           <a:p>
-            <a:r>
-              <a:rPr lang="en-US" dirty="0"/>
-              <a:t/>
-            </a:r>
             <a:endParaRPr lang="en-US" dirty="0"/>
           </a:p>
         </p:txBody>
@@ -599,10 +376,6 @@
           <a:bodyPr/>
           <a:lstStyle/>
           <a:p>
-            <a:r>
-              <a:rPr lang="en-US" dirty="0"/>
-              <a:t/>
-            </a:r>
             <a:endParaRPr lang="en-US" dirty="0"/>
           </a:p>
         </p:txBody>
@@ -687,10 +460,6 @@
           <a:bodyPr/>
           <a:lstStyle/>
           <a:p>
-            <a:r>
-              <a:rPr lang="en-US" dirty="0"/>
-              <a:t/>
-            </a:r>
             <a:endParaRPr lang="en-US" dirty="0"/>
           </a:p>
         </p:txBody>
@@ -775,10 +544,6 @@
           <a:bodyPr/>
           <a:lstStyle/>
           <a:p>
-            <a:r>
-              <a:rPr lang="en-US" dirty="0"/>
-              <a:t/>
-            </a:r>
             <a:endParaRPr lang="en-US" dirty="0"/>
           </a:p>
         </p:txBody>
@@ -863,10 +628,6 @@
           <a:bodyPr/>
           <a:lstStyle/>
           <a:p>
-            <a:r>
-              <a:rPr lang="en-US" dirty="0"/>
-              <a:t/>
-            </a:r>
             <a:endParaRPr lang="en-US" dirty="0"/>
           </a:p>
         </p:txBody>
@@ -951,10 +712,6 @@
           <a:bodyPr/>
           <a:lstStyle/>
           <a:p>
-            <a:r>
-              <a:rPr lang="en-US" dirty="0"/>
-              <a:t/>
-            </a:r>
             <a:endParaRPr lang="en-US" dirty="0"/>
           </a:p>
         </p:txBody>
@@ -1039,10 +796,6 @@
           <a:bodyPr/>
           <a:lstStyle/>
           <a:p>
-            <a:r>
-              <a:rPr lang="en-US" dirty="0"/>
-              <a:t/>
-            </a:r>
             <a:endParaRPr lang="en-US" dirty="0"/>
           </a:p>
         </p:txBody>
@@ -1127,10 +880,6 @@
           <a:bodyPr/>
           <a:lstStyle/>
           <a:p>
-            <a:r>
-              <a:rPr lang="en-US" dirty="0"/>
-              <a:t/>
-            </a:r>
             <a:endParaRPr lang="en-US" dirty="0"/>
           </a:p>
         </p:txBody>
@@ -1215,10 +964,6 @@
           <a:bodyPr/>
           <a:lstStyle/>
           <a:p>
-            <a:r>
-              <a:rPr lang="en-US" dirty="0"/>
-              <a:t/>
-            </a:r>
             <a:endParaRPr lang="en-US" dirty="0"/>
           </a:p>
         </p:txBody>
@@ -1303,10 +1048,6 @@
           <a:bodyPr/>
           <a:lstStyle/>
           <a:p>
-            <a:r>
-              <a:rPr lang="en-US" dirty="0"/>
-              <a:t/>
-            </a:r>
             <a:endParaRPr lang="en-US" dirty="0"/>
           </a:p>
         </p:txBody>
@@ -1391,10 +1132,6 @@
           <a:bodyPr/>
           <a:lstStyle/>
           <a:p>
-            <a:r>
-              <a:rPr lang="en-US" dirty="0"/>
-              <a:t/>
-            </a:r>
             <a:endParaRPr lang="en-US" dirty="0"/>
           </a:p>
         </p:txBody>
@@ -1479,10 +1216,6 @@
           <a:bodyPr/>
           <a:lstStyle/>
           <a:p>
-            <a:r>
-              <a:rPr lang="en-US" dirty="0"/>
-              <a:t/>
-            </a:r>
             <a:endParaRPr lang="en-US" dirty="0"/>
           </a:p>
         </p:txBody>
@@ -1556,6 +1289,11 @@
 <file path=ppt/slideMasters/slideMaster1.xml><?xml version="1.0" encoding="utf-8"?>
 <p:sldMaster xmlns:a="http://schemas.openxmlformats.org/drawingml/2006/main" xmlns:r="http://schemas.openxmlformats.org/officeDocument/2006/relationships" xmlns:p="http://schemas.openxmlformats.org/presentationml/2006/main">
   <p:cSld>
+    <p:bg>
+      <p:bgRef idx="1001">
+        <a:schemeClr val="bg1"/>
+      </p:bgRef>
+    </p:bg>
     <p:spTree>
       <p:nvGrpSpPr>
         <p:cNvPr id="1" name=""/>
@@ -1838,6 +1576,7 @@
         <a:solidFill>
           <a:srgbClr val="0F1B2D"/>
         </a:solidFill>
+        <a:effectLst/>
       </p:bgPr>
     </p:bg>
     <p:spTree>
@@ -1875,7 +1614,7 @@
           <a:bodyPr wrap="square" lIns="0" tIns="0" rIns="0" bIns="0" rtlCol="0" anchor="ctr"/>
           <a:lstStyle/>
           <a:p>
-            <a:pPr indent="0" marL="0">
+            <a:pPr marL="0" indent="0">
               <a:buNone/>
             </a:pPr>
             <a:r>
@@ -1914,7 +1653,7 @@
           <a:bodyPr wrap="square" lIns="0" tIns="0" rIns="0" bIns="0" rtlCol="0" anchor="ctr"/>
           <a:lstStyle/>
           <a:p>
-            <a:pPr indent="0" marL="0">
+            <a:pPr marL="0" indent="0">
               <a:buNone/>
             </a:pPr>
             <a:r>
@@ -1953,7 +1692,7 @@
           <a:bodyPr wrap="square" lIns="0" tIns="0" rIns="0" bIns="0" rtlCol="0" anchor="ctr"/>
           <a:lstStyle/>
           <a:p>
-            <a:pPr indent="0" marL="0">
+            <a:pPr marL="0" indent="0">
               <a:buNone/>
             </a:pPr>
             <a:r>
@@ -2015,7 +1754,7 @@
           <a:bodyPr wrap="square" lIns="0" tIns="0" rIns="0" bIns="0" rtlCol="0" anchor="ctr"/>
           <a:lstStyle/>
           <a:p>
-            <a:pPr indent="0" marL="0">
+            <a:pPr marL="0" indent="0">
               <a:lnSpc>
                 <a:spcPct val="125000"/>
               </a:lnSpc>
@@ -2035,7 +1774,7 @@
             <a:endParaRPr lang="en-US" sz="1500" dirty="0"/>
           </a:p>
           <a:p>
-            <a:pPr indent="0" marL="0">
+            <a:pPr marL="0" indent="0">
               <a:lnSpc>
                 <a:spcPct val="125000"/>
               </a:lnSpc>
@@ -2055,7 +1794,7 @@
             <a:endParaRPr lang="en-US" sz="1500" dirty="0"/>
           </a:p>
           <a:p>
-            <a:pPr indent="0" marL="0">
+            <a:pPr marL="0" indent="0">
               <a:lnSpc>
                 <a:spcPct val="125000"/>
               </a:lnSpc>
@@ -2097,11 +1836,11 @@
           <a:bodyPr wrap="square" lIns="0" tIns="0" rIns="0" bIns="0" rtlCol="0" anchor="ctr"/>
           <a:lstStyle/>
           <a:p>
-            <a:pPr indent="0" marL="0">
-              <a:buNone/>
-            </a:pPr>
-            <a:r>
-              <a:rPr lang="en-US" sz="1100" b="1" spc="100" kern="0" dirty="0">
+            <a:pPr marL="0" indent="0">
+              <a:buNone/>
+            </a:pPr>
+            <a:r>
+              <a:rPr lang="en-US" sz="1100" b="1" kern="0" spc="100" dirty="0">
                 <a:solidFill>
                   <a:srgbClr val="C7922E"/>
                 </a:solidFill>
@@ -2136,7 +1875,7 @@
           <a:bodyPr wrap="square" lIns="0" tIns="0" rIns="0" bIns="0" rtlCol="0" anchor="ctr"/>
           <a:lstStyle/>
           <a:p>
-            <a:pPr indent="0" marL="0">
+            <a:pPr marL="0" indent="0">
               <a:buNone/>
             </a:pPr>
             <a:r>
@@ -2170,6 +1909,7 @@
         <a:solidFill>
           <a:srgbClr val="FFFFFF"/>
         </a:solidFill>
+        <a:effectLst/>
       </p:bgPr>
     </p:bg>
     <p:spTree>
@@ -2207,11 +1947,11 @@
           <a:bodyPr wrap="square" lIns="0" tIns="0" rIns="0" bIns="0" rtlCol="0" anchor="ctr"/>
           <a:lstStyle/>
           <a:p>
-            <a:pPr indent="0" marL="0">
-              <a:buNone/>
-            </a:pPr>
-            <a:r>
-              <a:rPr lang="en-US" sz="1100" b="1" spc="200" kern="0" dirty="0">
+            <a:pPr marL="0" indent="0">
+              <a:buNone/>
+            </a:pPr>
+            <a:r>
+              <a:rPr lang="en-US" sz="1100" b="1" kern="0" spc="200" dirty="0">
                 <a:solidFill>
                   <a:srgbClr val="0F6E56"/>
                 </a:solidFill>
@@ -2246,7 +1986,7 @@
           <a:bodyPr wrap="square" lIns="0" tIns="0" rIns="0" bIns="0" rtlCol="0" anchor="ctr"/>
           <a:lstStyle/>
           <a:p>
-            <a:pPr indent="0" marL="0">
+            <a:pPr marL="0" indent="0">
               <a:buNone/>
             </a:pPr>
             <a:r>
@@ -2287,8 +2027,20 @@
             <a:tbl>
               <a:tblPr/>
               <a:tblGrid>
-                <a:gridCol w="1737360"/>
-                <a:gridCol w="5577840"/>
+                <a:gridCol w="1737360">
+                  <a:extLst>
+                    <a:ext uri="{9D8B030D-6E8A-4147-A177-3AD203B41FA5}">
+                      <a16:colId xmlns:a16="http://schemas.microsoft.com/office/drawing/2014/main" val="20000"/>
+                    </a:ext>
+                  </a:extLst>
+                </a:gridCol>
+                <a:gridCol w="5577840">
+                  <a:extLst>
+                    <a:ext uri="{9D8B030D-6E8A-4147-A177-3AD203B41FA5}">
+                      <a16:colId xmlns:a16="http://schemas.microsoft.com/office/drawing/2014/main" val="20001"/>
+                    </a:ext>
+                  </a:extLst>
+                </a:gridCol>
               </a:tblGrid>
               <a:tr h="941832">
                 <a:tc>
@@ -2296,7 +2048,7 @@
                     <a:bodyPr/>
                     <a:lstStyle/>
                     <a:p>
-                      <a:pPr indent="0" marL="0">
+                      <a:pPr marL="0" indent="0">
                         <a:buNone/>
                       </a:pPr>
                       <a:r>
@@ -2317,7 +2069,7 @@
                       </a:endParaRPr>
                     </a:p>
                   </a:txBody>
-                  <a:tcPr marL="91440" marR="91440" marT="45720" marB="45720" anchor="ctr">
+                  <a:tcPr anchor="ctr">
                     <a:lnL w="6350" cap="flat" cmpd="sng" algn="ctr">
                       <a:solidFill>
                         <a:srgbClr val="D8DEE4"/>
@@ -2364,7 +2116,7 @@
                     <a:bodyPr/>
                     <a:lstStyle/>
                     <a:p>
-                      <a:pPr indent="0" marL="0">
+                      <a:pPr marL="0" indent="0">
                         <a:buNone/>
                       </a:pPr>
                       <a:r>
@@ -2385,7 +2137,7 @@
                       </a:endParaRPr>
                     </a:p>
                   </a:txBody>
-                  <a:tcPr marL="91440" marR="91440" marT="45720" marB="45720" anchor="ctr">
+                  <a:tcPr anchor="ctr">
                     <a:lnL w="6350" cap="flat" cmpd="sng" algn="ctr">
                       <a:solidFill>
                         <a:srgbClr val="D8DEE4"/>
@@ -2427,6 +2179,11 @@
                     </a:solidFill>
                   </a:tcPr>
                 </a:tc>
+                <a:extLst>
+                  <a:ext uri="{0D108BD9-81ED-4DB2-BD59-A6C34878D82A}">
+                    <a16:rowId xmlns:a16="http://schemas.microsoft.com/office/drawing/2014/main" val="10000"/>
+                  </a:ext>
+                </a:extLst>
               </a:tr>
               <a:tr h="941832">
                 <a:tc>
@@ -2434,7 +2191,7 @@
                     <a:bodyPr/>
                     <a:lstStyle/>
                     <a:p>
-                      <a:pPr indent="0" marL="0">
+                      <a:pPr marL="0" indent="0">
                         <a:buNone/>
                       </a:pPr>
                       <a:r>
@@ -2455,7 +2212,7 @@
                       </a:endParaRPr>
                     </a:p>
                   </a:txBody>
-                  <a:tcPr marL="91440" marR="91440" marT="45720" marB="45720" anchor="ctr">
+                  <a:tcPr anchor="ctr">
                     <a:lnL w="6350" cap="flat" cmpd="sng" algn="ctr">
                       <a:solidFill>
                         <a:srgbClr val="D8DEE4"/>
@@ -2499,7 +2256,7 @@
                     <a:bodyPr/>
                     <a:lstStyle/>
                     <a:p>
-                      <a:pPr indent="0" marL="0">
+                      <a:pPr marL="0" indent="0">
                         <a:buNone/>
                       </a:pPr>
                       <a:r>
@@ -2520,7 +2277,7 @@
                       </a:endParaRPr>
                     </a:p>
                   </a:txBody>
-                  <a:tcPr marL="91440" marR="91440" marT="45720" marB="45720" anchor="ctr">
+                  <a:tcPr anchor="ctr">
                     <a:lnL w="6350" cap="flat" cmpd="sng" algn="ctr">
                       <a:solidFill>
                         <a:srgbClr val="D8DEE4"/>
@@ -2559,6 +2316,11 @@
                     </a:lnB>
                   </a:tcPr>
                 </a:tc>
+                <a:extLst>
+                  <a:ext uri="{0D108BD9-81ED-4DB2-BD59-A6C34878D82A}">
+                    <a16:rowId xmlns:a16="http://schemas.microsoft.com/office/drawing/2014/main" val="10001"/>
+                  </a:ext>
+                </a:extLst>
               </a:tr>
               <a:tr h="941832">
                 <a:tc>
@@ -2566,7 +2328,7 @@
                     <a:bodyPr/>
                     <a:lstStyle/>
                     <a:p>
-                      <a:pPr indent="0" marL="0">
+                      <a:pPr marL="0" indent="0">
                         <a:buNone/>
                       </a:pPr>
                       <a:r>
@@ -2587,7 +2349,7 @@
                       </a:endParaRPr>
                     </a:p>
                   </a:txBody>
-                  <a:tcPr marL="91440" marR="91440" marT="45720" marB="45720" anchor="ctr">
+                  <a:tcPr anchor="ctr">
                     <a:lnL w="6350" cap="flat" cmpd="sng" algn="ctr">
                       <a:solidFill>
                         <a:srgbClr val="D8DEE4"/>
@@ -2631,7 +2393,7 @@
                     <a:bodyPr/>
                     <a:lstStyle/>
                     <a:p>
-                      <a:pPr indent="0" marL="0">
+                      <a:pPr marL="0" indent="0">
                         <a:buNone/>
                       </a:pPr>
                       <a:r>
@@ -2652,7 +2414,7 @@
                       </a:endParaRPr>
                     </a:p>
                   </a:txBody>
-                  <a:tcPr marL="91440" marR="91440" marT="45720" marB="45720" anchor="ctr">
+                  <a:tcPr anchor="ctr">
                     <a:lnL w="6350" cap="flat" cmpd="sng" algn="ctr">
                       <a:solidFill>
                         <a:srgbClr val="D8DEE4"/>
@@ -2691,6 +2453,11 @@
                     </a:lnB>
                   </a:tcPr>
                 </a:tc>
+                <a:extLst>
+                  <a:ext uri="{0D108BD9-81ED-4DB2-BD59-A6C34878D82A}">
+                    <a16:rowId xmlns:a16="http://schemas.microsoft.com/office/drawing/2014/main" val="10002"/>
+                  </a:ext>
+                </a:extLst>
               </a:tr>
               <a:tr h="941832">
                 <a:tc>
@@ -2698,7 +2465,7 @@
                     <a:bodyPr/>
                     <a:lstStyle/>
                     <a:p>
-                      <a:pPr indent="0" marL="0">
+                      <a:pPr marL="0" indent="0">
                         <a:buNone/>
                       </a:pPr>
                       <a:r>
@@ -2719,7 +2486,7 @@
                       </a:endParaRPr>
                     </a:p>
                   </a:txBody>
-                  <a:tcPr marL="91440" marR="91440" marT="45720" marB="45720" anchor="ctr">
+                  <a:tcPr anchor="ctr">
                     <a:lnL w="6350" cap="flat" cmpd="sng" algn="ctr">
                       <a:solidFill>
                         <a:srgbClr val="D8DEE4"/>
@@ -2763,7 +2530,7 @@
                     <a:bodyPr/>
                     <a:lstStyle/>
                     <a:p>
-                      <a:pPr indent="0" marL="0">
+                      <a:pPr marL="0" indent="0">
                         <a:buNone/>
                       </a:pPr>
                       <a:r>
@@ -2784,7 +2551,7 @@
                       </a:endParaRPr>
                     </a:p>
                   </a:txBody>
-                  <a:tcPr marL="91440" marR="91440" marT="45720" marB="45720" anchor="ctr">
+                  <a:tcPr anchor="ctr">
                     <a:lnL w="6350" cap="flat" cmpd="sng" algn="ctr">
                       <a:solidFill>
                         <a:srgbClr val="D8DEE4"/>
@@ -2823,6 +2590,11 @@
                     </a:lnB>
                   </a:tcPr>
                 </a:tc>
+                <a:extLst>
+                  <a:ext uri="{0D108BD9-81ED-4DB2-BD59-A6C34878D82A}">
+                    <a16:rowId xmlns:a16="http://schemas.microsoft.com/office/drawing/2014/main" val="10003"/>
+                  </a:ext>
+                </a:extLst>
               </a:tr>
               <a:tr h="941832">
                 <a:tc>
@@ -2830,7 +2602,7 @@
                     <a:bodyPr/>
                     <a:lstStyle/>
                     <a:p>
-                      <a:pPr indent="0" marL="0">
+                      <a:pPr marL="0" indent="0">
                         <a:buNone/>
                       </a:pPr>
                       <a:r>
@@ -2851,7 +2623,7 @@
                       </a:endParaRPr>
                     </a:p>
                   </a:txBody>
-                  <a:tcPr marL="91440" marR="91440" marT="45720" marB="45720" anchor="ctr">
+                  <a:tcPr anchor="ctr">
                     <a:lnL w="6350" cap="flat" cmpd="sng" algn="ctr">
                       <a:solidFill>
                         <a:srgbClr val="D8DEE4"/>
@@ -2895,7 +2667,7 @@
                     <a:bodyPr/>
                     <a:lstStyle/>
                     <a:p>
-                      <a:pPr indent="0" marL="0">
+                      <a:pPr marL="0" indent="0">
                         <a:buNone/>
                       </a:pPr>
                       <a:r>
@@ -2916,7 +2688,7 @@
                       </a:endParaRPr>
                     </a:p>
                   </a:txBody>
-                  <a:tcPr marL="91440" marR="91440" marT="45720" marB="45720" anchor="ctr">
+                  <a:tcPr anchor="ctr">
                     <a:lnL w="6350" cap="flat" cmpd="sng" algn="ctr">
                       <a:solidFill>
                         <a:srgbClr val="D8DEE4"/>
@@ -2955,6 +2727,11 @@
                     </a:lnB>
                   </a:tcPr>
                 </a:tc>
+                <a:extLst>
+                  <a:ext uri="{0D108BD9-81ED-4DB2-BD59-A6C34878D82A}">
+                    <a16:rowId xmlns:a16="http://schemas.microsoft.com/office/drawing/2014/main" val="10004"/>
+                  </a:ext>
+                </a:extLst>
               </a:tr>
             </a:tbl>
           </a:graphicData>
@@ -3001,7 +2778,7 @@
           <a:bodyPr wrap="square" lIns="0" tIns="0" rIns="0" bIns="0" rtlCol="0" anchor="ctr"/>
           <a:lstStyle/>
           <a:p>
-            <a:pPr indent="0" marL="0">
+            <a:pPr marL="0" indent="0">
               <a:buNone/>
             </a:pPr>
             <a:r>
@@ -3040,7 +2817,7 @@
           <a:bodyPr wrap="square" lIns="0" tIns="0" rIns="0" bIns="0" rtlCol="0" anchor="ctr"/>
           <a:lstStyle/>
           <a:p>
-            <a:pPr indent="0" marL="0">
+            <a:pPr marL="0" indent="0">
               <a:lnSpc>
                 <a:spcPct val="115000"/>
               </a:lnSpc>
@@ -3082,7 +2859,7 @@
           <a:bodyPr wrap="square" lIns="0" tIns="0" rIns="0" bIns="0" rtlCol="0" anchor="ctr"/>
           <a:lstStyle/>
           <a:p>
-            <a:pPr indent="0" marL="0">
+            <a:pPr marL="0" indent="0">
               <a:lnSpc>
                 <a:spcPct val="115000"/>
               </a:lnSpc>
@@ -3124,7 +2901,7 @@
           <a:bodyPr wrap="square" lIns="0" tIns="0" rIns="0" bIns="0" rtlCol="0" anchor="ctr"/>
           <a:lstStyle/>
           <a:p>
-            <a:pPr indent="0" marL="0">
+            <a:pPr marL="0" indent="0">
               <a:lnSpc>
                 <a:spcPct val="115000"/>
               </a:lnSpc>
@@ -3166,7 +2943,7 @@
           <a:bodyPr wrap="square" lIns="0" tIns="0" rIns="0" bIns="0" rtlCol="0" anchor="ctr"/>
           <a:lstStyle/>
           <a:p>
-            <a:pPr indent="0" marL="0">
+            <a:pPr marL="0" indent="0">
               <a:lnSpc>
                 <a:spcPct val="115000"/>
               </a:lnSpc>
@@ -3189,7 +2966,7 @@
       </p:sp>
       <p:sp>
         <p:nvSpPr>
-          <p:cNvPr id="11" name="Shape 8"/>
+          <p:cNvPr id="4" name="Shape 8"/>
           <p:cNvSpPr/>
           <p:nvPr/>
         </p:nvSpPr>
@@ -3231,7 +3008,7 @@
           <a:bodyPr wrap="square" lIns="0" tIns="0" rIns="0" bIns="0" rtlCol="0" anchor="ctr"/>
           <a:lstStyle/>
           <a:p>
-            <a:pPr indent="0" marL="0">
+            <a:pPr marL="0" indent="0">
               <a:lnSpc>
                 <a:spcPct val="120000"/>
               </a:lnSpc>
@@ -3273,7 +3050,7 @@
           <a:bodyPr wrap="square" lIns="0" tIns="0" rIns="0" bIns="0" rtlCol="0" anchor="ctr"/>
           <a:lstStyle/>
           <a:p>
-            <a:pPr algn="r" indent="0" marL="0">
+            <a:pPr marL="0" indent="0" algn="r">
               <a:buNone/>
             </a:pPr>
             <a:r>
@@ -3307,6 +3084,7 @@
         <a:solidFill>
           <a:srgbClr val="FFFFFF"/>
         </a:solidFill>
+        <a:effectLst/>
       </p:bgPr>
     </p:bg>
     <p:spTree>
@@ -3344,11 +3122,11 @@
           <a:bodyPr wrap="square" lIns="0" tIns="0" rIns="0" bIns="0" rtlCol="0" anchor="ctr"/>
           <a:lstStyle/>
           <a:p>
-            <a:pPr indent="0" marL="0">
-              <a:buNone/>
-            </a:pPr>
-            <a:r>
-              <a:rPr lang="en-US" sz="1100" b="1" spc="200" kern="0" dirty="0">
+            <a:pPr marL="0" indent="0">
+              <a:buNone/>
+            </a:pPr>
+            <a:r>
+              <a:rPr lang="en-US" sz="1100" b="1" kern="0" spc="200" dirty="0">
                 <a:solidFill>
                   <a:srgbClr val="0F6E56"/>
                 </a:solidFill>
@@ -3383,7 +3161,7 @@
           <a:bodyPr wrap="square" lIns="0" tIns="0" rIns="0" bIns="0" rtlCol="0" anchor="ctr"/>
           <a:lstStyle/>
           <a:p>
-            <a:pPr indent="0" marL="0">
+            <a:pPr marL="0" indent="0">
               <a:buNone/>
             </a:pPr>
             <a:r>
@@ -3442,7 +3220,7 @@
           <a:bodyPr wrap="square" lIns="0" tIns="0" rIns="0" bIns="0" rtlCol="0" anchor="ctr"/>
           <a:lstStyle/>
           <a:p>
-            <a:pPr indent="0" marL="0">
+            <a:pPr marL="0" indent="0">
               <a:lnSpc>
                 <a:spcPct val="110000"/>
               </a:lnSpc>
@@ -3484,7 +3262,7 @@
           <a:bodyPr wrap="square" lIns="0" tIns="0" rIns="0" bIns="0" rtlCol="0" anchor="ctr"/>
           <a:lstStyle/>
           <a:p>
-            <a:pPr indent="0" marL="0">
+            <a:pPr marL="0" indent="0">
               <a:lnSpc>
                 <a:spcPct val="115000"/>
               </a:lnSpc>
@@ -3546,7 +3324,7 @@
           <a:bodyPr wrap="square" lIns="0" tIns="0" rIns="0" bIns="0" rtlCol="0" anchor="ctr"/>
           <a:lstStyle/>
           <a:p>
-            <a:pPr indent="0" marL="0">
+            <a:pPr marL="0" indent="0">
               <a:lnSpc>
                 <a:spcPct val="110000"/>
               </a:lnSpc>
@@ -3588,7 +3366,7 @@
           <a:bodyPr wrap="square" lIns="0" tIns="0" rIns="0" bIns="0" rtlCol="0" anchor="ctr"/>
           <a:lstStyle/>
           <a:p>
-            <a:pPr indent="0" marL="0">
+            <a:pPr marL="0" indent="0">
               <a:lnSpc>
                 <a:spcPct val="115000"/>
               </a:lnSpc>
@@ -3650,7 +3428,7 @@
           <a:bodyPr wrap="square" lIns="0" tIns="0" rIns="0" bIns="0" rtlCol="0" anchor="ctr"/>
           <a:lstStyle/>
           <a:p>
-            <a:pPr indent="0" marL="0">
+            <a:pPr marL="0" indent="0">
               <a:lnSpc>
                 <a:spcPct val="110000"/>
               </a:lnSpc>
@@ -3692,7 +3470,7 @@
           <a:bodyPr wrap="square" lIns="0" tIns="0" rIns="0" bIns="0" rtlCol="0" anchor="ctr"/>
           <a:lstStyle/>
           <a:p>
-            <a:pPr indent="0" marL="0">
+            <a:pPr marL="0" indent="0">
               <a:lnSpc>
                 <a:spcPct val="115000"/>
               </a:lnSpc>
@@ -3754,7 +3532,7 @@
           <a:bodyPr wrap="square" lIns="0" tIns="0" rIns="0" bIns="0" rtlCol="0" anchor="ctr"/>
           <a:lstStyle/>
           <a:p>
-            <a:pPr indent="0" marL="0">
+            <a:pPr marL="0" indent="0">
               <a:lnSpc>
                 <a:spcPct val="110000"/>
               </a:lnSpc>
@@ -3796,7 +3574,7 @@
           <a:bodyPr wrap="square" lIns="0" tIns="0" rIns="0" bIns="0" rtlCol="0" anchor="ctr"/>
           <a:lstStyle/>
           <a:p>
-            <a:pPr indent="0" marL="0">
+            <a:pPr marL="0" indent="0">
               <a:lnSpc>
                 <a:spcPct val="115000"/>
               </a:lnSpc>
@@ -3858,7 +3636,7 @@
           <a:bodyPr wrap="square" lIns="0" tIns="0" rIns="0" bIns="0" rtlCol="0" anchor="ctr"/>
           <a:lstStyle/>
           <a:p>
-            <a:pPr indent="0" marL="0">
+            <a:pPr marL="0" indent="0">
               <a:lnSpc>
                 <a:spcPct val="110000"/>
               </a:lnSpc>
@@ -3900,7 +3678,7 @@
           <a:bodyPr wrap="square" lIns="0" tIns="0" rIns="0" bIns="0" rtlCol="0" anchor="ctr"/>
           <a:lstStyle/>
           <a:p>
-            <a:pPr indent="0" marL="0">
+            <a:pPr marL="0" indent="0">
               <a:lnSpc>
                 <a:spcPct val="115000"/>
               </a:lnSpc>
@@ -3942,7 +3720,7 @@
           <a:bodyPr wrap="square" lIns="0" tIns="0" rIns="0" bIns="0" rtlCol="0" anchor="ctr"/>
           <a:lstStyle/>
           <a:p>
-            <a:pPr algn="r" indent="0" marL="0">
+            <a:pPr marL="0" indent="0" algn="r">
               <a:buNone/>
             </a:pPr>
             <a:r>
@@ -3976,6 +3754,7 @@
         <a:solidFill>
           <a:srgbClr val="0F1B2D"/>
         </a:solidFill>
+        <a:effectLst/>
       </p:bgPr>
     </p:bg>
     <p:spTree>
@@ -4013,7 +3792,7 @@
           <a:bodyPr wrap="square" lIns="0" tIns="0" rIns="0" bIns="0" rtlCol="0" anchor="ctr"/>
           <a:lstStyle/>
           <a:p>
-            <a:pPr indent="0" marL="0">
+            <a:pPr marL="0" indent="0">
               <a:lnSpc>
                 <a:spcPct val="115000"/>
               </a:lnSpc>
@@ -4078,11 +3857,11 @@
           <a:bodyPr wrap="square" lIns="0" tIns="0" rIns="0" bIns="0" rtlCol="0" anchor="ctr"/>
           <a:lstStyle/>
           <a:p>
-            <a:pPr indent="0" marL="0">
-              <a:buNone/>
-            </a:pPr>
-            <a:r>
-              <a:rPr lang="en-US" sz="1100" b="1" spc="200" kern="0" dirty="0">
+            <a:pPr marL="0" indent="0">
+              <a:buNone/>
+            </a:pPr>
+            <a:r>
+              <a:rPr lang="en-US" sz="1100" b="1" kern="0" spc="200" dirty="0">
                 <a:solidFill>
                   <a:srgbClr val="9FB0C7"/>
                 </a:solidFill>
@@ -4117,7 +3896,7 @@
           <a:bodyPr wrap="square" lIns="0" tIns="0" rIns="0" bIns="0" rtlCol="0" anchor="ctr"/>
           <a:lstStyle/>
           <a:p>
-            <a:pPr indent="0" marL="0">
+            <a:pPr marL="0" indent="0">
               <a:buNone/>
             </a:pPr>
             <a:r>
@@ -4156,7 +3935,7 @@
           <a:bodyPr wrap="square" lIns="0" tIns="0" rIns="0" bIns="0" rtlCol="0" anchor="ctr"/>
           <a:lstStyle/>
           <a:p>
-            <a:pPr indent="0" marL="0">
+            <a:pPr marL="0" indent="0">
               <a:buNone/>
             </a:pPr>
             <a:r>
@@ -4195,7 +3974,7 @@
           <a:bodyPr wrap="square" lIns="0" tIns="0" rIns="0" bIns="0" rtlCol="0" anchor="ctr"/>
           <a:lstStyle/>
           <a:p>
-            <a:pPr indent="0" marL="0">
+            <a:pPr marL="0" indent="0">
               <a:buNone/>
             </a:pPr>
             <a:r>
@@ -4234,11 +4013,11 @@
           <a:bodyPr wrap="square" lIns="0" tIns="0" rIns="0" bIns="0" rtlCol="0" anchor="ctr"/>
           <a:lstStyle/>
           <a:p>
-            <a:pPr indent="0" marL="0">
-              <a:buNone/>
-            </a:pPr>
-            <a:r>
-              <a:rPr lang="en-US" sz="1100" b="1" spc="200" kern="0" dirty="0">
+            <a:pPr marL="0" indent="0">
+              <a:buNone/>
+            </a:pPr>
+            <a:r>
+              <a:rPr lang="en-US" sz="1100" b="1" kern="0" spc="200" dirty="0">
                 <a:solidFill>
                   <a:srgbClr val="9FB0C7"/>
                 </a:solidFill>
@@ -4273,7 +4052,7 @@
           <a:bodyPr wrap="square" lIns="0" tIns="0" rIns="0" bIns="0" rtlCol="0" anchor="ctr"/>
           <a:lstStyle/>
           <a:p>
-            <a:pPr indent="0" marL="0">
+            <a:pPr marL="0" indent="0">
               <a:buNone/>
             </a:pPr>
             <a:r>
@@ -4312,11 +4091,11 @@
           <a:bodyPr wrap="square" lIns="0" tIns="0" rIns="0" bIns="0" rtlCol="0" anchor="ctr"/>
           <a:lstStyle/>
           <a:p>
-            <a:pPr indent="0" marL="0">
-              <a:buNone/>
-            </a:pPr>
-            <a:r>
-              <a:rPr lang="en-US" sz="1050" b="1" spc="100" kern="0" dirty="0">
+            <a:pPr marL="0" indent="0">
+              <a:buNone/>
+            </a:pPr>
+            <a:r>
+              <a:rPr lang="en-US" sz="1050" b="1" kern="0" spc="100" dirty="0">
                 <a:solidFill>
                   <a:srgbClr val="C7922E"/>
                 </a:solidFill>
@@ -4346,6 +4125,7 @@
         <a:solidFill>
           <a:srgbClr val="FFFFFF"/>
         </a:solidFill>
+        <a:effectLst/>
       </p:bgPr>
     </p:bg>
     <p:spTree>
@@ -4383,11 +4163,11 @@
           <a:bodyPr wrap="square" lIns="0" tIns="0" rIns="0" bIns="0" rtlCol="0" anchor="ctr"/>
           <a:lstStyle/>
           <a:p>
-            <a:pPr indent="0" marL="0">
-              <a:buNone/>
-            </a:pPr>
-            <a:r>
-              <a:rPr lang="en-US" sz="1100" b="1" spc="200" kern="0" dirty="0">
+            <a:pPr marL="0" indent="0">
+              <a:buNone/>
+            </a:pPr>
+            <a:r>
+              <a:rPr lang="en-US" sz="1100" b="1" kern="0" spc="200" dirty="0">
                 <a:solidFill>
                   <a:srgbClr val="0F6E56"/>
                 </a:solidFill>
@@ -4422,7 +4202,7 @@
           <a:bodyPr wrap="square" lIns="0" tIns="0" rIns="0" bIns="0" rtlCol="0" anchor="ctr"/>
           <a:lstStyle/>
           <a:p>
-            <a:pPr indent="0" marL="0">
+            <a:pPr marL="0" indent="0">
               <a:buNone/>
             </a:pPr>
             <a:r>
@@ -4481,7 +4261,7 @@
           <a:bodyPr wrap="square" lIns="0" tIns="0" rIns="0" bIns="0" rtlCol="0" anchor="ctr"/>
           <a:lstStyle/>
           <a:p>
-            <a:pPr algn="ctr" indent="0" marL="0">
+            <a:pPr marL="0" indent="0" algn="ctr">
               <a:buNone/>
             </a:pPr>
             <a:r>
@@ -4520,7 +4300,7 @@
           <a:bodyPr wrap="square" lIns="0" tIns="0" rIns="0" bIns="0" rtlCol="0" anchor="ctr"/>
           <a:lstStyle/>
           <a:p>
-            <a:pPr algn="ctr" indent="0" marL="0">
+            <a:pPr marL="0" indent="0" algn="ctr">
               <a:lnSpc>
                 <a:spcPct val="120000"/>
               </a:lnSpc>
@@ -4540,7 +4320,7 @@
             <a:endParaRPr lang="en-US" sz="1300" dirty="0"/>
           </a:p>
           <a:p>
-            <a:pPr algn="ctr" indent="0" marL="0">
+            <a:pPr marL="0" indent="0" algn="ctr">
               <a:lnSpc>
                 <a:spcPct val="120000"/>
               </a:lnSpc>
@@ -4582,7 +4362,7 @@
           <a:bodyPr wrap="square" lIns="0" tIns="0" rIns="0" bIns="0" rtlCol="0" anchor="ctr"/>
           <a:lstStyle/>
           <a:p>
-            <a:pPr indent="0" marL="0">
+            <a:pPr marL="0" indent="0">
               <a:lnSpc>
                 <a:spcPct val="130000"/>
               </a:lnSpc>
@@ -4599,7 +4379,155 @@
               </a:rPr>
               <a:t>Hajj concentrates roughly </a:t>
             </a:r>
-            <a:pPr indent="0" marL="0">
+            <a:r>
+              <a:rPr lang="en-US" sz="1500" b="1" dirty="0">
+                <a:solidFill>
+                  <a:srgbClr val="0F6E56"/>
+                </a:solidFill>
+                <a:latin typeface="Calibri" pitchFamily="34" charset="0"/>
+                <a:ea typeface="Calibri" pitchFamily="34" charset="-122"/>
+                <a:cs typeface="Calibri" pitchFamily="34" charset="-120"/>
+              </a:rPr>
+              <a:t>two million people</a:t>
+            </a:r>
+            <a:r>
+              <a:rPr lang="en-US" sz="1500" dirty="0">
+                <a:solidFill>
+                  <a:srgbClr val="16202B"/>
+                </a:solidFill>
+                <a:latin typeface="Calibri" pitchFamily="34" charset="0"/>
+                <a:ea typeface="Calibri" pitchFamily="34" charset="-122"/>
+                <a:cs typeface="Calibri" pitchFamily="34" charset="-120"/>
+              </a:rPr>
+              <a:t> into a few square kilometres of Mina. There is no dense sensor grid over the site, and installing one is a multi-year civil project.</a:t>
+            </a:r>
+            <a:endParaRPr lang="en-US" sz="1500" dirty="0"/>
+          </a:p>
+        </p:txBody>
+      </p:sp>
+      <p:sp>
+        <p:nvSpPr>
+          <p:cNvPr id="8" name="Shape 6"/>
+          <p:cNvSpPr/>
+          <p:nvPr/>
+        </p:nvSpPr>
+        <p:spPr>
+          <a:xfrm>
+            <a:off x="4114800" y="3154680"/>
+            <a:ext cx="7498080" cy="1005840"/>
+          </a:xfrm>
+          <a:prstGeom prst="rect">
+            <a:avLst/>
+          </a:prstGeom>
+          <a:solidFill>
+            <a:srgbClr val="EEF1F4"/>
+          </a:solidFill>
+          <a:ln/>
+        </p:spPr>
+      </p:sp>
+      <p:sp>
+        <p:nvSpPr>
+          <p:cNvPr id="9" name="Text 7"/>
+          <p:cNvSpPr/>
+          <p:nvPr/>
+        </p:nvSpPr>
+        <p:spPr>
+          <a:xfrm>
+            <a:off x="4343400" y="3273552"/>
+            <a:ext cx="7040880" cy="320040"/>
+          </a:xfrm>
+          <a:prstGeom prst="rect">
+            <a:avLst/>
+          </a:prstGeom>
+          <a:noFill/>
+          <a:ln/>
+        </p:spPr>
+        <p:txBody>
+          <a:bodyPr wrap="square" lIns="0" tIns="0" rIns="0" bIns="0" rtlCol="0" anchor="ctr"/>
+          <a:lstStyle/>
+          <a:p>
+            <a:pPr marL="0" indent="0">
+              <a:buNone/>
+            </a:pPr>
+            <a:r>
+              <a:rPr lang="en-US" sz="1300" b="1" dirty="0">
+                <a:solidFill>
+                  <a:srgbClr val="B23A2E"/>
+                </a:solidFill>
+                <a:latin typeface="Calibri" pitchFamily="34" charset="0"/>
+                <a:ea typeface="Calibri" pitchFamily="34" charset="-122"/>
+                <a:cs typeface="Calibri" pitchFamily="34" charset="-120"/>
+              </a:rPr>
+              <a:t>The compounding failure</a:t>
+            </a:r>
+            <a:endParaRPr lang="en-US" sz="1300" dirty="0"/>
+          </a:p>
+        </p:txBody>
+      </p:sp>
+      <p:sp>
+        <p:nvSpPr>
+          <p:cNvPr id="10" name="Text 8"/>
+          <p:cNvSpPr/>
+          <p:nvPr/>
+        </p:nvSpPr>
+        <p:spPr>
+          <a:xfrm>
+            <a:off x="4343400" y="3584448"/>
+            <a:ext cx="7040880" cy="548640"/>
+          </a:xfrm>
+          <a:prstGeom prst="rect">
+            <a:avLst/>
+          </a:prstGeom>
+          <a:noFill/>
+          <a:ln/>
+        </p:spPr>
+        <p:txBody>
+          <a:bodyPr wrap="square" lIns="0" tIns="0" rIns="0" bIns="0" rtlCol="0" anchor="ctr"/>
+          <a:lstStyle/>
+          <a:p>
+            <a:pPr marL="0" indent="0">
+              <a:lnSpc>
+                <a:spcPct val="120000"/>
+              </a:lnSpc>
+              <a:buNone/>
+            </a:pPr>
+            <a:r>
+              <a:rPr lang="en-US" sz="1250" dirty="0">
+                <a:solidFill>
+                  <a:srgbClr val="16202B"/>
+                </a:solidFill>
+                <a:latin typeface="Calibri" pitchFamily="34" charset="0"/>
+                <a:ea typeface="Calibri" pitchFamily="34" charset="-122"/>
+                <a:cs typeface="Calibri" pitchFamily="34" charset="-120"/>
+              </a:rPr>
+              <a:t>When density spikes, the cellular network degrades — at exactly the moment responders most need connectivity. Congestion is simultaneously the symptom of the danger and the obstacle to responding to it.</a:t>
+            </a:r>
+            <a:endParaRPr lang="en-US" sz="1250" dirty="0"/>
+          </a:p>
+        </p:txBody>
+      </p:sp>
+      <p:sp>
+        <p:nvSpPr>
+          <p:cNvPr id="11" name="Text 9"/>
+          <p:cNvSpPr/>
+          <p:nvPr/>
+        </p:nvSpPr>
+        <p:spPr>
+          <a:xfrm>
+            <a:off x="4114800" y="4343400"/>
+            <a:ext cx="7498080" cy="914400"/>
+          </a:xfrm>
+          <a:prstGeom prst="rect">
+            <a:avLst/>
+          </a:prstGeom>
+          <a:noFill/>
+          <a:ln/>
+        </p:spPr>
+        <p:txBody>
+          <a:bodyPr wrap="square" lIns="0" tIns="0" rIns="0" bIns="0" rtlCol="0" anchor="ctr"/>
+          <a:lstStyle/>
+          <a:p>
+            <a:pPr marL="0" indent="0">
               <a:lnSpc>
                 <a:spcPct val="130000"/>
               </a:lnSpc>
@@ -4608,20 +4536,14 @@
             <a:r>
               <a:rPr lang="en-US" sz="1500" b="1" dirty="0">
                 <a:solidFill>
-                  <a:srgbClr val="0F6E56"/>
+                  <a:srgbClr val="16202B"/>
                 </a:solidFill>
                 <a:latin typeface="Calibri" pitchFamily="34" charset="0"/>
                 <a:ea typeface="Calibri" pitchFamily="34" charset="-122"/>
                 <a:cs typeface="Calibri" pitchFamily="34" charset="-120"/>
               </a:rPr>
-              <a:t>two million people</a:t>
-            </a:r>
-            <a:pPr indent="0" marL="0">
-              <a:lnSpc>
-                <a:spcPct val="130000"/>
-              </a:lnSpc>
-              <a:buNone/>
-            </a:pPr>
+              <a:t>But every pilgrim already carries a handset </a:t>
+            </a:r>
             <a:r>
               <a:rPr lang="en-US" sz="1500" dirty="0">
                 <a:solidFill>
@@ -4631,166 +4553,6 @@
                 <a:ea typeface="Calibri" pitchFamily="34" charset="-122"/>
                 <a:cs typeface="Calibri" pitchFamily="34" charset="-120"/>
               </a:rPr>
-              <a:t> into a few square kilometres of Mina. There is no dense sensor grid over the site, and installing one is a multi-year civil project.</a:t>
-            </a:r>
-            <a:endParaRPr lang="en-US" sz="1500" dirty="0"/>
-          </a:p>
-        </p:txBody>
-      </p:sp>
-      <p:sp>
-        <p:nvSpPr>
-          <p:cNvPr id="8" name="Shape 6"/>
-          <p:cNvSpPr/>
-          <p:nvPr/>
-        </p:nvSpPr>
-        <p:spPr>
-          <a:xfrm>
-            <a:off x="4114800" y="3154680"/>
-            <a:ext cx="7498080" cy="1005840"/>
-          </a:xfrm>
-          <a:prstGeom prst="rect">
-            <a:avLst/>
-          </a:prstGeom>
-          <a:solidFill>
-            <a:srgbClr val="EEF1F4"/>
-          </a:solidFill>
-          <a:ln/>
-        </p:spPr>
-      </p:sp>
-      <p:sp>
-        <p:nvSpPr>
-          <p:cNvPr id="9" name="Text 7"/>
-          <p:cNvSpPr/>
-          <p:nvPr/>
-        </p:nvSpPr>
-        <p:spPr>
-          <a:xfrm>
-            <a:off x="4343400" y="3273552"/>
-            <a:ext cx="7040880" cy="320040"/>
-          </a:xfrm>
-          <a:prstGeom prst="rect">
-            <a:avLst/>
-          </a:prstGeom>
-          <a:noFill/>
-          <a:ln/>
-        </p:spPr>
-        <p:txBody>
-          <a:bodyPr wrap="square" lIns="0" tIns="0" rIns="0" bIns="0" rtlCol="0" anchor="ctr"/>
-          <a:lstStyle/>
-          <a:p>
-            <a:pPr indent="0" marL="0">
-              <a:buNone/>
-            </a:pPr>
-            <a:r>
-              <a:rPr lang="en-US" sz="1300" b="1" dirty="0">
-                <a:solidFill>
-                  <a:srgbClr val="B23A2E"/>
-                </a:solidFill>
-                <a:latin typeface="Calibri" pitchFamily="34" charset="0"/>
-                <a:ea typeface="Calibri" pitchFamily="34" charset="-122"/>
-                <a:cs typeface="Calibri" pitchFamily="34" charset="-120"/>
-              </a:rPr>
-              <a:t>The compounding failure</a:t>
-            </a:r>
-            <a:endParaRPr lang="en-US" sz="1300" dirty="0"/>
-          </a:p>
-        </p:txBody>
-      </p:sp>
-      <p:sp>
-        <p:nvSpPr>
-          <p:cNvPr id="10" name="Text 8"/>
-          <p:cNvSpPr/>
-          <p:nvPr/>
-        </p:nvSpPr>
-        <p:spPr>
-          <a:xfrm>
-            <a:off x="4343400" y="3584448"/>
-            <a:ext cx="7040880" cy="548640"/>
-          </a:xfrm>
-          <a:prstGeom prst="rect">
-            <a:avLst/>
-          </a:prstGeom>
-          <a:noFill/>
-          <a:ln/>
-        </p:spPr>
-        <p:txBody>
-          <a:bodyPr wrap="square" lIns="0" tIns="0" rIns="0" bIns="0" rtlCol="0" anchor="ctr"/>
-          <a:lstStyle/>
-          <a:p>
-            <a:pPr indent="0" marL="0">
-              <a:lnSpc>
-                <a:spcPct val="120000"/>
-              </a:lnSpc>
-              <a:buNone/>
-            </a:pPr>
-            <a:r>
-              <a:rPr lang="en-US" sz="1250" dirty="0">
-                <a:solidFill>
-                  <a:srgbClr val="16202B"/>
-                </a:solidFill>
-                <a:latin typeface="Calibri" pitchFamily="34" charset="0"/>
-                <a:ea typeface="Calibri" pitchFamily="34" charset="-122"/>
-                <a:cs typeface="Calibri" pitchFamily="34" charset="-120"/>
-              </a:rPr>
-              <a:t>When density spikes, the cellular network degrades — at exactly the moment responders most need connectivity. Congestion is simultaneously the symptom of the danger and the obstacle to responding to it.</a:t>
-            </a:r>
-            <a:endParaRPr lang="en-US" sz="1250" dirty="0"/>
-          </a:p>
-        </p:txBody>
-      </p:sp>
-      <p:sp>
-        <p:nvSpPr>
-          <p:cNvPr id="11" name="Text 9"/>
-          <p:cNvSpPr/>
-          <p:nvPr/>
-        </p:nvSpPr>
-        <p:spPr>
-          <a:xfrm>
-            <a:off x="4114800" y="4343400"/>
-            <a:ext cx="7498080" cy="914400"/>
-          </a:xfrm>
-          <a:prstGeom prst="rect">
-            <a:avLst/>
-          </a:prstGeom>
-          <a:noFill/>
-          <a:ln/>
-        </p:spPr>
-        <p:txBody>
-          <a:bodyPr wrap="square" lIns="0" tIns="0" rIns="0" bIns="0" rtlCol="0" anchor="ctr"/>
-          <a:lstStyle/>
-          <a:p>
-            <a:pPr indent="0" marL="0">
-              <a:lnSpc>
-                <a:spcPct val="130000"/>
-              </a:lnSpc>
-              <a:buNone/>
-            </a:pPr>
-            <a:r>
-              <a:rPr lang="en-US" sz="1500" b="1" dirty="0">
-                <a:solidFill>
-                  <a:srgbClr val="16202B"/>
-                </a:solidFill>
-                <a:latin typeface="Calibri" pitchFamily="34" charset="0"/>
-                <a:ea typeface="Calibri" pitchFamily="34" charset="-122"/>
-                <a:cs typeface="Calibri" pitchFamily="34" charset="-120"/>
-              </a:rPr>
-              <a:t>But every pilgrim already carries a handset </a:t>
-            </a:r>
-            <a:pPr indent="0" marL="0">
-              <a:lnSpc>
-                <a:spcPct val="130000"/>
-              </a:lnSpc>
-              <a:buNone/>
-            </a:pPr>
-            <a:r>
-              <a:rPr lang="en-US" sz="1500" dirty="0">
-                <a:solidFill>
-                  <a:srgbClr val="16202B"/>
-                </a:solidFill>
-                <a:latin typeface="Calibri" pitchFamily="34" charset="0"/>
-                <a:ea typeface="Calibri" pitchFamily="34" charset="-122"/>
-                <a:cs typeface="Calibri" pitchFamily="34" charset="-120"/>
-              </a:rPr>
               <a:t>— and the network already knows something about all of them. That signal already exists; nobody is reading it as a safety instrument.</a:t>
             </a:r>
             <a:endParaRPr lang="en-US" sz="1500" dirty="0"/>
@@ -4818,7 +4580,7 @@
           <a:bodyPr wrap="square" lIns="0" tIns="0" rIns="0" bIns="0" rtlCol="0" anchor="ctr"/>
           <a:lstStyle/>
           <a:p>
-            <a:pPr algn="r" indent="0" marL="0">
+            <a:pPr marL="0" indent="0" algn="r">
               <a:buNone/>
             </a:pPr>
             <a:r>
@@ -4852,6 +4614,7 @@
         <a:solidFill>
           <a:srgbClr val="FFFFFF"/>
         </a:solidFill>
+        <a:effectLst/>
       </p:bgPr>
     </p:bg>
     <p:spTree>
@@ -4889,11 +4652,11 @@
           <a:bodyPr wrap="square" lIns="0" tIns="0" rIns="0" bIns="0" rtlCol="0" anchor="ctr"/>
           <a:lstStyle/>
           <a:p>
-            <a:pPr indent="0" marL="0">
-              <a:buNone/>
-            </a:pPr>
-            <a:r>
-              <a:rPr lang="en-US" sz="1100" b="1" spc="200" kern="0" dirty="0">
+            <a:pPr marL="0" indent="0">
+              <a:buNone/>
+            </a:pPr>
+            <a:r>
+              <a:rPr lang="en-US" sz="1100" b="1" kern="0" spc="200" dirty="0">
                 <a:solidFill>
                   <a:srgbClr val="0F6E56"/>
                 </a:solidFill>
@@ -4928,7 +4691,7 @@
           <a:bodyPr wrap="square" lIns="0" tIns="0" rIns="0" bIns="0" rtlCol="0" anchor="ctr"/>
           <a:lstStyle/>
           <a:p>
-            <a:pPr indent="0" marL="0">
+            <a:pPr marL="0" indent="0">
               <a:buNone/>
             </a:pPr>
             <a:r>
@@ -4967,7 +4730,7 @@
           <a:bodyPr wrap="square" lIns="0" tIns="0" rIns="0" bIns="0" rtlCol="0" anchor="ctr"/>
           <a:lstStyle/>
           <a:p>
-            <a:pPr indent="0" marL="0">
+            <a:pPr marL="0" indent="0">
               <a:buNone/>
             </a:pPr>
             <a:r>
@@ -4987,7 +4750,7 @@
       </p:sp>
       <p:graphicFrame>
         <p:nvGraphicFramePr>
-          <p:cNvPr id="4" name="Table 0"/>
+          <p:cNvPr id="5" name="Table 0"/>
           <p:cNvGraphicFramePr>
             <a:graphicFrameLocks noGrp="1"/>
           </p:cNvGraphicFramePr>
@@ -5001,17 +4764,41 @@
         </p:nvGraphicFramePr>
         <p:xfrm>
           <a:off x="548640" y="1920240"/>
-          <a:ext cx="5486400" cy="2103120"/>
+          <a:ext cx="5486400" cy="2170176"/>
         </p:xfrm>
         <a:graphic>
           <a:graphicData uri="http://schemas.openxmlformats.org/drawingml/2006/table">
             <a:tbl>
               <a:tblPr/>
               <a:tblGrid>
-                <a:gridCol w="1188720"/>
-                <a:gridCol w="1554480"/>
-                <a:gridCol w="1463040"/>
-                <a:gridCol w="1280160"/>
+                <a:gridCol w="1188720">
+                  <a:extLst>
+                    <a:ext uri="{9D8B030D-6E8A-4147-A177-3AD203B41FA5}">
+                      <a16:colId xmlns:a16="http://schemas.microsoft.com/office/drawing/2014/main" val="20000"/>
+                    </a:ext>
+                  </a:extLst>
+                </a:gridCol>
+                <a:gridCol w="1554480">
+                  <a:extLst>
+                    <a:ext uri="{9D8B030D-6E8A-4147-A177-3AD203B41FA5}">
+                      <a16:colId xmlns:a16="http://schemas.microsoft.com/office/drawing/2014/main" val="20001"/>
+                    </a:ext>
+                  </a:extLst>
+                </a:gridCol>
+                <a:gridCol w="1463040">
+                  <a:extLst>
+                    <a:ext uri="{9D8B030D-6E8A-4147-A177-3AD203B41FA5}">
+                      <a16:colId xmlns:a16="http://schemas.microsoft.com/office/drawing/2014/main" val="20002"/>
+                    </a:ext>
+                  </a:extLst>
+                </a:gridCol>
+                <a:gridCol w="1280160">
+                  <a:extLst>
+                    <a:ext uri="{9D8B030D-6E8A-4147-A177-3AD203B41FA5}">
+                      <a16:colId xmlns:a16="http://schemas.microsoft.com/office/drawing/2014/main" val="20003"/>
+                    </a:ext>
+                  </a:extLst>
+                </a:gridCol>
               </a:tblGrid>
               <a:tr h="420624">
                 <a:tc>
@@ -5019,7 +4806,7 @@
                     <a:bodyPr/>
                     <a:lstStyle/>
                     <a:p>
-                      <a:pPr algn="l" indent="0" marL="0">
+                      <a:pPr marL="0" indent="0" algn="l">
                         <a:buNone/>
                       </a:pPr>
                       <a:r>
@@ -5040,7 +4827,7 @@
                       </a:endParaRPr>
                     </a:p>
                   </a:txBody>
-                  <a:tcPr marL="91440" marR="91440" marT="45720" marB="45720" anchor="ctr">
+                  <a:tcPr anchor="ctr">
                     <a:lnL w="6350" cap="flat" cmpd="sng" algn="ctr">
                       <a:solidFill>
                         <a:srgbClr val="D8DEE4"/>
@@ -5087,7 +4874,7 @@
                     <a:bodyPr/>
                     <a:lstStyle/>
                     <a:p>
-                      <a:pPr algn="l" indent="0" marL="0">
+                      <a:pPr marL="0" indent="0" algn="l">
                         <a:buNone/>
                       </a:pPr>
                       <a:r>
@@ -5108,7 +4895,7 @@
                       </a:endParaRPr>
                     </a:p>
                   </a:txBody>
-                  <a:tcPr marL="91440" marR="91440" marT="45720" marB="45720" anchor="ctr">
+                  <a:tcPr anchor="ctr">
                     <a:lnL w="6350" cap="flat" cmpd="sng" algn="ctr">
                       <a:solidFill>
                         <a:srgbClr val="D8DEE4"/>
@@ -5155,7 +4942,7 @@
                     <a:bodyPr/>
                     <a:lstStyle/>
                     <a:p>
-                      <a:pPr algn="l" indent="0" marL="0">
+                      <a:pPr marL="0" indent="0" algn="l">
                         <a:buNone/>
                       </a:pPr>
                       <a:r>
@@ -5176,7 +4963,7 @@
                       </a:endParaRPr>
                     </a:p>
                   </a:txBody>
-                  <a:tcPr marL="91440" marR="91440" marT="45720" marB="45720" anchor="ctr">
+                  <a:tcPr anchor="ctr">
                     <a:lnL w="6350" cap="flat" cmpd="sng" algn="ctr">
                       <a:solidFill>
                         <a:srgbClr val="D8DEE4"/>
@@ -5223,7 +5010,7 @@
                     <a:bodyPr/>
                     <a:lstStyle/>
                     <a:p>
-                      <a:pPr algn="l" indent="0" marL="0">
+                      <a:pPr marL="0" indent="0" algn="l">
                         <a:buNone/>
                       </a:pPr>
                       <a:r>
@@ -5244,7 +5031,7 @@
                       </a:endParaRPr>
                     </a:p>
                   </a:txBody>
-                  <a:tcPr marL="91440" marR="91440" marT="45720" marB="45720" anchor="ctr">
+                  <a:tcPr anchor="ctr">
                     <a:lnL w="6350" cap="flat" cmpd="sng" algn="ctr">
                       <a:solidFill>
                         <a:srgbClr val="D8DEE4"/>
@@ -5286,6 +5073,11 @@
                     </a:solidFill>
                   </a:tcPr>
                 </a:tc>
+                <a:extLst>
+                  <a:ext uri="{0D108BD9-81ED-4DB2-BD59-A6C34878D82A}">
+                    <a16:rowId xmlns:a16="http://schemas.microsoft.com/office/drawing/2014/main" val="10000"/>
+                  </a:ext>
+                </a:extLst>
               </a:tr>
               <a:tr h="420624">
                 <a:tc>
@@ -5293,7 +5085,7 @@
                     <a:bodyPr/>
                     <a:lstStyle/>
                     <a:p>
-                      <a:pPr algn="l" indent="0" marL="0">
+                      <a:pPr marL="0" indent="0" algn="l">
                         <a:buNone/>
                       </a:pPr>
                       <a:r>
@@ -5314,7 +5106,7 @@
                       </a:endParaRPr>
                     </a:p>
                   </a:txBody>
-                  <a:tcPr marL="91440" marR="91440" marT="45720" marB="45720" anchor="ctr">
+                  <a:tcPr anchor="ctr">
                     <a:lnL w="6350" cap="flat" cmpd="sng" algn="ctr">
                       <a:solidFill>
                         <a:srgbClr val="D8DEE4"/>
@@ -5358,7 +5150,7 @@
                     <a:bodyPr/>
                     <a:lstStyle/>
                     <a:p>
-                      <a:pPr algn="l" indent="0" marL="0">
+                      <a:pPr marL="0" indent="0" algn="l">
                         <a:buNone/>
                       </a:pPr>
                       <a:r>
@@ -5379,7 +5171,7 @@
                       </a:endParaRPr>
                     </a:p>
                   </a:txBody>
-                  <a:tcPr marL="91440" marR="91440" marT="45720" marB="45720" anchor="ctr">
+                  <a:tcPr anchor="ctr">
                     <a:lnL w="6350" cap="flat" cmpd="sng" algn="ctr">
                       <a:solidFill>
                         <a:srgbClr val="D8DEE4"/>
@@ -5423,7 +5215,7 @@
                     <a:bodyPr/>
                     <a:lstStyle/>
                     <a:p>
-                      <a:pPr algn="l" indent="0" marL="0">
+                      <a:pPr marL="0" indent="0" algn="l">
                         <a:buNone/>
                       </a:pPr>
                       <a:r>
@@ -5444,7 +5236,7 @@
                       </a:endParaRPr>
                     </a:p>
                   </a:txBody>
-                  <a:tcPr marL="91440" marR="91440" marT="45720" marB="45720" anchor="ctr">
+                  <a:tcPr anchor="ctr">
                     <a:lnL w="6350" cap="flat" cmpd="sng" algn="ctr">
                       <a:solidFill>
                         <a:srgbClr val="D8DEE4"/>
@@ -5488,7 +5280,7 @@
                     <a:bodyPr/>
                     <a:lstStyle/>
                     <a:p>
-                      <a:pPr algn="l" indent="0" marL="0">
+                      <a:pPr marL="0" indent="0" algn="l">
                         <a:buNone/>
                       </a:pPr>
                       <a:r>
@@ -5509,7 +5301,7 @@
                       </a:endParaRPr>
                     </a:p>
                   </a:txBody>
-                  <a:tcPr marL="91440" marR="91440" marT="45720" marB="45720" anchor="ctr">
+                  <a:tcPr anchor="ctr">
                     <a:lnL w="6350" cap="flat" cmpd="sng" algn="ctr">
                       <a:solidFill>
                         <a:srgbClr val="D8DEE4"/>
@@ -5548,6 +5340,11 @@
                     </a:lnB>
                   </a:tcPr>
                 </a:tc>
+                <a:extLst>
+                  <a:ext uri="{0D108BD9-81ED-4DB2-BD59-A6C34878D82A}">
+                    <a16:rowId xmlns:a16="http://schemas.microsoft.com/office/drawing/2014/main" val="10001"/>
+                  </a:ext>
+                </a:extLst>
               </a:tr>
               <a:tr h="420624">
                 <a:tc>
@@ -5555,7 +5352,7 @@
                     <a:bodyPr/>
                     <a:lstStyle/>
                     <a:p>
-                      <a:pPr algn="l" indent="0" marL="0">
+                      <a:pPr marL="0" indent="0" algn="l">
                         <a:buNone/>
                       </a:pPr>
                       <a:r>
@@ -5576,7 +5373,7 @@
                       </a:endParaRPr>
                     </a:p>
                   </a:txBody>
-                  <a:tcPr marL="91440" marR="91440" marT="45720" marB="45720" anchor="ctr">
+                  <a:tcPr anchor="ctr">
                     <a:lnL w="6350" cap="flat" cmpd="sng" algn="ctr">
                       <a:solidFill>
                         <a:srgbClr val="D8DEE4"/>
@@ -5620,7 +5417,7 @@
                     <a:bodyPr/>
                     <a:lstStyle/>
                     <a:p>
-                      <a:pPr algn="l" indent="0" marL="0">
+                      <a:pPr marL="0" indent="0" algn="l">
                         <a:buNone/>
                       </a:pPr>
                       <a:r>
@@ -5641,7 +5438,7 @@
                       </a:endParaRPr>
                     </a:p>
                   </a:txBody>
-                  <a:tcPr marL="91440" marR="91440" marT="45720" marB="45720" anchor="ctr">
+                  <a:tcPr anchor="ctr">
                     <a:lnL w="6350" cap="flat" cmpd="sng" algn="ctr">
                       <a:solidFill>
                         <a:srgbClr val="D8DEE4"/>
@@ -5685,7 +5482,7 @@
                     <a:bodyPr/>
                     <a:lstStyle/>
                     <a:p>
-                      <a:pPr algn="l" indent="0" marL="0">
+                      <a:pPr marL="0" indent="0" algn="l">
                         <a:buNone/>
                       </a:pPr>
                       <a:r>
@@ -5706,7 +5503,7 @@
                       </a:endParaRPr>
                     </a:p>
                   </a:txBody>
-                  <a:tcPr marL="91440" marR="91440" marT="45720" marB="45720" anchor="ctr">
+                  <a:tcPr anchor="ctr">
                     <a:lnL w="6350" cap="flat" cmpd="sng" algn="ctr">
                       <a:solidFill>
                         <a:srgbClr val="D8DEE4"/>
@@ -5750,7 +5547,7 @@
                     <a:bodyPr/>
                     <a:lstStyle/>
                     <a:p>
-                      <a:pPr algn="l" indent="0" marL="0">
+                      <a:pPr marL="0" indent="0" algn="l">
                         <a:buNone/>
                       </a:pPr>
                       <a:r>
@@ -5771,7 +5568,7 @@
                       </a:endParaRPr>
                     </a:p>
                   </a:txBody>
-                  <a:tcPr marL="91440" marR="91440" marT="45720" marB="45720" anchor="ctr">
+                  <a:tcPr anchor="ctr">
                     <a:lnL w="6350" cap="flat" cmpd="sng" algn="ctr">
                       <a:solidFill>
                         <a:srgbClr val="D8DEE4"/>
@@ -5810,6 +5607,11 @@
                     </a:lnB>
                   </a:tcPr>
                 </a:tc>
+                <a:extLst>
+                  <a:ext uri="{0D108BD9-81ED-4DB2-BD59-A6C34878D82A}">
+                    <a16:rowId xmlns:a16="http://schemas.microsoft.com/office/drawing/2014/main" val="10002"/>
+                  </a:ext>
+                </a:extLst>
               </a:tr>
               <a:tr h="420624">
                 <a:tc>
@@ -5817,7 +5619,7 @@
                     <a:bodyPr/>
                     <a:lstStyle/>
                     <a:p>
-                      <a:pPr algn="l" indent="0" marL="0">
+                      <a:pPr marL="0" indent="0" algn="l">
                         <a:buNone/>
                       </a:pPr>
                       <a:r>
@@ -5838,7 +5640,7 @@
                       </a:endParaRPr>
                     </a:p>
                   </a:txBody>
-                  <a:tcPr marL="91440" marR="91440" marT="45720" marB="45720" anchor="ctr">
+                  <a:tcPr anchor="ctr">
                     <a:lnL w="6350" cap="flat" cmpd="sng" algn="ctr">
                       <a:solidFill>
                         <a:srgbClr val="D8DEE4"/>
@@ -5882,7 +5684,7 @@
                     <a:bodyPr/>
                     <a:lstStyle/>
                     <a:p>
-                      <a:pPr algn="l" indent="0" marL="0">
+                      <a:pPr marL="0" indent="0" algn="l">
                         <a:buNone/>
                       </a:pPr>
                       <a:r>
@@ -5903,7 +5705,7 @@
                       </a:endParaRPr>
                     </a:p>
                   </a:txBody>
-                  <a:tcPr marL="91440" marR="91440" marT="45720" marB="45720" anchor="ctr">
+                  <a:tcPr anchor="ctr">
                     <a:lnL w="6350" cap="flat" cmpd="sng" algn="ctr">
                       <a:solidFill>
                         <a:srgbClr val="D8DEE4"/>
@@ -5947,7 +5749,7 @@
                     <a:bodyPr/>
                     <a:lstStyle/>
                     <a:p>
-                      <a:pPr algn="l" indent="0" marL="0">
+                      <a:pPr marL="0" indent="0" algn="l">
                         <a:buNone/>
                       </a:pPr>
                       <a:r>
@@ -5968,7 +5770,7 @@
                       </a:endParaRPr>
                     </a:p>
                   </a:txBody>
-                  <a:tcPr marL="91440" marR="91440" marT="45720" marB="45720" anchor="ctr">
+                  <a:tcPr anchor="ctr">
                     <a:lnL w="6350" cap="flat" cmpd="sng" algn="ctr">
                       <a:solidFill>
                         <a:srgbClr val="D8DEE4"/>
@@ -6012,7 +5814,7 @@
                     <a:bodyPr/>
                     <a:lstStyle/>
                     <a:p>
-                      <a:pPr algn="l" indent="0" marL="0">
+                      <a:pPr marL="0" indent="0" algn="l">
                         <a:buNone/>
                       </a:pPr>
                       <a:r>
@@ -6033,7 +5835,7 @@
                       </a:endParaRPr>
                     </a:p>
                   </a:txBody>
-                  <a:tcPr marL="91440" marR="91440" marT="45720" marB="45720" anchor="ctr">
+                  <a:tcPr anchor="ctr">
                     <a:lnL w="6350" cap="flat" cmpd="sng" algn="ctr">
                       <a:solidFill>
                         <a:srgbClr val="D8DEE4"/>
@@ -6072,6 +5874,11 @@
                     </a:lnB>
                   </a:tcPr>
                 </a:tc>
+                <a:extLst>
+                  <a:ext uri="{0D108BD9-81ED-4DB2-BD59-A6C34878D82A}">
+                    <a16:rowId xmlns:a16="http://schemas.microsoft.com/office/drawing/2014/main" val="10003"/>
+                  </a:ext>
+                </a:extLst>
               </a:tr>
               <a:tr h="420624">
                 <a:tc>
@@ -6079,7 +5886,7 @@
                     <a:bodyPr/>
                     <a:lstStyle/>
                     <a:p>
-                      <a:pPr algn="l" indent="0" marL="0">
+                      <a:pPr marL="0" indent="0" algn="l">
                         <a:buNone/>
                       </a:pPr>
                       <a:r>
@@ -6100,7 +5907,7 @@
                       </a:endParaRPr>
                     </a:p>
                   </a:txBody>
-                  <a:tcPr marL="91440" marR="91440" marT="45720" marB="45720" anchor="ctr">
+                  <a:tcPr anchor="ctr">
                     <a:lnL w="6350" cap="flat" cmpd="sng" algn="ctr">
                       <a:solidFill>
                         <a:srgbClr val="D8DEE4"/>
@@ -6144,7 +5951,7 @@
                     <a:bodyPr/>
                     <a:lstStyle/>
                     <a:p>
-                      <a:pPr algn="l" indent="0" marL="0">
+                      <a:pPr marL="0" indent="0" algn="l">
                         <a:buNone/>
                       </a:pPr>
                       <a:r>
@@ -6165,7 +5972,7 @@
                       </a:endParaRPr>
                     </a:p>
                   </a:txBody>
-                  <a:tcPr marL="91440" marR="91440" marT="45720" marB="45720" anchor="ctr">
+                  <a:tcPr anchor="ctr">
                     <a:lnL w="6350" cap="flat" cmpd="sng" algn="ctr">
                       <a:solidFill>
                         <a:srgbClr val="D8DEE4"/>
@@ -6209,7 +6016,7 @@
                     <a:bodyPr/>
                     <a:lstStyle/>
                     <a:p>
-                      <a:pPr algn="l" indent="0" marL="0">
+                      <a:pPr marL="0" indent="0" algn="l">
                         <a:buNone/>
                       </a:pPr>
                       <a:r>
@@ -6230,7 +6037,7 @@
                       </a:endParaRPr>
                     </a:p>
                   </a:txBody>
-                  <a:tcPr marL="91440" marR="91440" marT="45720" marB="45720" anchor="ctr">
+                  <a:tcPr anchor="ctr">
                     <a:lnL w="6350" cap="flat" cmpd="sng" algn="ctr">
                       <a:solidFill>
                         <a:srgbClr val="D8DEE4"/>
@@ -6274,7 +6081,7 @@
                     <a:bodyPr/>
                     <a:lstStyle/>
                     <a:p>
-                      <a:pPr algn="l" indent="0" marL="0">
+                      <a:pPr marL="0" indent="0" algn="l">
                         <a:buNone/>
                       </a:pPr>
                       <a:r>
@@ -6295,7 +6102,7 @@
                       </a:endParaRPr>
                     </a:p>
                   </a:txBody>
-                  <a:tcPr marL="91440" marR="91440" marT="45720" marB="45720" anchor="ctr">
+                  <a:tcPr anchor="ctr">
                     <a:lnL w="6350" cap="flat" cmpd="sng" algn="ctr">
                       <a:solidFill>
                         <a:srgbClr val="D8DEE4"/>
@@ -6334,6 +6141,11 @@
                     </a:lnB>
                   </a:tcPr>
                 </a:tc>
+                <a:extLst>
+                  <a:ext uri="{0D108BD9-81ED-4DB2-BD59-A6C34878D82A}">
+                    <a16:rowId xmlns:a16="http://schemas.microsoft.com/office/drawing/2014/main" val="10004"/>
+                  </a:ext>
+                </a:extLst>
               </a:tr>
             </a:tbl>
           </a:graphicData>
@@ -6380,7 +6192,7 @@
           <a:bodyPr wrap="square" lIns="0" tIns="0" rIns="0" bIns="0" rtlCol="0" anchor="ctr"/>
           <a:lstStyle/>
           <a:p>
-            <a:pPr indent="0" marL="0">
+            <a:pPr marL="0" indent="0">
               <a:lnSpc>
                 <a:spcPct val="125000"/>
               </a:lnSpc>
@@ -6422,7 +6234,7 @@
           <a:bodyPr wrap="square" lIns="0" tIns="0" rIns="0" bIns="0" rtlCol="0" anchor="ctr"/>
           <a:lstStyle/>
           <a:p>
-            <a:pPr indent="0" marL="0">
+            <a:pPr marL="0" indent="0">
               <a:lnSpc>
                 <a:spcPct val="130000"/>
               </a:lnSpc>
@@ -6439,12 +6251,6 @@
               </a:rPr>
               <a:t>But is that dispersal, or did telemetry merely improve while the crowd stayed? </a:t>
             </a:r>
-            <a:pPr indent="0" marL="0">
-              <a:lnSpc>
-                <a:spcPct val="130000"/>
-              </a:lnSpc>
-              <a:buNone/>
-            </a:pPr>
             <a:r>
               <a:rPr lang="en-US" sz="1300" dirty="0">
                 <a:solidFill>
@@ -6468,7 +6274,7 @@
         </p:nvSpPr>
         <p:spPr>
           <a:xfrm>
-            <a:off x="548640" y="4206240"/>
+            <a:off x="548640" y="4343400"/>
             <a:ext cx="11109960" cy="1691640"/>
           </a:xfrm>
           <a:prstGeom prst="rect">
@@ -6501,7 +6307,7 @@
           <a:bodyPr wrap="square" lIns="0" tIns="0" rIns="0" bIns="0" rtlCol="0" anchor="ctr"/>
           <a:lstStyle/>
           <a:p>
-            <a:pPr indent="0" marL="0">
+            <a:pPr marL="0" indent="0">
               <a:buNone/>
             </a:pPr>
             <a:r>
@@ -6540,7 +6346,7 @@
           <a:bodyPr wrap="square" lIns="0" tIns="0" rIns="0" bIns="0" rtlCol="0" anchor="ctr"/>
           <a:lstStyle/>
           <a:p>
-            <a:pPr indent="0" marL="0">
+            <a:pPr marL="0" indent="0">
               <a:buNone/>
             </a:pPr>
             <a:r>
@@ -6579,7 +6385,7 @@
           <a:bodyPr wrap="square" lIns="0" tIns="0" rIns="0" bIns="0" rtlCol="0" anchor="ctr"/>
           <a:lstStyle/>
           <a:p>
-            <a:pPr indent="0" marL="0">
+            <a:pPr marL="0" indent="0">
               <a:lnSpc>
                 <a:spcPct val="115000"/>
               </a:lnSpc>
@@ -6599,7 +6405,7 @@
             <a:endParaRPr lang="en-US" sz="1150" dirty="0"/>
           </a:p>
           <a:p>
-            <a:pPr indent="0" marL="0">
+            <a:pPr marL="0" indent="0">
               <a:lnSpc>
                 <a:spcPct val="115000"/>
               </a:lnSpc>
@@ -6641,7 +6447,7 @@
           <a:bodyPr wrap="square" lIns="0" tIns="0" rIns="0" bIns="0" rtlCol="0" anchor="ctr"/>
           <a:lstStyle/>
           <a:p>
-            <a:pPr indent="0" marL="0">
+            <a:pPr marL="0" indent="0">
               <a:buNone/>
             </a:pPr>
             <a:r>
@@ -6680,7 +6486,7 @@
           <a:bodyPr wrap="square" lIns="0" tIns="0" rIns="0" bIns="0" rtlCol="0" anchor="ctr"/>
           <a:lstStyle/>
           <a:p>
-            <a:pPr indent="0" marL="0">
+            <a:pPr marL="0" indent="0">
               <a:lnSpc>
                 <a:spcPct val="115000"/>
               </a:lnSpc>
@@ -6700,7 +6506,7 @@
             <a:endParaRPr lang="en-US" sz="1150" dirty="0"/>
           </a:p>
           <a:p>
-            <a:pPr indent="0" marL="0">
+            <a:pPr marL="0" indent="0">
               <a:lnSpc>
                 <a:spcPct val="115000"/>
               </a:lnSpc>
@@ -6742,7 +6548,7 @@
           <a:bodyPr wrap="square" lIns="0" tIns="0" rIns="0" bIns="0" rtlCol="0" anchor="ctr"/>
           <a:lstStyle/>
           <a:p>
-            <a:pPr indent="0" marL="0">
+            <a:pPr marL="0" indent="0">
               <a:buNone/>
             </a:pPr>
             <a:r>
@@ -6781,7 +6587,7 @@
           <a:bodyPr wrap="square" lIns="0" tIns="0" rIns="0" bIns="0" rtlCol="0" anchor="ctr"/>
           <a:lstStyle/>
           <a:p>
-            <a:pPr indent="0" marL="0">
+            <a:pPr marL="0" indent="0">
               <a:lnSpc>
                 <a:spcPct val="115000"/>
               </a:lnSpc>
@@ -6801,7 +6607,7 @@
             <a:endParaRPr lang="en-US" sz="1150" dirty="0"/>
           </a:p>
           <a:p>
-            <a:pPr indent="0" marL="0">
+            <a:pPr marL="0" indent="0">
               <a:lnSpc>
                 <a:spcPct val="115000"/>
               </a:lnSpc>
@@ -6843,7 +6649,7 @@
           <a:bodyPr wrap="square" lIns="0" tIns="0" rIns="0" bIns="0" rtlCol="0" anchor="ctr"/>
           <a:lstStyle/>
           <a:p>
-            <a:pPr indent="0" marL="0">
+            <a:pPr marL="0" indent="0">
               <a:buNone/>
             </a:pPr>
             <a:r>
@@ -6882,7 +6688,7 @@
           <a:bodyPr wrap="square" lIns="0" tIns="0" rIns="0" bIns="0" rtlCol="0" anchor="ctr"/>
           <a:lstStyle/>
           <a:p>
-            <a:pPr indent="0" marL="0">
+            <a:pPr marL="0" indent="0">
               <a:lnSpc>
                 <a:spcPct val="115000"/>
               </a:lnSpc>
@@ -6902,7 +6708,7 @@
             <a:endParaRPr lang="en-US" sz="1150" dirty="0"/>
           </a:p>
           <a:p>
-            <a:pPr indent="0" marL="0">
+            <a:pPr marL="0" indent="0">
               <a:lnSpc>
                 <a:spcPct val="115000"/>
               </a:lnSpc>
@@ -6944,7 +6750,7 @@
           <a:bodyPr wrap="square" lIns="0" tIns="0" rIns="0" bIns="0" rtlCol="0" anchor="ctr"/>
           <a:lstStyle/>
           <a:p>
-            <a:pPr indent="0" marL="0">
+            <a:pPr marL="0" indent="0">
               <a:buNone/>
             </a:pPr>
             <a:r>
@@ -6983,7 +6789,7 @@
           <a:bodyPr wrap="square" lIns="0" tIns="0" rIns="0" bIns="0" rtlCol="0" anchor="ctr"/>
           <a:lstStyle/>
           <a:p>
-            <a:pPr algn="r" indent="0" marL="0">
+            <a:pPr marL="0" indent="0" algn="r">
               <a:buNone/>
             </a:pPr>
             <a:r>
@@ -7017,6 +6823,7 @@
         <a:solidFill>
           <a:srgbClr val="FFFFFF"/>
         </a:solidFill>
+        <a:effectLst/>
       </p:bgPr>
     </p:bg>
     <p:spTree>
@@ -7054,11 +6861,11 @@
           <a:bodyPr wrap="square" lIns="0" tIns="0" rIns="0" bIns="0" rtlCol="0" anchor="ctr"/>
           <a:lstStyle/>
           <a:p>
-            <a:pPr indent="0" marL="0">
-              <a:buNone/>
-            </a:pPr>
-            <a:r>
-              <a:rPr lang="en-US" sz="1100" b="1" spc="200" kern="0" dirty="0">
+            <a:pPr marL="0" indent="0">
+              <a:buNone/>
+            </a:pPr>
+            <a:r>
+              <a:rPr lang="en-US" sz="1100" b="1" kern="0" spc="200" dirty="0">
                 <a:solidFill>
                   <a:srgbClr val="0F6E56"/>
                 </a:solidFill>
@@ -7093,7 +6900,7 @@
           <a:bodyPr wrap="square" lIns="0" tIns="0" rIns="0" bIns="0" rtlCol="0" anchor="ctr"/>
           <a:lstStyle/>
           <a:p>
-            <a:pPr indent="0" marL="0">
+            <a:pPr marL="0" indent="0">
               <a:buNone/>
             </a:pPr>
             <a:r>
@@ -7132,7 +6939,7 @@
           <a:bodyPr wrap="square" lIns="0" tIns="0" rIns="0" bIns="0" rtlCol="0" anchor="ctr"/>
           <a:lstStyle/>
           <a:p>
-            <a:pPr indent="0" marL="0">
+            <a:pPr marL="0" indent="0">
               <a:buNone/>
             </a:pPr>
             <a:r>
@@ -7196,7 +7003,7 @@
           <a:bodyPr wrap="square" lIns="0" tIns="0" rIns="0" bIns="0" rtlCol="0" anchor="ctr"/>
           <a:lstStyle/>
           <a:p>
-            <a:pPr indent="0" marL="0">
+            <a:pPr marL="0" indent="0">
               <a:buNone/>
             </a:pPr>
             <a:r>
@@ -7235,7 +7042,7 @@
           <a:bodyPr wrap="square" lIns="0" tIns="0" rIns="0" bIns="0" rtlCol="0" anchor="ctr"/>
           <a:lstStyle/>
           <a:p>
-            <a:pPr indent="0" marL="0">
+            <a:pPr marL="0" indent="0">
               <a:buNone/>
             </a:pPr>
             <a:r>
@@ -7274,7 +7081,7 @@
           <a:bodyPr wrap="square" lIns="0" tIns="0" rIns="0" bIns="0" rtlCol="0" anchor="ctr"/>
           <a:lstStyle/>
           <a:p>
-            <a:pPr indent="0" marL="0">
+            <a:pPr marL="0" indent="0">
               <a:buNone/>
             </a:pPr>
             <a:r>
@@ -7313,7 +7120,7 @@
           <a:bodyPr wrap="square" lIns="0" tIns="0" rIns="0" bIns="0" rtlCol="0" anchor="ctr"/>
           <a:lstStyle/>
           <a:p>
-            <a:pPr indent="0" marL="0">
+            <a:pPr marL="0" indent="0">
               <a:buNone/>
             </a:pPr>
             <a:r>
@@ -7352,7 +7159,7 @@
           <a:bodyPr wrap="square" lIns="0" tIns="0" rIns="0" bIns="0" rtlCol="0" anchor="ctr"/>
           <a:lstStyle/>
           <a:p>
-            <a:pPr indent="0" marL="0">
+            <a:pPr marL="0" indent="0">
               <a:lnSpc>
                 <a:spcPct val="120000"/>
               </a:lnSpc>
@@ -7417,7 +7224,7 @@
           <a:bodyPr wrap="square" lIns="0" tIns="0" rIns="0" bIns="0" rtlCol="0" anchor="ctr"/>
           <a:lstStyle/>
           <a:p>
-            <a:pPr indent="0" marL="0">
+            <a:pPr marL="0" indent="0">
               <a:lnSpc>
                 <a:spcPct val="115000"/>
               </a:lnSpc>
@@ -7484,7 +7291,7 @@
           <a:bodyPr wrap="square" lIns="0" tIns="0" rIns="0" bIns="0" rtlCol="0" anchor="ctr"/>
           <a:lstStyle/>
           <a:p>
-            <a:pPr indent="0" marL="0">
+            <a:pPr marL="0" indent="0">
               <a:buNone/>
             </a:pPr>
             <a:r>
@@ -7523,7 +7330,7 @@
           <a:bodyPr wrap="square" lIns="0" tIns="0" rIns="0" bIns="0" rtlCol="0" anchor="ctr"/>
           <a:lstStyle/>
           <a:p>
-            <a:pPr indent="0" marL="0">
+            <a:pPr marL="0" indent="0">
               <a:buNone/>
             </a:pPr>
             <a:r>
@@ -7562,7 +7369,7 @@
           <a:bodyPr wrap="square" lIns="0" tIns="0" rIns="0" bIns="0" rtlCol="0" anchor="ctr"/>
           <a:lstStyle/>
           <a:p>
-            <a:pPr indent="0" marL="0">
+            <a:pPr marL="0" indent="0">
               <a:buNone/>
             </a:pPr>
             <a:r>
@@ -7601,7 +7408,7 @@
           <a:bodyPr wrap="square" lIns="0" tIns="0" rIns="0" bIns="0" rtlCol="0" anchor="ctr"/>
           <a:lstStyle/>
           <a:p>
-            <a:pPr indent="0" marL="0">
+            <a:pPr marL="0" indent="0">
               <a:buNone/>
             </a:pPr>
             <a:r>
@@ -7640,7 +7447,7 @@
           <a:bodyPr wrap="square" lIns="0" tIns="0" rIns="0" bIns="0" rtlCol="0" anchor="ctr"/>
           <a:lstStyle/>
           <a:p>
-            <a:pPr indent="0" marL="0">
+            <a:pPr marL="0" indent="0">
               <a:lnSpc>
                 <a:spcPct val="120000"/>
               </a:lnSpc>
@@ -7682,7 +7489,7 @@
           <a:bodyPr wrap="square" lIns="0" tIns="0" rIns="0" bIns="0" rtlCol="0" anchor="ctr"/>
           <a:lstStyle/>
           <a:p>
-            <a:pPr indent="0" marL="0">
+            <a:pPr marL="0" indent="0">
               <a:lnSpc>
                 <a:spcPct val="120000"/>
               </a:lnSpc>
@@ -7747,7 +7554,7 @@
           <a:bodyPr wrap="square" lIns="0" tIns="0" rIns="0" bIns="0" rtlCol="0" anchor="ctr"/>
           <a:lstStyle/>
           <a:p>
-            <a:pPr indent="0" marL="0">
+            <a:pPr marL="0" indent="0">
               <a:lnSpc>
                 <a:spcPct val="115000"/>
               </a:lnSpc>
@@ -7814,7 +7621,7 @@
           <a:bodyPr wrap="square" lIns="0" tIns="0" rIns="0" bIns="0" rtlCol="0" anchor="ctr"/>
           <a:lstStyle/>
           <a:p>
-            <a:pPr indent="0" marL="0">
+            <a:pPr marL="0" indent="0">
               <a:buNone/>
             </a:pPr>
             <a:r>
@@ -7853,7 +7660,7 @@
           <a:bodyPr wrap="square" lIns="0" tIns="0" rIns="0" bIns="0" rtlCol="0" anchor="ctr"/>
           <a:lstStyle/>
           <a:p>
-            <a:pPr indent="0" marL="0">
+            <a:pPr marL="0" indent="0">
               <a:buNone/>
             </a:pPr>
             <a:r>
@@ -7892,7 +7699,7 @@
           <a:bodyPr wrap="square" lIns="0" tIns="0" rIns="0" bIns="0" rtlCol="0" anchor="ctr"/>
           <a:lstStyle/>
           <a:p>
-            <a:pPr indent="0" marL="0">
+            <a:pPr marL="0" indent="0">
               <a:buNone/>
             </a:pPr>
             <a:r>
@@ -7931,7 +7738,7 @@
           <a:bodyPr wrap="square" lIns="0" tIns="0" rIns="0" bIns="0" rtlCol="0" anchor="ctr"/>
           <a:lstStyle/>
           <a:p>
-            <a:pPr indent="0" marL="0">
+            <a:pPr marL="0" indent="0">
               <a:buNone/>
             </a:pPr>
             <a:r>
@@ -7970,7 +7777,7 @@
           <a:bodyPr wrap="square" lIns="0" tIns="0" rIns="0" bIns="0" rtlCol="0" anchor="ctr"/>
           <a:lstStyle/>
           <a:p>
-            <a:pPr indent="0" marL="0">
+            <a:pPr marL="0" indent="0">
               <a:lnSpc>
                 <a:spcPct val="120000"/>
               </a:lnSpc>
@@ -8012,7 +7819,7 @@
           <a:bodyPr wrap="square" lIns="0" tIns="0" rIns="0" bIns="0" rtlCol="0" anchor="ctr"/>
           <a:lstStyle/>
           <a:p>
-            <a:pPr indent="0" marL="0">
+            <a:pPr marL="0" indent="0">
               <a:lnSpc>
                 <a:spcPct val="120000"/>
               </a:lnSpc>
@@ -8077,7 +7884,7 @@
           <a:bodyPr wrap="square" lIns="0" tIns="0" rIns="0" bIns="0" rtlCol="0" anchor="ctr"/>
           <a:lstStyle/>
           <a:p>
-            <a:pPr indent="0" marL="0">
+            <a:pPr marL="0" indent="0">
               <a:lnSpc>
                 <a:spcPct val="115000"/>
               </a:lnSpc>
@@ -8119,7 +7926,7 @@
           <a:bodyPr wrap="square" lIns="0" tIns="0" rIns="0" bIns="0" rtlCol="0" anchor="ctr"/>
           <a:lstStyle/>
           <a:p>
-            <a:pPr algn="r" indent="0" marL="0">
+            <a:pPr marL="0" indent="0" algn="r">
               <a:buNone/>
             </a:pPr>
             <a:r>
@@ -8153,6 +7960,7 @@
         <a:solidFill>
           <a:srgbClr val="FFFFFF"/>
         </a:solidFill>
+        <a:effectLst/>
       </p:bgPr>
     </p:bg>
     <p:spTree>
@@ -8190,11 +7998,11 @@
           <a:bodyPr wrap="square" lIns="0" tIns="0" rIns="0" bIns="0" rtlCol="0" anchor="ctr"/>
           <a:lstStyle/>
           <a:p>
-            <a:pPr indent="0" marL="0">
-              <a:buNone/>
-            </a:pPr>
-            <a:r>
-              <a:rPr lang="en-US" sz="1100" b="1" spc="200" kern="0" dirty="0">
+            <a:pPr marL="0" indent="0">
+              <a:buNone/>
+            </a:pPr>
+            <a:r>
+              <a:rPr lang="en-US" sz="1100" b="1" kern="0" spc="200" dirty="0">
                 <a:solidFill>
                   <a:srgbClr val="0F6E56"/>
                 </a:solidFill>
@@ -8229,7 +8037,7 @@
           <a:bodyPr wrap="square" lIns="0" tIns="0" rIns="0" bIns="0" rtlCol="0" anchor="ctr"/>
           <a:lstStyle/>
           <a:p>
-            <a:pPr indent="0" marL="0">
+            <a:pPr marL="0" indent="0">
               <a:buNone/>
             </a:pPr>
             <a:r>
@@ -8268,7 +8076,7 @@
           <a:bodyPr wrap="square" lIns="0" tIns="0" rIns="0" bIns="0" rtlCol="0" anchor="ctr"/>
           <a:lstStyle/>
           <a:p>
-            <a:pPr indent="0" marL="0">
+            <a:pPr marL="0" indent="0">
               <a:lnSpc>
                 <a:spcPct val="125000"/>
               </a:lnSpc>
@@ -8312,8 +8120,20 @@
             <a:tbl>
               <a:tblPr/>
               <a:tblGrid>
-                <a:gridCol w="2377440"/>
-                <a:gridCol w="4572000"/>
+                <a:gridCol w="2377440">
+                  <a:extLst>
+                    <a:ext uri="{9D8B030D-6E8A-4147-A177-3AD203B41FA5}">
+                      <a16:colId xmlns:a16="http://schemas.microsoft.com/office/drawing/2014/main" val="20000"/>
+                    </a:ext>
+                  </a:extLst>
+                </a:gridCol>
+                <a:gridCol w="4572000">
+                  <a:extLst>
+                    <a:ext uri="{9D8B030D-6E8A-4147-A177-3AD203B41FA5}">
+                      <a16:colId xmlns:a16="http://schemas.microsoft.com/office/drawing/2014/main" val="20001"/>
+                    </a:ext>
+                  </a:extLst>
+                </a:gridCol>
               </a:tblGrid>
               <a:tr h="514350">
                 <a:tc>
@@ -8321,7 +8141,7 @@
                     <a:bodyPr/>
                     <a:lstStyle/>
                     <a:p>
-                      <a:pPr indent="0" marL="0">
+                      <a:pPr marL="0" indent="0">
                         <a:buNone/>
                       </a:pPr>
                       <a:r>
@@ -8342,7 +8162,7 @@
                       </a:endParaRPr>
                     </a:p>
                   </a:txBody>
-                  <a:tcPr marL="91440" marR="91440" marT="45720" marB="45720" anchor="ctr">
+                  <a:tcPr anchor="ctr">
                     <a:lnL w="6350" cap="flat" cmpd="sng" algn="ctr">
                       <a:solidFill>
                         <a:srgbClr val="D8DEE4"/>
@@ -8389,7 +8209,7 @@
                     <a:bodyPr/>
                     <a:lstStyle/>
                     <a:p>
-                      <a:pPr indent="0" marL="0">
+                      <a:pPr marL="0" indent="0">
                         <a:buNone/>
                       </a:pPr>
                       <a:r>
@@ -8410,7 +8230,7 @@
                       </a:endParaRPr>
                     </a:p>
                   </a:txBody>
-                  <a:tcPr marL="91440" marR="91440" marT="45720" marB="45720" anchor="ctr">
+                  <a:tcPr anchor="ctr">
                     <a:lnL w="6350" cap="flat" cmpd="sng" algn="ctr">
                       <a:solidFill>
                         <a:srgbClr val="D8DEE4"/>
@@ -8452,6 +8272,11 @@
                     </a:solidFill>
                   </a:tcPr>
                 </a:tc>
+                <a:extLst>
+                  <a:ext uri="{0D108BD9-81ED-4DB2-BD59-A6C34878D82A}">
+                    <a16:rowId xmlns:a16="http://schemas.microsoft.com/office/drawing/2014/main" val="10000"/>
+                  </a:ext>
+                </a:extLst>
               </a:tr>
               <a:tr h="514350">
                 <a:tc>
@@ -8459,7 +8284,7 @@
                     <a:bodyPr/>
                     <a:lstStyle/>
                     <a:p>
-                      <a:pPr indent="0" marL="0">
+                      <a:pPr marL="0" indent="0">
                         <a:buNone/>
                       </a:pPr>
                       <a:r>
@@ -8480,7 +8305,7 @@
                       </a:endParaRPr>
                     </a:p>
                   </a:txBody>
-                  <a:tcPr marL="91440" marR="91440" marT="45720" marB="45720" anchor="ctr">
+                  <a:tcPr anchor="ctr">
                     <a:lnL w="6350" cap="flat" cmpd="sng" algn="ctr">
                       <a:solidFill>
                         <a:srgbClr val="D8DEE4"/>
@@ -8524,7 +8349,7 @@
                     <a:bodyPr/>
                     <a:lstStyle/>
                     <a:p>
-                      <a:pPr indent="0" marL="0">
+                      <a:pPr marL="0" indent="0">
                         <a:buNone/>
                       </a:pPr>
                       <a:r>
@@ -8545,7 +8370,7 @@
                       </a:endParaRPr>
                     </a:p>
                   </a:txBody>
-                  <a:tcPr marL="91440" marR="91440" marT="45720" marB="45720" anchor="ctr">
+                  <a:tcPr anchor="ctr">
                     <a:lnL w="6350" cap="flat" cmpd="sng" algn="ctr">
                       <a:solidFill>
                         <a:srgbClr val="D8DEE4"/>
@@ -8584,6 +8409,11 @@
                     </a:lnB>
                   </a:tcPr>
                 </a:tc>
+                <a:extLst>
+                  <a:ext uri="{0D108BD9-81ED-4DB2-BD59-A6C34878D82A}">
+                    <a16:rowId xmlns:a16="http://schemas.microsoft.com/office/drawing/2014/main" val="10001"/>
+                  </a:ext>
+                </a:extLst>
               </a:tr>
               <a:tr h="514350">
                 <a:tc>
@@ -8591,7 +8421,7 @@
                     <a:bodyPr/>
                     <a:lstStyle/>
                     <a:p>
-                      <a:pPr indent="0" marL="0">
+                      <a:pPr marL="0" indent="0">
                         <a:buNone/>
                       </a:pPr>
                       <a:r>
@@ -8612,7 +8442,7 @@
                       </a:endParaRPr>
                     </a:p>
                   </a:txBody>
-                  <a:tcPr marL="91440" marR="91440" marT="45720" marB="45720" anchor="ctr">
+                  <a:tcPr anchor="ctr">
                     <a:lnL w="6350" cap="flat" cmpd="sng" algn="ctr">
                       <a:solidFill>
                         <a:srgbClr val="D8DEE4"/>
@@ -8656,7 +8486,7 @@
                     <a:bodyPr/>
                     <a:lstStyle/>
                     <a:p>
-                      <a:pPr indent="0" marL="0">
+                      <a:pPr marL="0" indent="0">
                         <a:buNone/>
                       </a:pPr>
                       <a:r>
@@ -8677,7 +8507,7 @@
                       </a:endParaRPr>
                     </a:p>
                   </a:txBody>
-                  <a:tcPr marL="91440" marR="91440" marT="45720" marB="45720" anchor="ctr">
+                  <a:tcPr anchor="ctr">
                     <a:lnL w="6350" cap="flat" cmpd="sng" algn="ctr">
                       <a:solidFill>
                         <a:srgbClr val="D8DEE4"/>
@@ -8716,6 +8546,11 @@
                     </a:lnB>
                   </a:tcPr>
                 </a:tc>
+                <a:extLst>
+                  <a:ext uri="{0D108BD9-81ED-4DB2-BD59-A6C34878D82A}">
+                    <a16:rowId xmlns:a16="http://schemas.microsoft.com/office/drawing/2014/main" val="10002"/>
+                  </a:ext>
+                </a:extLst>
               </a:tr>
               <a:tr h="514350">
                 <a:tc>
@@ -8723,7 +8558,7 @@
                     <a:bodyPr/>
                     <a:lstStyle/>
                     <a:p>
-                      <a:pPr indent="0" marL="0">
+                      <a:pPr marL="0" indent="0">
                         <a:buNone/>
                       </a:pPr>
                       <a:r>
@@ -8744,7 +8579,7 @@
                       </a:endParaRPr>
                     </a:p>
                   </a:txBody>
-                  <a:tcPr marL="91440" marR="91440" marT="45720" marB="45720" anchor="ctr">
+                  <a:tcPr anchor="ctr">
                     <a:lnL w="6350" cap="flat" cmpd="sng" algn="ctr">
                       <a:solidFill>
                         <a:srgbClr val="D8DEE4"/>
@@ -8788,7 +8623,7 @@
                     <a:bodyPr/>
                     <a:lstStyle/>
                     <a:p>
-                      <a:pPr indent="0" marL="0">
+                      <a:pPr marL="0" indent="0">
                         <a:buNone/>
                       </a:pPr>
                       <a:r>
@@ -8809,7 +8644,7 @@
                       </a:endParaRPr>
                     </a:p>
                   </a:txBody>
-                  <a:tcPr marL="91440" marR="91440" marT="45720" marB="45720" anchor="ctr">
+                  <a:tcPr anchor="ctr">
                     <a:lnL w="6350" cap="flat" cmpd="sng" algn="ctr">
                       <a:solidFill>
                         <a:srgbClr val="D8DEE4"/>
@@ -8848,6 +8683,11 @@
                     </a:lnB>
                   </a:tcPr>
                 </a:tc>
+                <a:extLst>
+                  <a:ext uri="{0D108BD9-81ED-4DB2-BD59-A6C34878D82A}">
+                    <a16:rowId xmlns:a16="http://schemas.microsoft.com/office/drawing/2014/main" val="10003"/>
+                  </a:ext>
+                </a:extLst>
               </a:tr>
               <a:tr h="514350">
                 <a:tc>
@@ -8855,7 +8695,7 @@
                     <a:bodyPr/>
                     <a:lstStyle/>
                     <a:p>
-                      <a:pPr indent="0" marL="0">
+                      <a:pPr marL="0" indent="0">
                         <a:buNone/>
                       </a:pPr>
                       <a:r>
@@ -8876,7 +8716,7 @@
                       </a:endParaRPr>
                     </a:p>
                   </a:txBody>
-                  <a:tcPr marL="91440" marR="91440" marT="45720" marB="45720" anchor="ctr">
+                  <a:tcPr anchor="ctr">
                     <a:lnL w="6350" cap="flat" cmpd="sng" algn="ctr">
                       <a:solidFill>
                         <a:srgbClr val="D8DEE4"/>
@@ -8920,7 +8760,7 @@
                     <a:bodyPr/>
                     <a:lstStyle/>
                     <a:p>
-                      <a:pPr indent="0" marL="0">
+                      <a:pPr marL="0" indent="0">
                         <a:buNone/>
                       </a:pPr>
                       <a:r>
@@ -8941,7 +8781,7 @@
                       </a:endParaRPr>
                     </a:p>
                   </a:txBody>
-                  <a:tcPr marL="91440" marR="91440" marT="45720" marB="45720" anchor="ctr">
+                  <a:tcPr anchor="ctr">
                     <a:lnL w="6350" cap="flat" cmpd="sng" algn="ctr">
                       <a:solidFill>
                         <a:srgbClr val="D8DEE4"/>
@@ -8980,6 +8820,11 @@
                     </a:lnB>
                   </a:tcPr>
                 </a:tc>
+                <a:extLst>
+                  <a:ext uri="{0D108BD9-81ED-4DB2-BD59-A6C34878D82A}">
+                    <a16:rowId xmlns:a16="http://schemas.microsoft.com/office/drawing/2014/main" val="10004"/>
+                  </a:ext>
+                </a:extLst>
               </a:tr>
               <a:tr h="514350">
                 <a:tc>
@@ -8987,7 +8832,7 @@
                     <a:bodyPr/>
                     <a:lstStyle/>
                     <a:p>
-                      <a:pPr indent="0" marL="0">
+                      <a:pPr marL="0" indent="0">
                         <a:buNone/>
                       </a:pPr>
                       <a:r>
@@ -9008,7 +8853,7 @@
                       </a:endParaRPr>
                     </a:p>
                   </a:txBody>
-                  <a:tcPr marL="91440" marR="91440" marT="45720" marB="45720" anchor="ctr">
+                  <a:tcPr anchor="ctr">
                     <a:lnL w="6350" cap="flat" cmpd="sng" algn="ctr">
                       <a:solidFill>
                         <a:srgbClr val="D8DEE4"/>
@@ -9052,7 +8897,7 @@
                     <a:bodyPr/>
                     <a:lstStyle/>
                     <a:p>
-                      <a:pPr indent="0" marL="0">
+                      <a:pPr marL="0" indent="0">
                         <a:buNone/>
                       </a:pPr>
                       <a:r>
@@ -9073,7 +8918,7 @@
                       </a:endParaRPr>
                     </a:p>
                   </a:txBody>
-                  <a:tcPr marL="91440" marR="91440" marT="45720" marB="45720" anchor="ctr">
+                  <a:tcPr anchor="ctr">
                     <a:lnL w="6350" cap="flat" cmpd="sng" algn="ctr">
                       <a:solidFill>
                         <a:srgbClr val="D8DEE4"/>
@@ -9112,6 +8957,11 @@
                     </a:lnB>
                   </a:tcPr>
                 </a:tc>
+                <a:extLst>
+                  <a:ext uri="{0D108BD9-81ED-4DB2-BD59-A6C34878D82A}">
+                    <a16:rowId xmlns:a16="http://schemas.microsoft.com/office/drawing/2014/main" val="10005"/>
+                  </a:ext>
+                </a:extLst>
               </a:tr>
               <a:tr h="514350">
                 <a:tc>
@@ -9119,7 +8969,7 @@
                     <a:bodyPr/>
                     <a:lstStyle/>
                     <a:p>
-                      <a:pPr indent="0" marL="0">
+                      <a:pPr marL="0" indent="0">
                         <a:buNone/>
                       </a:pPr>
                       <a:r>
@@ -9140,7 +8990,7 @@
                       </a:endParaRPr>
                     </a:p>
                   </a:txBody>
-                  <a:tcPr marL="91440" marR="91440" marT="45720" marB="45720" anchor="ctr">
+                  <a:tcPr anchor="ctr">
                     <a:lnL w="6350" cap="flat" cmpd="sng" algn="ctr">
                       <a:solidFill>
                         <a:srgbClr val="D8DEE4"/>
@@ -9184,7 +9034,7 @@
                     <a:bodyPr/>
                     <a:lstStyle/>
                     <a:p>
-                      <a:pPr indent="0" marL="0">
+                      <a:pPr marL="0" indent="0">
                         <a:buNone/>
                       </a:pPr>
                       <a:r>
@@ -9205,7 +9055,7 @@
                       </a:endParaRPr>
                     </a:p>
                   </a:txBody>
-                  <a:tcPr marL="91440" marR="91440" marT="45720" marB="45720" anchor="ctr">
+                  <a:tcPr anchor="ctr">
                     <a:lnL w="6350" cap="flat" cmpd="sng" algn="ctr">
                       <a:solidFill>
                         <a:srgbClr val="D8DEE4"/>
@@ -9244,6 +9094,11 @@
                     </a:lnB>
                   </a:tcPr>
                 </a:tc>
+                <a:extLst>
+                  <a:ext uri="{0D108BD9-81ED-4DB2-BD59-A6C34878D82A}">
+                    <a16:rowId xmlns:a16="http://schemas.microsoft.com/office/drawing/2014/main" val="10006"/>
+                  </a:ext>
+                </a:extLst>
               </a:tr>
               <a:tr h="514350">
                 <a:tc>
@@ -9251,7 +9106,7 @@
                     <a:bodyPr/>
                     <a:lstStyle/>
                     <a:p>
-                      <a:pPr indent="0" marL="0">
+                      <a:pPr marL="0" indent="0">
                         <a:buNone/>
                       </a:pPr>
                       <a:r>
@@ -9272,7 +9127,7 @@
                       </a:endParaRPr>
                     </a:p>
                   </a:txBody>
-                  <a:tcPr marL="91440" marR="91440" marT="45720" marB="45720" anchor="ctr">
+                  <a:tcPr anchor="ctr">
                     <a:lnL w="6350" cap="flat" cmpd="sng" algn="ctr">
                       <a:solidFill>
                         <a:srgbClr val="D8DEE4"/>
@@ -9316,7 +9171,7 @@
                     <a:bodyPr/>
                     <a:lstStyle/>
                     <a:p>
-                      <a:pPr indent="0" marL="0">
+                      <a:pPr marL="0" indent="0">
                         <a:buNone/>
                       </a:pPr>
                       <a:r>
@@ -9337,7 +9192,7 @@
                       </a:endParaRPr>
                     </a:p>
                   </a:txBody>
-                  <a:tcPr marL="91440" marR="91440" marT="45720" marB="45720" anchor="ctr">
+                  <a:tcPr anchor="ctr">
                     <a:lnL w="6350" cap="flat" cmpd="sng" algn="ctr">
                       <a:solidFill>
                         <a:srgbClr val="D8DEE4"/>
@@ -9376,6 +9231,11 @@
                     </a:lnB>
                   </a:tcPr>
                 </a:tc>
+                <a:extLst>
+                  <a:ext uri="{0D108BD9-81ED-4DB2-BD59-A6C34878D82A}">
+                    <a16:rowId xmlns:a16="http://schemas.microsoft.com/office/drawing/2014/main" val="10007"/>
+                  </a:ext>
+                </a:extLst>
               </a:tr>
             </a:tbl>
           </a:graphicData>
@@ -9383,7 +9243,7 @@
       </p:graphicFrame>
       <p:sp>
         <p:nvSpPr>
-          <p:cNvPr id="6" name="Shape 3"/>
+          <p:cNvPr id="5" name="Shape 3"/>
           <p:cNvSpPr/>
           <p:nvPr/>
         </p:nvSpPr>
@@ -9422,7 +9282,7 @@
           <a:bodyPr wrap="square" lIns="0" tIns="0" rIns="0" bIns="0" rtlCol="0" anchor="ctr"/>
           <a:lstStyle/>
           <a:p>
-            <a:pPr indent="0" marL="0">
+            <a:pPr marL="0" indent="0">
               <a:buNone/>
             </a:pPr>
             <a:r>
@@ -9461,7 +9321,7 @@
           <a:bodyPr wrap="square" lIns="0" tIns="0" rIns="0" bIns="0" rtlCol="0" anchor="ctr"/>
           <a:lstStyle/>
           <a:p>
-            <a:pPr indent="0" marL="0">
+            <a:pPr marL="0" indent="0">
               <a:lnSpc>
                 <a:spcPct val="125000"/>
               </a:lnSpc>
@@ -9526,7 +9386,7 @@
           <a:bodyPr wrap="square" lIns="0" tIns="0" rIns="0" bIns="0" rtlCol="0" anchor="ctr"/>
           <a:lstStyle/>
           <a:p>
-            <a:pPr indent="0" marL="0">
+            <a:pPr marL="0" indent="0">
               <a:buNone/>
             </a:pPr>
             <a:r>
@@ -9565,7 +9425,7 @@
           <a:bodyPr wrap="square" lIns="0" tIns="0" rIns="0" bIns="0" rtlCol="0" anchor="ctr"/>
           <a:lstStyle/>
           <a:p>
-            <a:pPr indent="0" marL="0">
+            <a:pPr marL="0" indent="0">
               <a:lnSpc>
                 <a:spcPct val="115000"/>
               </a:lnSpc>
@@ -9607,7 +9467,7 @@
           <a:bodyPr wrap="square" lIns="0" tIns="0" rIns="0" bIns="0" rtlCol="0" anchor="ctr"/>
           <a:lstStyle/>
           <a:p>
-            <a:pPr indent="0" marL="0">
+            <a:pPr marL="0" indent="0">
               <a:buNone/>
             </a:pPr>
             <a:r>
@@ -9646,7 +9506,7 @@
           <a:bodyPr wrap="square" lIns="0" tIns="0" rIns="0" bIns="0" rtlCol="0" anchor="ctr"/>
           <a:lstStyle/>
           <a:p>
-            <a:pPr indent="0" marL="0">
+            <a:pPr marL="0" indent="0">
               <a:lnSpc>
                 <a:spcPct val="115000"/>
               </a:lnSpc>
@@ -9688,7 +9548,7 @@
           <a:bodyPr wrap="square" lIns="0" tIns="0" rIns="0" bIns="0" rtlCol="0" anchor="ctr"/>
           <a:lstStyle/>
           <a:p>
-            <a:pPr indent="0" marL="0">
+            <a:pPr marL="0" indent="0">
               <a:buNone/>
             </a:pPr>
             <a:r>
@@ -9727,7 +9587,7 @@
           <a:bodyPr wrap="square" lIns="0" tIns="0" rIns="0" bIns="0" rtlCol="0" anchor="ctr"/>
           <a:lstStyle/>
           <a:p>
-            <a:pPr indent="0" marL="0">
+            <a:pPr marL="0" indent="0">
               <a:lnSpc>
                 <a:spcPct val="115000"/>
               </a:lnSpc>
@@ -9769,7 +9629,7 @@
           <a:bodyPr wrap="square" lIns="0" tIns="0" rIns="0" bIns="0" rtlCol="0" anchor="ctr"/>
           <a:lstStyle/>
           <a:p>
-            <a:pPr algn="r" indent="0" marL="0">
+            <a:pPr marL="0" indent="0" algn="r">
               <a:buNone/>
             </a:pPr>
             <a:r>
@@ -9803,6 +9663,7 @@
         <a:solidFill>
           <a:srgbClr val="FFFFFF"/>
         </a:solidFill>
+        <a:effectLst/>
       </p:bgPr>
     </p:bg>
     <p:spTree>
@@ -9840,11 +9701,11 @@
           <a:bodyPr wrap="square" lIns="0" tIns="0" rIns="0" bIns="0" rtlCol="0" anchor="ctr"/>
           <a:lstStyle/>
           <a:p>
-            <a:pPr indent="0" marL="0">
-              <a:buNone/>
-            </a:pPr>
-            <a:r>
-              <a:rPr lang="en-US" sz="1100" b="1" spc="200" kern="0" dirty="0">
+            <a:pPr marL="0" indent="0">
+              <a:buNone/>
+            </a:pPr>
+            <a:r>
+              <a:rPr lang="en-US" sz="1100" b="1" kern="0" spc="200" dirty="0">
                 <a:solidFill>
                   <a:srgbClr val="0F6E56"/>
                 </a:solidFill>
@@ -9879,7 +9740,7 @@
           <a:bodyPr wrap="square" lIns="0" tIns="0" rIns="0" bIns="0" rtlCol="0" anchor="ctr"/>
           <a:lstStyle/>
           <a:p>
-            <a:pPr indent="0" marL="0">
+            <a:pPr marL="0" indent="0">
               <a:buNone/>
             </a:pPr>
             <a:r>
@@ -9940,7 +9801,7 @@
           <a:bodyPr wrap="square" lIns="0" tIns="0" rIns="0" bIns="0" rtlCol="0" anchor="ctr"/>
           <a:lstStyle/>
           <a:p>
-            <a:pPr algn="ctr" indent="0" marL="0">
+            <a:pPr marL="0" indent="0" algn="ctr">
               <a:buNone/>
             </a:pPr>
             <a:r>
@@ -9979,7 +9840,7 @@
           <a:bodyPr wrap="square" lIns="0" tIns="0" rIns="0" bIns="0" rtlCol="0" anchor="ctr"/>
           <a:lstStyle/>
           <a:p>
-            <a:pPr algn="ctr" indent="0" marL="0">
+            <a:pPr marL="0" indent="0" algn="ctr">
               <a:lnSpc>
                 <a:spcPct val="105000"/>
               </a:lnSpc>
@@ -10043,7 +9904,7 @@
           <a:bodyPr wrap="square" lIns="0" tIns="0" rIns="0" bIns="0" rtlCol="0" anchor="ctr"/>
           <a:lstStyle/>
           <a:p>
-            <a:pPr algn="ctr" indent="0" marL="0">
+            <a:pPr marL="0" indent="0" algn="ctr">
               <a:buNone/>
             </a:pPr>
             <a:r>
@@ -10082,7 +9943,7 @@
           <a:bodyPr wrap="square" lIns="0" tIns="0" rIns="0" bIns="0" rtlCol="0" anchor="ctr"/>
           <a:lstStyle/>
           <a:p>
-            <a:pPr algn="ctr" indent="0" marL="0">
+            <a:pPr marL="0" indent="0" algn="ctr">
               <a:lnSpc>
                 <a:spcPct val="105000"/>
               </a:lnSpc>
@@ -10146,7 +10007,7 @@
           <a:bodyPr wrap="square" lIns="0" tIns="0" rIns="0" bIns="0" rtlCol="0" anchor="ctr"/>
           <a:lstStyle/>
           <a:p>
-            <a:pPr algn="ctr" indent="0" marL="0">
+            <a:pPr marL="0" indent="0" algn="ctr">
               <a:buNone/>
             </a:pPr>
             <a:r>
@@ -10185,7 +10046,7 @@
           <a:bodyPr wrap="square" lIns="0" tIns="0" rIns="0" bIns="0" rtlCol="0" anchor="ctr"/>
           <a:lstStyle/>
           <a:p>
-            <a:pPr algn="ctr" indent="0" marL="0">
+            <a:pPr marL="0" indent="0" algn="ctr">
               <a:lnSpc>
                 <a:spcPct val="105000"/>
               </a:lnSpc>
@@ -10249,7 +10110,7 @@
           <a:bodyPr wrap="square" lIns="0" tIns="0" rIns="0" bIns="0" rtlCol="0" anchor="ctr"/>
           <a:lstStyle/>
           <a:p>
-            <a:pPr algn="ctr" indent="0" marL="0">
+            <a:pPr marL="0" indent="0" algn="ctr">
               <a:buNone/>
             </a:pPr>
             <a:r>
@@ -10288,7 +10149,7 @@
           <a:bodyPr wrap="square" lIns="0" tIns="0" rIns="0" bIns="0" rtlCol="0" anchor="ctr"/>
           <a:lstStyle/>
           <a:p>
-            <a:pPr algn="ctr" indent="0" marL="0">
+            <a:pPr marL="0" indent="0" algn="ctr">
               <a:lnSpc>
                 <a:spcPct val="105000"/>
               </a:lnSpc>
@@ -10352,7 +10213,7 @@
           <a:bodyPr wrap="square" lIns="0" tIns="0" rIns="0" bIns="0" rtlCol="0" anchor="ctr"/>
           <a:lstStyle/>
           <a:p>
-            <a:pPr algn="ctr" indent="0" marL="0">
+            <a:pPr marL="0" indent="0" algn="ctr">
               <a:buNone/>
             </a:pPr>
             <a:r>
@@ -10391,7 +10252,7 @@
           <a:bodyPr wrap="square" lIns="0" tIns="0" rIns="0" bIns="0" rtlCol="0" anchor="ctr"/>
           <a:lstStyle/>
           <a:p>
-            <a:pPr algn="ctr" indent="0" marL="0">
+            <a:pPr marL="0" indent="0" algn="ctr">
               <a:lnSpc>
                 <a:spcPct val="105000"/>
               </a:lnSpc>
@@ -10455,7 +10316,7 @@
           <a:bodyPr wrap="square" lIns="0" tIns="0" rIns="0" bIns="0" rtlCol="0" anchor="ctr"/>
           <a:lstStyle/>
           <a:p>
-            <a:pPr algn="ctr" indent="0" marL="0">
+            <a:pPr marL="0" indent="0" algn="ctr">
               <a:buNone/>
             </a:pPr>
             <a:r>
@@ -10494,7 +10355,7 @@
           <a:bodyPr wrap="square" lIns="0" tIns="0" rIns="0" bIns="0" rtlCol="0" anchor="ctr"/>
           <a:lstStyle/>
           <a:p>
-            <a:pPr algn="ctr" indent="0" marL="0">
+            <a:pPr marL="0" indent="0" algn="ctr">
               <a:lnSpc>
                 <a:spcPct val="105000"/>
               </a:lnSpc>
@@ -10608,7 +10469,7 @@
           <a:bodyPr wrap="square" lIns="0" tIns="0" rIns="0" bIns="0" rtlCol="0" anchor="ctr"/>
           <a:lstStyle/>
           <a:p>
-            <a:pPr algn="ctr" indent="0" marL="0">
+            <a:pPr marL="0" indent="0" algn="ctr">
               <a:buNone/>
             </a:pPr>
             <a:r>
@@ -10671,7 +10532,7 @@
           <a:bodyPr wrap="square" lIns="0" tIns="0" rIns="0" bIns="0" rtlCol="0" anchor="ctr"/>
           <a:lstStyle/>
           <a:p>
-            <a:pPr algn="ctr" indent="0" marL="0">
+            <a:pPr marL="0" indent="0" algn="ctr">
               <a:buNone/>
             </a:pPr>
             <a:r>
@@ -10804,7 +10665,7 @@
           <a:bodyPr wrap="square" lIns="0" tIns="0" rIns="0" bIns="0" rtlCol="0" anchor="ctr"/>
           <a:lstStyle/>
           <a:p>
-            <a:pPr indent="0" marL="0">
+            <a:pPr marL="0" indent="0">
               <a:buNone/>
             </a:pPr>
             <a:r>
@@ -10890,7 +10751,7 @@
           <a:bodyPr wrap="square" lIns="0" tIns="0" rIns="0" bIns="0" rtlCol="0" anchor="ctr"/>
           <a:lstStyle/>
           <a:p>
-            <a:pPr indent="0" marL="0">
+            <a:pPr marL="0" indent="0">
               <a:buNone/>
             </a:pPr>
             <a:r>
@@ -10929,7 +10790,7 @@
           <a:bodyPr wrap="square" lIns="0" tIns="0" rIns="0" bIns="0" rtlCol="0" anchor="ctr"/>
           <a:lstStyle/>
           <a:p>
-            <a:pPr indent="0" marL="0">
+            <a:pPr marL="0" indent="0">
               <a:buNone/>
             </a:pPr>
             <a:r>
@@ -10993,7 +10854,7 @@
           <a:bodyPr wrap="square" lIns="0" tIns="0" rIns="0" bIns="0" rtlCol="0" anchor="ctr"/>
           <a:lstStyle/>
           <a:p>
-            <a:pPr indent="0" marL="0">
+            <a:pPr marL="0" indent="0">
               <a:buNone/>
             </a:pPr>
             <a:r>
@@ -11032,7 +10893,7 @@
           <a:bodyPr wrap="square" lIns="0" tIns="0" rIns="0" bIns="0" rtlCol="0" anchor="ctr"/>
           <a:lstStyle/>
           <a:p>
-            <a:pPr indent="0" marL="0">
+            <a:pPr marL="0" indent="0">
               <a:buNone/>
             </a:pPr>
             <a:r>
@@ -11096,7 +10957,7 @@
           <a:bodyPr wrap="square" lIns="0" tIns="0" rIns="0" bIns="0" rtlCol="0" anchor="ctr"/>
           <a:lstStyle/>
           <a:p>
-            <a:pPr indent="0" marL="0">
+            <a:pPr marL="0" indent="0">
               <a:buNone/>
             </a:pPr>
             <a:r>
@@ -11135,7 +10996,7 @@
           <a:bodyPr wrap="square" lIns="0" tIns="0" rIns="0" bIns="0" rtlCol="0" anchor="ctr"/>
           <a:lstStyle/>
           <a:p>
-            <a:pPr indent="0" marL="0">
+            <a:pPr marL="0" indent="0">
               <a:buNone/>
             </a:pPr>
             <a:r>
@@ -11199,7 +11060,7 @@
           <a:bodyPr wrap="square" lIns="0" tIns="0" rIns="0" bIns="0" rtlCol="0" anchor="ctr"/>
           <a:lstStyle/>
           <a:p>
-            <a:pPr indent="0" marL="0">
+            <a:pPr marL="0" indent="0">
               <a:buNone/>
             </a:pPr>
             <a:r>
@@ -11238,7 +11099,7 @@
           <a:bodyPr wrap="square" lIns="0" tIns="0" rIns="0" bIns="0" rtlCol="0" anchor="ctr"/>
           <a:lstStyle/>
           <a:p>
-            <a:pPr indent="0" marL="0">
+            <a:pPr marL="0" indent="0">
               <a:buNone/>
             </a:pPr>
             <a:r>
@@ -11302,7 +11163,7 @@
           <a:bodyPr wrap="square" lIns="0" tIns="0" rIns="0" bIns="0" rtlCol="0" anchor="ctr"/>
           <a:lstStyle/>
           <a:p>
-            <a:pPr indent="0" marL="0">
+            <a:pPr marL="0" indent="0">
               <a:buNone/>
             </a:pPr>
             <a:r>
@@ -11341,7 +11202,7 @@
           <a:bodyPr wrap="square" lIns="0" tIns="0" rIns="0" bIns="0" rtlCol="0" anchor="ctr"/>
           <a:lstStyle/>
           <a:p>
-            <a:pPr indent="0" marL="0">
+            <a:pPr marL="0" indent="0">
               <a:buNone/>
             </a:pPr>
             <a:r>
@@ -11405,7 +11266,7 @@
           <a:bodyPr wrap="square" lIns="0" tIns="0" rIns="0" bIns="0" rtlCol="0" anchor="ctr"/>
           <a:lstStyle/>
           <a:p>
-            <a:pPr indent="0" marL="0">
+            <a:pPr marL="0" indent="0">
               <a:buNone/>
             </a:pPr>
             <a:r>
@@ -11444,7 +11305,7 @@
           <a:bodyPr wrap="square" lIns="0" tIns="0" rIns="0" bIns="0" rtlCol="0" anchor="ctr"/>
           <a:lstStyle/>
           <a:p>
-            <a:pPr indent="0" marL="0">
+            <a:pPr marL="0" indent="0">
               <a:buNone/>
             </a:pPr>
             <a:r>
@@ -11483,7 +11344,7 @@
           <a:bodyPr wrap="square" lIns="0" tIns="0" rIns="0" bIns="0" rtlCol="0" anchor="ctr"/>
           <a:lstStyle/>
           <a:p>
-            <a:pPr indent="0" marL="0">
+            <a:pPr marL="0" indent="0">
               <a:buNone/>
             </a:pPr>
             <a:r>
@@ -11522,7 +11383,7 @@
           <a:bodyPr wrap="square" lIns="0" tIns="0" rIns="0" bIns="0" rtlCol="0" anchor="ctr"/>
           <a:lstStyle/>
           <a:p>
-            <a:pPr algn="r" indent="0" marL="0">
+            <a:pPr marL="0" indent="0" algn="r">
               <a:buNone/>
             </a:pPr>
             <a:r>
@@ -11556,6 +11417,7 @@
         <a:solidFill>
           <a:srgbClr val="FFFFFF"/>
         </a:solidFill>
+        <a:effectLst/>
       </p:bgPr>
     </p:bg>
     <p:spTree>
@@ -11593,11 +11455,11 @@
           <a:bodyPr wrap="square" lIns="0" tIns="0" rIns="0" bIns="0" rtlCol="0" anchor="ctr"/>
           <a:lstStyle/>
           <a:p>
-            <a:pPr indent="0" marL="0">
-              <a:buNone/>
-            </a:pPr>
-            <a:r>
-              <a:rPr lang="en-US" sz="1100" b="1" spc="200" kern="0" dirty="0">
+            <a:pPr marL="0" indent="0">
+              <a:buNone/>
+            </a:pPr>
+            <a:r>
+              <a:rPr lang="en-US" sz="1100" b="1" kern="0" spc="200" dirty="0">
                 <a:solidFill>
                   <a:srgbClr val="0F6E56"/>
                 </a:solidFill>
@@ -11632,7 +11494,7 @@
           <a:bodyPr wrap="square" lIns="0" tIns="0" rIns="0" bIns="0" rtlCol="0" anchor="ctr"/>
           <a:lstStyle/>
           <a:p>
-            <a:pPr indent="0" marL="0">
+            <a:pPr marL="0" indent="0">
               <a:buNone/>
             </a:pPr>
             <a:r>
@@ -11691,7 +11553,7 @@
           <a:bodyPr wrap="square" lIns="0" tIns="0" rIns="0" bIns="0" rtlCol="0" anchor="ctr"/>
           <a:lstStyle/>
           <a:p>
-            <a:pPr indent="0" marL="0">
+            <a:pPr marL="0" indent="0">
               <a:buNone/>
             </a:pPr>
             <a:r>
@@ -11730,7 +11592,7 @@
           <a:bodyPr wrap="square" lIns="0" tIns="0" rIns="0" bIns="0" rtlCol="0" anchor="ctr"/>
           <a:lstStyle/>
           <a:p>
-            <a:pPr indent="0" marL="0">
+            <a:pPr marL="0" indent="0">
               <a:lnSpc>
                 <a:spcPct val="125000"/>
               </a:lnSpc>
@@ -11792,7 +11654,7 @@
           <a:bodyPr wrap="square" lIns="0" tIns="0" rIns="0" bIns="0" rtlCol="0" anchor="ctr"/>
           <a:lstStyle/>
           <a:p>
-            <a:pPr indent="0" marL="0">
+            <a:pPr marL="0" indent="0">
               <a:buNone/>
             </a:pPr>
             <a:r>
@@ -11831,7 +11693,7 @@
           <a:bodyPr wrap="square" lIns="0" tIns="0" rIns="0" bIns="0" rtlCol="0" anchor="ctr"/>
           <a:lstStyle/>
           <a:p>
-            <a:pPr indent="0" marL="0">
+            <a:pPr marL="0" indent="0">
               <a:lnSpc>
                 <a:spcPct val="125000"/>
               </a:lnSpc>
@@ -11893,7 +11755,7 @@
           <a:bodyPr wrap="square" lIns="0" tIns="0" rIns="0" bIns="0" rtlCol="0" anchor="ctr"/>
           <a:lstStyle/>
           <a:p>
-            <a:pPr indent="0" marL="0">
+            <a:pPr marL="0" indent="0">
               <a:buNone/>
             </a:pPr>
             <a:r>
@@ -11932,7 +11794,7 @@
           <a:bodyPr wrap="square" lIns="0" tIns="0" rIns="0" bIns="0" rtlCol="0" anchor="ctr"/>
           <a:lstStyle/>
           <a:p>
-            <a:pPr indent="0" marL="0">
+            <a:pPr marL="0" indent="0">
               <a:lnSpc>
                 <a:spcPct val="125000"/>
               </a:lnSpc>
@@ -11994,7 +11856,7 @@
           <a:bodyPr wrap="square" lIns="0" tIns="0" rIns="0" bIns="0" rtlCol="0" anchor="ctr"/>
           <a:lstStyle/>
           <a:p>
-            <a:pPr indent="0" marL="0">
+            <a:pPr marL="0" indent="0">
               <a:buNone/>
             </a:pPr>
             <a:r>
@@ -12033,7 +11895,7 @@
           <a:bodyPr wrap="square" lIns="0" tIns="0" rIns="0" bIns="0" rtlCol="0" anchor="ctr"/>
           <a:lstStyle/>
           <a:p>
-            <a:pPr indent="0" marL="0">
+            <a:pPr marL="0" indent="0">
               <a:lnSpc>
                 <a:spcPct val="125000"/>
               </a:lnSpc>
@@ -12053,7 +11915,7 @@
             <a:endParaRPr lang="en-US" sz="1150" dirty="0"/>
           </a:p>
           <a:p>
-            <a:pPr indent="0" marL="0">
+            <a:pPr marL="0" indent="0">
               <a:lnSpc>
                 <a:spcPct val="125000"/>
               </a:lnSpc>
@@ -12073,7 +11935,7 @@
             <a:endParaRPr lang="en-US" sz="1150" dirty="0"/>
           </a:p>
           <a:p>
-            <a:pPr indent="0" marL="0">
+            <a:pPr marL="0" indent="0">
               <a:lnSpc>
                 <a:spcPct val="125000"/>
               </a:lnSpc>
@@ -12093,7 +11955,7 @@
             <a:endParaRPr lang="en-US" sz="1150" dirty="0"/>
           </a:p>
           <a:p>
-            <a:pPr indent="0" marL="0">
+            <a:pPr marL="0" indent="0">
               <a:lnSpc>
                 <a:spcPct val="125000"/>
               </a:lnSpc>
@@ -12113,7 +11975,7 @@
             <a:endParaRPr lang="en-US" sz="1150" dirty="0"/>
           </a:p>
           <a:p>
-            <a:pPr indent="0" marL="0">
+            <a:pPr marL="0" indent="0">
               <a:lnSpc>
                 <a:spcPct val="125000"/>
               </a:lnSpc>
@@ -12133,7 +11995,7 @@
             <a:endParaRPr lang="en-US" sz="1150" dirty="0"/>
           </a:p>
           <a:p>
-            <a:pPr indent="0" marL="0">
+            <a:pPr marL="0" indent="0">
               <a:lnSpc>
                 <a:spcPct val="125000"/>
               </a:lnSpc>
@@ -12175,7 +12037,7 @@
           <a:bodyPr wrap="square" lIns="0" tIns="0" rIns="0" bIns="0" rtlCol="0" anchor="ctr"/>
           <a:lstStyle/>
           <a:p>
-            <a:pPr algn="r" indent="0" marL="0">
+            <a:pPr marL="0" indent="0" algn="r">
               <a:buNone/>
             </a:pPr>
             <a:r>
@@ -12209,6 +12071,7 @@
         <a:solidFill>
           <a:srgbClr val="FFFFFF"/>
         </a:solidFill>
+        <a:effectLst/>
       </p:bgPr>
     </p:bg>
     <p:spTree>
@@ -12246,11 +12109,11 @@
           <a:bodyPr wrap="square" lIns="0" tIns="0" rIns="0" bIns="0" rtlCol="0" anchor="ctr"/>
           <a:lstStyle/>
           <a:p>
-            <a:pPr indent="0" marL="0">
-              <a:buNone/>
-            </a:pPr>
-            <a:r>
-              <a:rPr lang="en-US" sz="1100" b="1" spc="200" kern="0" dirty="0">
+            <a:pPr marL="0" indent="0">
+              <a:buNone/>
+            </a:pPr>
+            <a:r>
+              <a:rPr lang="en-US" sz="1100" b="1" kern="0" spc="200" dirty="0">
                 <a:solidFill>
                   <a:srgbClr val="0F6E56"/>
                 </a:solidFill>
@@ -12285,7 +12148,7 @@
           <a:bodyPr wrap="square" lIns="0" tIns="0" rIns="0" bIns="0" rtlCol="0" anchor="ctr"/>
           <a:lstStyle/>
           <a:p>
-            <a:pPr indent="0" marL="0">
+            <a:pPr marL="0" indent="0">
               <a:buNone/>
             </a:pPr>
             <a:r>
@@ -12324,7 +12187,7 @@
           <a:bodyPr wrap="square" lIns="0" tIns="0" rIns="0" bIns="0" rtlCol="0" anchor="ctr"/>
           <a:lstStyle/>
           <a:p>
-            <a:pPr indent="0" marL="0">
+            <a:pPr marL="0" indent="0">
               <a:lnSpc>
                 <a:spcPct val="125000"/>
               </a:lnSpc>
@@ -12386,7 +12249,7 @@
           <a:bodyPr wrap="square" lIns="0" tIns="0" rIns="0" bIns="0" rtlCol="0" anchor="ctr"/>
           <a:lstStyle/>
           <a:p>
-            <a:pPr indent="0" marL="0">
+            <a:pPr marL="0" indent="0">
               <a:buNone/>
             </a:pPr>
             <a:r>
@@ -12425,7 +12288,7 @@
           <a:bodyPr wrap="square" lIns="0" tIns="0" rIns="0" bIns="0" rtlCol="0" anchor="ctr"/>
           <a:lstStyle/>
           <a:p>
-            <a:pPr indent="0" marL="0">
+            <a:pPr marL="0" indent="0">
               <a:buNone/>
             </a:pPr>
             <a:r>
@@ -12464,7 +12327,7 @@
           <a:bodyPr wrap="square" lIns="0" tIns="0" rIns="0" bIns="0" rtlCol="0" anchor="ctr"/>
           <a:lstStyle/>
           <a:p>
-            <a:pPr indent="0" marL="0">
+            <a:pPr marL="0" indent="0">
               <a:buNone/>
             </a:pPr>
             <a:r>
@@ -12503,7 +12366,7 @@
           <a:bodyPr wrap="square" lIns="0" tIns="0" rIns="0" bIns="0" rtlCol="0" anchor="ctr"/>
           <a:lstStyle/>
           <a:p>
-            <a:pPr indent="0" marL="0">
+            <a:pPr marL="0" indent="0">
               <a:buNone/>
             </a:pPr>
             <a:r>
@@ -12542,7 +12405,7 @@
           <a:bodyPr wrap="square" lIns="0" tIns="0" rIns="0" bIns="0" rtlCol="0" anchor="ctr"/>
           <a:lstStyle/>
           <a:p>
-            <a:pPr indent="0" marL="0">
+            <a:pPr marL="0" indent="0">
               <a:buNone/>
             </a:pPr>
             <a:r>
@@ -12581,7 +12444,7 @@
           <a:bodyPr wrap="square" lIns="0" tIns="0" rIns="0" bIns="0" rtlCol="0" anchor="ctr"/>
           <a:lstStyle/>
           <a:p>
-            <a:pPr indent="0" marL="0">
+            <a:pPr marL="0" indent="0">
               <a:buNone/>
             </a:pPr>
             <a:r>
@@ -12640,7 +12503,7 @@
           <a:bodyPr wrap="square" lIns="0" tIns="0" rIns="0" bIns="0" rtlCol="0" anchor="ctr"/>
           <a:lstStyle/>
           <a:p>
-            <a:pPr algn="ctr" indent="0" marL="0">
+            <a:pPr marL="0" indent="0" algn="ctr">
               <a:buNone/>
             </a:pPr>
             <a:r>
@@ -12699,7 +12562,7 @@
           <a:bodyPr wrap="square" lIns="0" tIns="0" rIns="0" bIns="0" rtlCol="0" anchor="ctr"/>
           <a:lstStyle/>
           <a:p>
-            <a:pPr indent="0" marL="0">
+            <a:pPr marL="0" indent="0">
               <a:buNone/>
             </a:pPr>
             <a:r>
@@ -12738,7 +12601,7 @@
           <a:bodyPr wrap="square" lIns="0" tIns="0" rIns="0" bIns="0" rtlCol="0" anchor="ctr"/>
           <a:lstStyle/>
           <a:p>
-            <a:pPr indent="0" marL="0">
+            <a:pPr marL="0" indent="0">
               <a:buNone/>
             </a:pPr>
             <a:r>
@@ -12777,7 +12640,7 @@
           <a:bodyPr wrap="square" lIns="0" tIns="0" rIns="0" bIns="0" rtlCol="0" anchor="ctr"/>
           <a:lstStyle/>
           <a:p>
-            <a:pPr indent="0" marL="0">
+            <a:pPr marL="0" indent="0">
               <a:buNone/>
             </a:pPr>
             <a:r>
@@ -12816,7 +12679,7 @@
           <a:bodyPr wrap="square" lIns="0" tIns="0" rIns="0" bIns="0" rtlCol="0" anchor="ctr"/>
           <a:lstStyle/>
           <a:p>
-            <a:pPr indent="0" marL="0">
+            <a:pPr marL="0" indent="0">
               <a:buNone/>
             </a:pPr>
             <a:r>
@@ -12855,7 +12718,7 @@
           <a:bodyPr wrap="square" lIns="0" tIns="0" rIns="0" bIns="0" rtlCol="0" anchor="ctr"/>
           <a:lstStyle/>
           <a:p>
-            <a:pPr indent="0" marL="0">
+            <a:pPr marL="0" indent="0">
               <a:buNone/>
             </a:pPr>
             <a:r>
@@ -12894,7 +12757,7 @@
           <a:bodyPr wrap="square" lIns="0" tIns="0" rIns="0" bIns="0" rtlCol="0" anchor="ctr"/>
           <a:lstStyle/>
           <a:p>
-            <a:pPr indent="0" marL="0">
+            <a:pPr marL="0" indent="0">
               <a:buNone/>
             </a:pPr>
             <a:r>
@@ -12953,7 +12816,7 @@
           <a:bodyPr wrap="square" lIns="0" tIns="0" rIns="0" bIns="0" rtlCol="0" anchor="ctr"/>
           <a:lstStyle/>
           <a:p>
-            <a:pPr algn="ctr" indent="0" marL="0">
+            <a:pPr marL="0" indent="0" algn="ctr">
               <a:buNone/>
             </a:pPr>
             <a:r>
@@ -12992,7 +12855,7 @@
           <a:bodyPr wrap="square" lIns="0" tIns="0" rIns="0" bIns="0" rtlCol="0" anchor="ctr"/>
           <a:lstStyle/>
           <a:p>
-            <a:pPr algn="r" indent="0" marL="0">
+            <a:pPr marL="0" indent="0" algn="r">
               <a:buNone/>
             </a:pPr>
             <a:r>
@@ -13026,6 +12889,7 @@
         <a:solidFill>
           <a:srgbClr val="FFFFFF"/>
         </a:solidFill>
+        <a:effectLst/>
       </p:bgPr>
     </p:bg>
     <p:spTree>
@@ -13063,11 +12927,11 @@
           <a:bodyPr wrap="square" lIns="0" tIns="0" rIns="0" bIns="0" rtlCol="0" anchor="ctr"/>
           <a:lstStyle/>
           <a:p>
-            <a:pPr indent="0" marL="0">
-              <a:buNone/>
-            </a:pPr>
-            <a:r>
-              <a:rPr lang="en-US" sz="1100" b="1" spc="200" kern="0" dirty="0">
+            <a:pPr marL="0" indent="0">
+              <a:buNone/>
+            </a:pPr>
+            <a:r>
+              <a:rPr lang="en-US" sz="1100" b="1" kern="0" spc="200" dirty="0">
                 <a:solidFill>
                   <a:srgbClr val="0F6E56"/>
                 </a:solidFill>
@@ -13102,7 +12966,7 @@
           <a:bodyPr wrap="square" lIns="0" tIns="0" rIns="0" bIns="0" rtlCol="0" anchor="ctr"/>
           <a:lstStyle/>
           <a:p>
-            <a:pPr indent="0" marL="0">
+            <a:pPr marL="0" indent="0">
               <a:buNone/>
             </a:pPr>
             <a:r>
@@ -13141,7 +13005,7 @@
           <a:bodyPr wrap="square" lIns="0" tIns="0" rIns="0" bIns="0" rtlCol="0" anchor="ctr"/>
           <a:lstStyle/>
           <a:p>
-            <a:pPr indent="0" marL="0">
+            <a:pPr marL="0" indent="0">
               <a:buNone/>
             </a:pPr>
             <a:r>
@@ -13200,7 +13064,7 @@
           <a:bodyPr wrap="square" lIns="0" tIns="0" rIns="0" bIns="0" rtlCol="0" anchor="ctr"/>
           <a:lstStyle/>
           <a:p>
-            <a:pPr indent="0" marL="0">
+            <a:pPr marL="0" indent="0">
               <a:buNone/>
             </a:pPr>
             <a:r>
@@ -13239,7 +13103,7 @@
           <a:bodyPr wrap="square" lIns="0" tIns="0" rIns="0" bIns="0" rtlCol="0" anchor="ctr"/>
           <a:lstStyle/>
           <a:p>
-            <a:pPr indent="0" marL="0">
+            <a:pPr marL="0" indent="0">
               <a:lnSpc>
                 <a:spcPct val="120000"/>
               </a:lnSpc>
@@ -13259,7 +13123,7 @@
             <a:endParaRPr lang="en-US" sz="1150" dirty="0"/>
           </a:p>
           <a:p>
-            <a:pPr indent="0" marL="0">
+            <a:pPr marL="0" indent="0">
               <a:lnSpc>
                 <a:spcPct val="120000"/>
               </a:lnSpc>
@@ -13279,7 +13143,7 @@
             <a:endParaRPr lang="en-US" sz="1150" dirty="0"/>
           </a:p>
           <a:p>
-            <a:pPr indent="0" marL="0">
+            <a:pPr marL="0" indent="0">
               <a:lnSpc>
                 <a:spcPct val="120000"/>
               </a:lnSpc>
@@ -13299,7 +13163,7 @@
             <a:endParaRPr lang="en-US" sz="1150" dirty="0"/>
           </a:p>
           <a:p>
-            <a:pPr indent="0" marL="0">
+            <a:pPr marL="0" indent="0">
               <a:lnSpc>
                 <a:spcPct val="120000"/>
               </a:lnSpc>
@@ -13319,7 +13183,7 @@
             <a:endParaRPr lang="en-US" sz="1150" dirty="0"/>
           </a:p>
           <a:p>
-            <a:pPr indent="0" marL="0">
+            <a:pPr marL="0" indent="0">
               <a:lnSpc>
                 <a:spcPct val="120000"/>
               </a:lnSpc>
@@ -13339,7 +13203,7 @@
             <a:endParaRPr lang="en-US" sz="1150" dirty="0"/>
           </a:p>
           <a:p>
-            <a:pPr indent="0" marL="0">
+            <a:pPr marL="0" indent="0">
               <a:lnSpc>
                 <a:spcPct val="120000"/>
               </a:lnSpc>
@@ -13359,7 +13223,7 @@
             <a:endParaRPr lang="en-US" sz="1150" dirty="0"/>
           </a:p>
           <a:p>
-            <a:pPr indent="0" marL="0">
+            <a:pPr marL="0" indent="0">
               <a:lnSpc>
                 <a:spcPct val="120000"/>
               </a:lnSpc>
@@ -13379,7 +13243,7 @@
             <a:endParaRPr lang="en-US" sz="1150" dirty="0"/>
           </a:p>
           <a:p>
-            <a:pPr indent="0" marL="0">
+            <a:pPr marL="0" indent="0">
               <a:lnSpc>
                 <a:spcPct val="120000"/>
               </a:lnSpc>
@@ -13399,7 +13263,7 @@
             <a:endParaRPr lang="en-US" sz="1150" dirty="0"/>
           </a:p>
           <a:p>
-            <a:pPr indent="0" marL="0">
+            <a:pPr marL="0" indent="0">
               <a:lnSpc>
                 <a:spcPct val="120000"/>
               </a:lnSpc>
@@ -13441,7 +13305,7 @@
           <a:bodyPr wrap="square" lIns="0" tIns="0" rIns="0" bIns="0" rtlCol="0" anchor="ctr"/>
           <a:lstStyle/>
           <a:p>
-            <a:pPr indent="0" marL="0">
+            <a:pPr marL="0" indent="0">
               <a:buNone/>
             </a:pPr>
             <a:r>
@@ -13480,7 +13344,7 @@
           <a:bodyPr wrap="square" lIns="0" tIns="0" rIns="0" bIns="0" rtlCol="0" anchor="ctr"/>
           <a:lstStyle/>
           <a:p>
-            <a:pPr indent="0" marL="0">
+            <a:pPr marL="0" indent="0">
               <a:lnSpc>
                 <a:spcPct val="120000"/>
               </a:lnSpc>
@@ -13522,7 +13386,7 @@
           <a:bodyPr wrap="square" lIns="0" tIns="0" rIns="0" bIns="0" rtlCol="0" anchor="ctr"/>
           <a:lstStyle/>
           <a:p>
-            <a:pPr indent="0" marL="0">
+            <a:pPr marL="0" indent="0">
               <a:buNone/>
             </a:pPr>
             <a:r>
@@ -13561,7 +13425,7 @@
           <a:bodyPr wrap="square" lIns="0" tIns="0" rIns="0" bIns="0" rtlCol="0" anchor="ctr"/>
           <a:lstStyle/>
           <a:p>
-            <a:pPr indent="0" marL="0">
+            <a:pPr marL="0" indent="0">
               <a:lnSpc>
                 <a:spcPct val="120000"/>
               </a:lnSpc>
@@ -13603,7 +13467,7 @@
           <a:bodyPr wrap="square" lIns="0" tIns="0" rIns="0" bIns="0" rtlCol="0" anchor="ctr"/>
           <a:lstStyle/>
           <a:p>
-            <a:pPr indent="0" marL="0">
+            <a:pPr marL="0" indent="0">
               <a:buNone/>
             </a:pPr>
             <a:r>
@@ -13642,7 +13506,7 @@
           <a:bodyPr wrap="square" lIns="0" tIns="0" rIns="0" bIns="0" rtlCol="0" anchor="ctr"/>
           <a:lstStyle/>
           <a:p>
-            <a:pPr indent="0" marL="0">
+            <a:pPr marL="0" indent="0">
               <a:lnSpc>
                 <a:spcPct val="120000"/>
               </a:lnSpc>
@@ -13684,7 +13548,7 @@
           <a:bodyPr wrap="square" lIns="0" tIns="0" rIns="0" bIns="0" rtlCol="0" anchor="ctr"/>
           <a:lstStyle/>
           <a:p>
-            <a:pPr algn="r" indent="0" marL="0">
+            <a:pPr marL="0" indent="0" algn="r">
               <a:buNone/>
             </a:pPr>
             <a:r>
@@ -14003,4 +13867,319 @@
     </a:ext>
   </a:extLst>
 </a:theme>
+</file>
+
+<file path=ppt/theme/theme2.xml><?xml version="1.0" encoding="utf-8"?>
+<a:theme xmlns:a="http://schemas.openxmlformats.org/drawingml/2006/main" name="Office Theme">
+  <a:themeElements>
+    <a:clrScheme name="Office">
+      <a:dk1>
+        <a:sysClr val="windowText" lastClr="000000"/>
+      </a:dk1>
+      <a:lt1>
+        <a:sysClr val="window" lastClr="FFFFFF"/>
+      </a:lt1>
+      <a:dk2>
+        <a:srgbClr val="0E2841"/>
+      </a:dk2>
+      <a:lt2>
+        <a:srgbClr val="E8E8E8"/>
+      </a:lt2>
+      <a:accent1>
+        <a:srgbClr val="156082"/>
+      </a:accent1>
+      <a:accent2>
+        <a:srgbClr val="E97132"/>
+      </a:accent2>
+      <a:accent3>
+        <a:srgbClr val="196B24"/>
+      </a:accent3>
+      <a:accent4>
+        <a:srgbClr val="0F9ED5"/>
+      </a:accent4>
+      <a:accent5>
+        <a:srgbClr val="A02B93"/>
+      </a:accent5>
+      <a:accent6>
+        <a:srgbClr val="4EA72E"/>
+      </a:accent6>
+      <a:hlink>
+        <a:srgbClr val="467886"/>
+      </a:hlink>
+      <a:folHlink>
+        <a:srgbClr val="96607D"/>
+      </a:folHlink>
+    </a:clrScheme>
+    <a:fontScheme name="Office">
+      <a:majorFont>
+        <a:latin typeface="Aptos Display" panose="02110004020202020204"/>
+        <a:ea typeface=""/>
+        <a:cs typeface=""/>
+        <a:font script="Jpan" typeface="游ゴシック Light"/>
+        <a:font script="Hang" typeface="맑은 고딕"/>
+        <a:font script="Hans" typeface="等线 Light"/>
+        <a:font script="Hant" typeface="新細明體"/>
+        <a:font script="Arab" typeface="Times New Roman"/>
+        <a:font script="Hebr" typeface="Times New Roman"/>
+        <a:font script="Thai" typeface="Angsana New"/>
+        <a:font script="Ethi" typeface="Nyala"/>
+        <a:font script="Beng" typeface="Vrinda"/>
+        <a:font script="Gujr" typeface="Shruti"/>
+        <a:font script="Khmr" typeface="MoolBoran"/>
+        <a:font script="Knda" typeface="Tunga"/>
+        <a:font script="Guru" typeface="Raavi"/>
+        <a:font script="Cans" typeface="Euphemia"/>
+        <a:font script="Cher" typeface="Plantagenet Cherokee"/>
+        <a:font script="Yiii" typeface="Microsoft Yi Baiti"/>
+        <a:font script="Tibt" typeface="Microsoft Himalaya"/>
+        <a:font script="Thaa" typeface="MV Boli"/>
+        <a:font script="Deva" typeface="Mangal"/>
+        <a:font script="Telu" typeface="Gautami"/>
+        <a:font script="Taml" typeface="Latha"/>
+        <a:font script="Syrc" typeface="Estrangelo Edessa"/>
+        <a:font script="Orya" typeface="Kalinga"/>
+        <a:font script="Mlym" typeface="Kartika"/>
+        <a:font script="Laoo" typeface="DokChampa"/>
+        <a:font script="Sinh" typeface="Iskoola Pota"/>
+        <a:font script="Mong" typeface="Mongolian Baiti"/>
+        <a:font script="Viet" typeface="Times New Roman"/>
+        <a:font script="Uigh" typeface="Microsoft Uighur"/>
+        <a:font script="Geor" typeface="Sylfaen"/>
+        <a:font script="Armn" typeface="Arial"/>
+        <a:font script="Bugi" typeface="Leelawadee UI"/>
+        <a:font script="Bopo" typeface="Microsoft JhengHei"/>
+        <a:font script="Java" typeface="Javanese Text"/>
+        <a:font script="Lisu" typeface="Segoe UI"/>
+        <a:font script="Mymr" typeface="Myanmar Text"/>
+        <a:font script="Nkoo" typeface="Ebrima"/>
+        <a:font script="Olck" typeface="Nirmala UI"/>
+        <a:font script="Osma" typeface="Ebrima"/>
+        <a:font script="Phag" typeface="Phagspa"/>
+        <a:font script="Syrn" typeface="Estrangelo Edessa"/>
+        <a:font script="Syrj" typeface="Estrangelo Edessa"/>
+        <a:font script="Syre" typeface="Estrangelo Edessa"/>
+        <a:font script="Sora" typeface="Nirmala UI"/>
+        <a:font script="Tale" typeface="Microsoft Tai Le"/>
+        <a:font script="Talu" typeface="Microsoft New Tai Lue"/>
+        <a:font script="Tfng" typeface="Ebrima"/>
+      </a:majorFont>
+      <a:minorFont>
+        <a:latin typeface="Aptos" panose="02110004020202020204"/>
+        <a:ea typeface=""/>
+        <a:cs typeface=""/>
+        <a:font script="Jpan" typeface="游ゴシック"/>
+        <a:font script="Hang" typeface="맑은 고딕"/>
+        <a:font script="Hans" typeface="等线"/>
+        <a:font script="Hant" typeface="新細明體"/>
+        <a:font script="Arab" typeface="Arial"/>
+        <a:font script="Hebr" typeface="Arial"/>
+        <a:font script="Thai" typeface="Cordia New"/>
+        <a:font script="Ethi" typeface="Nyala"/>
+        <a:font script="Beng" typeface="Vrinda"/>
+        <a:font script="Gujr" typeface="Shruti"/>
+        <a:font script="Khmr" typeface="DaunPenh"/>
+        <a:font script="Knda" typeface="Tunga"/>
+        <a:font script="Guru" typeface="Raavi"/>
+        <a:font script="Cans" typeface="Euphemia"/>
+        <a:font script="Cher" typeface="Plantagenet Cherokee"/>
+        <a:font script="Yiii" typeface="Microsoft Yi Baiti"/>
+        <a:font script="Tibt" typeface="Microsoft Himalaya"/>
+        <a:font script="Thaa" typeface="MV Boli"/>
+        <a:font script="Deva" typeface="Mangal"/>
+        <a:font script="Telu" typeface="Gautami"/>
+        <a:font script="Taml" typeface="Latha"/>
+        <a:font script="Syrc" typeface="Estrangelo Edessa"/>
+        <a:font script="Orya" typeface="Kalinga"/>
+        <a:font script="Mlym" typeface="Kartika"/>
+        <a:font script="Laoo" typeface="DokChampa"/>
+        <a:font script="Sinh" typeface="Iskoola Pota"/>
+        <a:font script="Mong" typeface="Mongolian Baiti"/>
+        <a:font script="Viet" typeface="Arial"/>
+        <a:font script="Uigh" typeface="Microsoft Uighur"/>
+        <a:font script="Geor" typeface="Sylfaen"/>
+        <a:font script="Armn" typeface="Arial"/>
+        <a:font script="Bugi" typeface="Leelawadee UI"/>
+        <a:font script="Bopo" typeface="Microsoft JhengHei"/>
+        <a:font script="Java" typeface="Javanese Text"/>
+        <a:font script="Lisu" typeface="Segoe UI"/>
+        <a:font script="Mymr" typeface="Myanmar Text"/>
+        <a:font script="Nkoo" typeface="Ebrima"/>
+        <a:font script="Olck" typeface="Nirmala UI"/>
+        <a:font script="Osma" typeface="Ebrima"/>
+        <a:font script="Phag" typeface="Phagspa"/>
+        <a:font script="Syrn" typeface="Estrangelo Edessa"/>
+        <a:font script="Syrj" typeface="Estrangelo Edessa"/>
+        <a:font script="Syre" typeface="Estrangelo Edessa"/>
+        <a:font script="Sora" typeface="Nirmala UI"/>
+        <a:font script="Tale" typeface="Microsoft Tai Le"/>
+        <a:font script="Talu" typeface="Microsoft New Tai Lue"/>
+        <a:font script="Tfng" typeface="Ebrima"/>
+      </a:minorFont>
+    </a:fontScheme>
+    <a:fmtScheme name="Office">
+      <a:fillStyleLst>
+        <a:solidFill>
+          <a:schemeClr val="phClr"/>
+        </a:solidFill>
+        <a:gradFill rotWithShape="1">
+          <a:gsLst>
+            <a:gs pos="0">
+              <a:schemeClr val="phClr">
+                <a:lumMod val="110000"/>
+                <a:satMod val="105000"/>
+                <a:tint val="67000"/>
+              </a:schemeClr>
+            </a:gs>
+            <a:gs pos="50000">
+              <a:schemeClr val="phClr">
+                <a:lumMod val="105000"/>
+                <a:satMod val="103000"/>
+                <a:tint val="73000"/>
+              </a:schemeClr>
+            </a:gs>
+            <a:gs pos="100000">
+              <a:schemeClr val="phClr">
+                <a:lumMod val="105000"/>
+                <a:satMod val="109000"/>
+                <a:tint val="81000"/>
+              </a:schemeClr>
+            </a:gs>
+          </a:gsLst>
+          <a:lin ang="5400000" scaled="0"/>
+        </a:gradFill>
+        <a:gradFill rotWithShape="1">
+          <a:gsLst>
+            <a:gs pos="0">
+              <a:schemeClr val="phClr">
+                <a:satMod val="103000"/>
+                <a:lumMod val="102000"/>
+                <a:tint val="94000"/>
+              </a:schemeClr>
+            </a:gs>
+            <a:gs pos="50000">
+              <a:schemeClr val="phClr">
+                <a:satMod val="110000"/>
+                <a:lumMod val="100000"/>
+                <a:shade val="100000"/>
+              </a:schemeClr>
+            </a:gs>
+            <a:gs pos="100000">
+              <a:schemeClr val="phClr">
+                <a:lumMod val="99000"/>
+                <a:satMod val="120000"/>
+                <a:shade val="78000"/>
+              </a:schemeClr>
+            </a:gs>
+          </a:gsLst>
+          <a:lin ang="5400000" scaled="0"/>
+        </a:gradFill>
+      </a:fillStyleLst>
+      <a:lnStyleLst>
+        <a:ln w="12700" cap="flat" cmpd="sng" algn="ctr">
+          <a:solidFill>
+            <a:schemeClr val="phClr"/>
+          </a:solidFill>
+          <a:prstDash val="solid"/>
+          <a:miter lim="800000"/>
+        </a:ln>
+        <a:ln w="19050" cap="flat" cmpd="sng" algn="ctr">
+          <a:solidFill>
+            <a:schemeClr val="phClr"/>
+          </a:solidFill>
+          <a:prstDash val="solid"/>
+          <a:miter lim="800000"/>
+        </a:ln>
+        <a:ln w="25400" cap="flat" cmpd="sng" algn="ctr">
+          <a:solidFill>
+            <a:schemeClr val="phClr"/>
+          </a:solidFill>
+          <a:prstDash val="solid"/>
+          <a:miter lim="800000"/>
+        </a:ln>
+      </a:lnStyleLst>
+      <a:effectStyleLst>
+        <a:effectStyle>
+          <a:effectLst/>
+        </a:effectStyle>
+        <a:effectStyle>
+          <a:effectLst/>
+        </a:effectStyle>
+        <a:effectStyle>
+          <a:effectLst>
+            <a:outerShdw blurRad="57150" dist="19050" dir="5400000" algn="ctr" rotWithShape="0">
+              <a:srgbClr val="000000">
+                <a:alpha val="63000"/>
+              </a:srgbClr>
+            </a:outerShdw>
+          </a:effectLst>
+        </a:effectStyle>
+      </a:effectStyleLst>
+      <a:bgFillStyleLst>
+        <a:solidFill>
+          <a:schemeClr val="phClr"/>
+        </a:solidFill>
+        <a:solidFill>
+          <a:schemeClr val="phClr">
+            <a:tint val="95000"/>
+            <a:satMod val="170000"/>
+          </a:schemeClr>
+        </a:solidFill>
+        <a:gradFill rotWithShape="1">
+          <a:gsLst>
+            <a:gs pos="0">
+              <a:schemeClr val="phClr">
+                <a:tint val="93000"/>
+                <a:satMod val="150000"/>
+                <a:shade val="98000"/>
+                <a:lumMod val="102000"/>
+              </a:schemeClr>
+            </a:gs>
+            <a:gs pos="50000">
+              <a:schemeClr val="phClr">
+                <a:tint val="98000"/>
+                <a:satMod val="130000"/>
+                <a:shade val="90000"/>
+                <a:lumMod val="103000"/>
+              </a:schemeClr>
+            </a:gs>
+            <a:gs pos="100000">
+              <a:schemeClr val="phClr">
+                <a:shade val="63000"/>
+                <a:satMod val="120000"/>
+              </a:schemeClr>
+            </a:gs>
+          </a:gsLst>
+          <a:lin ang="5400000" scaled="0"/>
+        </a:gradFill>
+      </a:bgFillStyleLst>
+    </a:fmtScheme>
+  </a:themeElements>
+  <a:objectDefaults>
+    <a:lnDef>
+      <a:spPr/>
+      <a:bodyPr/>
+      <a:lstStyle/>
+      <a:style>
+        <a:lnRef idx="2">
+          <a:schemeClr val="accent1"/>
+        </a:lnRef>
+        <a:fillRef idx="0">
+          <a:schemeClr val="accent1"/>
+        </a:fillRef>
+        <a:effectRef idx="1">
+          <a:schemeClr val="accent1"/>
+        </a:effectRef>
+        <a:fontRef idx="minor">
+          <a:schemeClr val="tx1"/>
+        </a:fontRef>
+      </a:style>
+    </a:lnDef>
+  </a:objectDefaults>
+  <a:extraClrSchemeLst/>
+  <a:extLst>
+    <a:ext uri="{05A4C25C-085E-4340-85A3-A5531E510DB2}">
+      <thm15:themeFamily xmlns:thm15="http://schemas.microsoft.com/office/thememl/2012/main" name="Office Theme" id="{2E142A2C-CD16-42D6-873A-C26D2A0506FA}" vid="{1BDDFF52-6CD6-40A5-AB3C-68EB2F1E4D0A}"/>
+    </a:ext>
+  </a:extLst>
+</a:theme>
 </file>
--- a/SAKINA_Pitch_Deck.pptx
+++ b/SAKINA_Pitch_Deck.pptx
@@ -1887,7 +1887,7 @@
                 <a:ea typeface="Calibri" pitchFamily="34" charset="-122"/>
                 <a:cs typeface="Calibri" pitchFamily="34" charset="-120"/>
               </a:rPr>
-              <a:t>Team SAKINA  ·  MhmoodHmmam  ·  Idea Phase submission, 20 Aug 2026</a:t>
+              <a:t>Team SAKINA  ·  Mahmoud Samaha  ·  Idea Phase submission, 20 Aug 2026</a:t>
             </a:r>
             <a:endParaRPr lang="en-US" sz="1100" dirty="0"/>
           </a:p>
@@ -3947,7 +3947,7 @@
                 <a:ea typeface="Calibri" pitchFamily="34" charset="-122"/>
                 <a:cs typeface="Calibri" pitchFamily="34" charset="-120"/>
               </a:rPr>
-              <a:t>MhmoodHmmam — solo builder: agent design, CAMARA integration, full stack</a:t>
+              <a:t>Mahmoud Samaha — solo builder: agent design, CAMARA integration, full stack</a:t>
             </a:r>
             <a:endParaRPr lang="en-US" sz="1300" dirty="0"/>
           </a:p>
@@ -3986,7 +3986,7 @@
                 <a:ea typeface="Courier New" pitchFamily="34" charset="-122"/>
                 <a:cs typeface="Courier New" pitchFamily="34" charset="-120"/>
               </a:rPr>
-              <a:t>mhmood.hmmam@gmail.com</a:t>
+              <a:t>mhmud.smaha@gmail.com</a:t>
             </a:r>
             <a:endParaRPr lang="en-US" sz="1200" dirty="0"/>
           </a:p>

--- a/SAKINA_Pitch_Deck.pptx
+++ b/SAKINA_Pitch_Deck.pptx
@@ -19,6 +19,7 @@
     <p:sldId id="264" r:id="rId10"/>
     <p:sldId id="265" r:id="rId11"/>
     <p:sldId id="266" r:id="rId12"/>
+    <p:sldId id="268" r:id="rId19"/>
     <p:sldId id="267" r:id="rId13"/>
   </p:sldIdLst>
   <p:sldSz cx="12192000" cy="6858000"/>
@@ -1887,7 +1888,7 @@
                 <a:ea typeface="Calibri" pitchFamily="34" charset="-122"/>
                 <a:cs typeface="Calibri" pitchFamily="34" charset="-120"/>
               </a:rPr>
-              <a:t>Team SAKINA  ·  Mahmoud Samaha  ·  Idea Phase submission, 20 Aug 2026</a:t>
+              <a:t>Team SAKINA  ·  Mahmoud Samaha  ·  Prototype Phase submission, September 2026</a:t>
             </a:r>
             <a:endParaRPr lang="en-US" sz="1100" dirty="0"/>
           </a:p>
@@ -3485,7 +3486,7 @@
                 <a:ea typeface="Calibri" pitchFamily="34" charset="-122"/>
                 <a:cs typeface="Calibri" pitchFamily="34" charset="-120"/>
               </a:rPr>
-              <a:t>5 CAMARA API families live-verified in one LangGraph state machine; conditional edges chosen by the agent, not the operator</a:t>
+              <a:t>7 CAMARA APIs, six orchestrated in one LangGraph state machine; the conditional edges are chosen by the agent, not the operator</a:t>
             </a:r>
             <a:endParaRPr lang="en-US" sz="1200" dirty="0"/>
           </a:p>
@@ -3589,7 +3590,7 @@
                 <a:ea typeface="Calibri" pitchFamily="34" charset="-122"/>
                 <a:cs typeface="Calibri" pitchFamily="34" charset="-120"/>
               </a:rPr>
-              <a:t>Live Nokia NaC calls, live QoD session created and released, 21 passing tests, replay mode needs zero credentials</a:t>
+              <a:t>Deployed on Streamlit Cloud, live Nokia NaC calls, live QoD session created and released, 53 passing tests with CI, replay mode needs zero credentials</a:t>
             </a:r>
             <a:endParaRPr lang="en-US" sz="1200" dirty="0"/>
           </a:p>
@@ -4025,7 +4026,7 @@
                 <a:ea typeface="Calibri" pitchFamily="34" charset="-122"/>
                 <a:cs typeface="Calibri" pitchFamily="34" charset="-120"/>
               </a:rPr>
-              <a:t>NEXT</a:t>
+              <a:t>LIVE</a:t>
             </a:r>
             <a:endParaRPr lang="en-US" sz="1100" dirty="0"/>
           </a:p>
@@ -4064,7 +4065,7 @@
                 <a:ea typeface="Calibri" pitchFamily="34" charset="-122"/>
                 <a:cs typeface="Calibri" pitchFamily="34" charset="-120"/>
               </a:rPr>
-              <a:t>Prototype hardening through Sep 8 · live demo + submission by Sep 12</a:t>
+              <a:t>sakina.streamlit.app · github.com/MhmoodHmmam/sakina · narrated demo video with the submission</a:t>
             </a:r>
             <a:endParaRPr lang="en-US" sz="1400" dirty="0"/>
           </a:p>
@@ -4106,6 +4107,1044 @@
               <a:t>GSMA MENA IGNITE HACKATHON · THEME 3 — TOURISM, PILGRIMAGE &amp; CULTURAL EXPERIENCE INNOVATION</a:t>
             </a:r>
             <a:endParaRPr lang="en-US" sz="1050" dirty="0"/>
+          </a:p>
+        </p:txBody>
+      </p:sp>
+    </p:spTree>
+  </p:cSld>
+  <p:clrMapOvr>
+    <a:masterClrMapping/>
+  </p:clrMapOvr>
+</p:sld>
+</file>
+
+<file path=ppt/slides/slide13.xml><?xml version="1.0" encoding="utf-8"?>
+<p:sld xmlns:a="http://schemas.openxmlformats.org/drawingml/2006/main" xmlns:r="http://schemas.openxmlformats.org/officeDocument/2006/relationships" xmlns:p="http://schemas.openxmlformats.org/presentationml/2006/main">
+  <p:cSld name="Slide 10">
+    <p:bg>
+      <p:bgPr>
+        <a:solidFill>
+          <a:srgbClr val="FFFFFF"/>
+        </a:solidFill>
+        <a:effectLst/>
+      </p:bgPr>
+    </p:bg>
+    <p:spTree>
+      <p:nvGrpSpPr>
+        <p:cNvPr id="1" name=""/>
+        <p:cNvGrpSpPr/>
+        <p:nvPr/>
+      </p:nvGrpSpPr>
+      <p:grpSpPr>
+        <a:xfrm>
+          <a:off x="0" y="0"/>
+          <a:ext cx="0" cy="0"/>
+          <a:chOff x="0" y="0"/>
+          <a:chExt cx="0" cy="0"/>
+        </a:xfrm>
+      </p:grpSpPr>
+      <p:sp>
+        <p:nvSpPr>
+          <p:cNvPr id="2" name="Text 0"/>
+          <p:cNvSpPr/>
+          <p:nvPr/>
+        </p:nvSpPr>
+        <p:spPr>
+          <a:xfrm>
+            <a:off x="548640" y="365760"/>
+            <a:ext cx="7315200" cy="320040"/>
+          </a:xfrm>
+          <a:prstGeom prst="rect">
+            <a:avLst/>
+          </a:prstGeom>
+          <a:noFill/>
+          <a:ln/>
+        </p:spPr>
+        <p:txBody>
+          <a:bodyPr wrap="square" lIns="0" tIns="0" rIns="0" bIns="0" rtlCol="0" anchor="ctr"/>
+          <a:lstStyle/>
+          <a:p>
+            <a:pPr marL="0" indent="0">
+              <a:buNone/>
+            </a:pPr>
+            <a:r>
+              <a:rPr lang="en-US" sz="1100" b="1" kern="0" spc="200" dirty="0">
+                <a:solidFill>
+                  <a:srgbClr val="0F6E56"/>
+                </a:solidFill>
+                <a:latin typeface="Calibri" pitchFamily="34" charset="0"/>
+                <a:ea typeface="Calibri" pitchFamily="34" charset="-122"/>
+                <a:cs typeface="Calibri" pitchFamily="34" charset="-120"/>
+              </a:rPr>
+              <a:t>WHAT'S DIFFERENT</a:t>
+            </a:r>
+            <a:endParaRPr lang="en-US" sz="1100" dirty="0"/>
+          </a:p>
+        </p:txBody>
+      </p:sp>
+      <p:sp>
+        <p:nvSpPr>
+          <p:cNvPr id="3" name="Text 1"/>
+          <p:cNvSpPr/>
+          <p:nvPr/>
+        </p:nvSpPr>
+        <p:spPr>
+          <a:xfrm>
+            <a:off x="548640" y="640080"/>
+            <a:ext cx="11064240" cy="594360"/>
+          </a:xfrm>
+          <a:prstGeom prst="rect">
+            <a:avLst/>
+          </a:prstGeom>
+          <a:noFill/>
+          <a:ln/>
+        </p:spPr>
+        <p:txBody>
+          <a:bodyPr wrap="square" lIns="0" tIns="0" rIns="0" bIns="0" rtlCol="0" anchor="ctr"/>
+          <a:lstStyle/>
+          <a:p>
+            <a:pPr marL="0" indent="0">
+              <a:buNone/>
+            </a:pPr>
+            <a:r>
+              <a:rPr lang="en-US" sz="2300" b="1" dirty="0">
+                <a:solidFill>
+                  <a:srgbClr val="16202B"/>
+                </a:solidFill>
+                <a:latin typeface="Cambria" pitchFamily="34" charset="0"/>
+                <a:ea typeface="Cambria" pitchFamily="34" charset="-122"/>
+                <a:cs typeface="Cambria" pitchFamily="34" charset="-120"/>
+              </a:rPr>
+              <a:t>Built on known ground — one step further</a:t>
+            </a:r>
+            <a:endParaRPr lang="en-US" sz="2300" dirty="0"/>
+          </a:p>
+        </p:txBody>
+      </p:sp>
+      <p:graphicFrame>
+        <p:nvGraphicFramePr>
+          <p:cNvPr id="11" name="Table 0"/>
+          <p:cNvGraphicFramePr>
+            <a:graphicFrameLocks noGrp="1"/>
+          </p:cNvGraphicFramePr>
+          <p:nvPr>
+            <p:extLst>
+              <p:ext uri="{D42A27DB-BD31-4B8C-83A1-F6EECF244321}">
+                <p14:modId xmlns:p14="http://schemas.microsoft.com/office/powerpoint/2010/main" val="1579011935"/>
+              </p:ext>
+            </p:extLst>
+          </p:nvPr>
+        </p:nvGraphicFramePr>
+        <p:xfrm>
+          <a:off x="548640" y="1417320"/>
+          <a:ext cx="7315200" cy="4709160"/>
+        </p:xfrm>
+        <a:graphic>
+          <a:graphicData uri="http://schemas.openxmlformats.org/drawingml/2006/table">
+            <a:tbl>
+              <a:tblPr/>
+              <a:tblGrid>
+                <a:gridCol w="3072384">
+                  <a:extLst>
+                    <a:ext uri="{9D8B030D-6E8A-4147-A177-3AD203B41FA5}">
+                      <a16:colId xmlns:a16="http://schemas.microsoft.com/office/drawing/2014/main" val="20000"/>
+                    </a:ext>
+                  </a:extLst>
+                </a:gridCol>
+                <a:gridCol w="4242816">
+                  <a:extLst>
+                    <a:ext uri="{9D8B030D-6E8A-4147-A177-3AD203B41FA5}">
+                      <a16:colId xmlns:a16="http://schemas.microsoft.com/office/drawing/2014/main" val="20001"/>
+                    </a:ext>
+                  </a:extLst>
+                </a:gridCol>
+              </a:tblGrid>
+              <a:tr h="941832">
+                <a:tc>
+                  <a:txBody>
+                    <a:bodyPr/>
+                    <a:lstStyle/>
+                    <a:p>
+                      <a:pPr marL="0" indent="0">
+                        <a:buNone/>
+                      </a:pPr>
+                      <a:r>
+                        <a:rPr lang="en-US" sz="1200" b="1" dirty="0">
+                          <a:solidFill>
+                            <a:srgbClr val="FFFFFF"/>
+                          </a:solidFill>
+                          <a:latin typeface="Calibri" pitchFamily="34" charset="0"/>
+                          <a:ea typeface="Calibri" pitchFamily="34" charset="-122"/>
+                          <a:cs typeface="Calibri" pitchFamily="34" charset="-120"/>
+                        </a:rPr>
+                        <a:t>Exists today</a:t>
+                      </a:r>
+                      <a:endParaRPr lang="en-US" sz="1200" dirty="0">
+                        <a:latin typeface="Calibri" charset="0"/>
+                        <a:ea typeface="Calibri" charset="0"/>
+                        <a:cs typeface="Calibri" charset="0"/>
+                      </a:endParaRPr>
+                    </a:p>
+                  </a:txBody>
+                  <a:tcPr anchor="ctr">
+                    <a:lnL w="6350" cap="flat" cmpd="sng" algn="ctr">
+                      <a:solidFill>
+                        <a:srgbClr val="D8DEE4"/>
+                      </a:solidFill>
+                      <a:prstDash val="solid"/>
+                      <a:round/>
+                      <a:headEnd type="none" w="med" len="med"/>
+                      <a:tailEnd type="none" w="med" len="med"/>
+                    </a:lnL>
+                    <a:lnR w="6350" cap="flat" cmpd="sng" algn="ctr">
+                      <a:solidFill>
+                        <a:srgbClr val="D8DEE4"/>
+                      </a:solidFill>
+                      <a:prstDash val="solid"/>
+                      <a:round/>
+                      <a:headEnd type="none" w="med" len="med"/>
+                      <a:tailEnd type="none" w="med" len="med"/>
+                    </a:lnR>
+                    <a:lnT w="6350" cap="flat" cmpd="sng" algn="ctr">
+                      <a:solidFill>
+                        <a:srgbClr val="D8DEE4"/>
+                      </a:solidFill>
+                      <a:prstDash val="solid"/>
+                      <a:round/>
+                      <a:headEnd type="none" w="med" len="med"/>
+                      <a:tailEnd type="none" w="med" len="med"/>
+                    </a:lnT>
+                    <a:lnB w="6350" cap="flat" cmpd="sng" algn="ctr">
+                      <a:solidFill>
+                        <a:srgbClr val="D8DEE4"/>
+                      </a:solidFill>
+                      <a:prstDash val="solid"/>
+                      <a:round/>
+                      <a:headEnd type="none" w="med" len="med"/>
+                      <a:tailEnd type="none" w="med" len="med"/>
+                    </a:lnB>
+                    <a:solidFill>
+                      <a:srgbClr val="0F1B2D"/>
+                    </a:solidFill>
+                  </a:tcPr>
+                </a:tc>
+                <a:tc>
+                  <a:txBody>
+                    <a:bodyPr/>
+                    <a:lstStyle/>
+                    <a:p>
+                      <a:pPr marL="0" indent="0">
+                        <a:buNone/>
+                      </a:pPr>
+                      <a:r>
+                        <a:rPr lang="en-US" sz="1200" b="1" dirty="0">
+                          <a:solidFill>
+                            <a:srgbClr val="FFFFFF"/>
+                          </a:solidFill>
+                          <a:latin typeface="Calibri" pitchFamily="34" charset="0"/>
+                          <a:ea typeface="Calibri" pitchFamily="34" charset="-122"/>
+                          <a:cs typeface="Calibri" pitchFamily="34" charset="-120"/>
+                        </a:rPr>
+                        <a:t>SAKINA adds</a:t>
+                      </a:r>
+                      <a:endParaRPr lang="en-US" sz="1200" dirty="0">
+                        <a:latin typeface="Calibri" charset="0"/>
+                        <a:ea typeface="Calibri" charset="0"/>
+                        <a:cs typeface="Calibri" charset="0"/>
+                      </a:endParaRPr>
+                    </a:p>
+                  </a:txBody>
+                  <a:tcPr anchor="ctr">
+                    <a:lnL w="6350" cap="flat" cmpd="sng" algn="ctr">
+                      <a:solidFill>
+                        <a:srgbClr val="D8DEE4"/>
+                      </a:solidFill>
+                      <a:prstDash val="solid"/>
+                      <a:round/>
+                      <a:headEnd type="none" w="med" len="med"/>
+                      <a:tailEnd type="none" w="med" len="med"/>
+                    </a:lnL>
+                    <a:lnR w="6350" cap="flat" cmpd="sng" algn="ctr">
+                      <a:solidFill>
+                        <a:srgbClr val="D8DEE4"/>
+                      </a:solidFill>
+                      <a:prstDash val="solid"/>
+                      <a:round/>
+                      <a:headEnd type="none" w="med" len="med"/>
+                      <a:tailEnd type="none" w="med" len="med"/>
+                    </a:lnR>
+                    <a:lnT w="6350" cap="flat" cmpd="sng" algn="ctr">
+                      <a:solidFill>
+                        <a:srgbClr val="D8DEE4"/>
+                      </a:solidFill>
+                      <a:prstDash val="solid"/>
+                      <a:round/>
+                      <a:headEnd type="none" w="med" len="med"/>
+                      <a:tailEnd type="none" w="med" len="med"/>
+                    </a:lnT>
+                    <a:lnB w="6350" cap="flat" cmpd="sng" algn="ctr">
+                      <a:solidFill>
+                        <a:srgbClr val="D8DEE4"/>
+                      </a:solidFill>
+                      <a:prstDash val="solid"/>
+                      <a:round/>
+                      <a:headEnd type="none" w="med" len="med"/>
+                      <a:tailEnd type="none" w="med" len="med"/>
+                    </a:lnB>
+                    <a:solidFill>
+                      <a:srgbClr val="0F1B2D"/>
+                    </a:solidFill>
+                  </a:tcPr>
+                </a:tc>
+                <a:extLst>
+                  <a:ext uri="{0D108BD9-81ED-4DB2-BD59-A6C34878D82A}">
+                    <a16:rowId xmlns:a16="http://schemas.microsoft.com/office/drawing/2014/main" val="10000"/>
+                  </a:ext>
+                </a:extLst>
+              </a:tr>
+              <a:tr h="941832">
+                <a:tc>
+                  <a:txBody>
+                    <a:bodyPr/>
+                    <a:lstStyle/>
+                    <a:p>
+                      <a:pPr marL="0" indent="0">
+                        <a:buNone/>
+                      </a:pPr>
+                      <a:r>
+                        <a:rPr lang="en-US" sz="1200" dirty="0">
+                          <a:solidFill>
+                            <a:srgbClr val="16202B"/>
+                          </a:solidFill>
+                          <a:latin typeface="Calibri" pitchFamily="34" charset="0"/>
+                          <a:ea typeface="Calibri" pitchFamily="34" charset="-122"/>
+                          <a:cs typeface="Calibri" pitchFamily="34" charset="-120"/>
+                        </a:rPr>
+                        <a:t>The network as a crowd sensor — signalling-data research (PLOS ONE 2024); population-density APIs at Paris 2024</a:t>
+                      </a:r>
+                      <a:endParaRPr lang="en-US" sz="1200" dirty="0">
+                        <a:latin typeface="Calibri" charset="0"/>
+                        <a:ea typeface="Calibri" charset="0"/>
+                        <a:cs typeface="Calibri" charset="0"/>
+                      </a:endParaRPr>
+                    </a:p>
+                  </a:txBody>
+                  <a:tcPr anchor="ctr">
+                    <a:lnL w="6350" cap="flat" cmpd="sng" algn="ctr">
+                      <a:solidFill>
+                        <a:srgbClr val="D8DEE4"/>
+                      </a:solidFill>
+                      <a:prstDash val="solid"/>
+                      <a:round/>
+                      <a:headEnd type="none" w="med" len="med"/>
+                      <a:tailEnd type="none" w="med" len="med"/>
+                    </a:lnL>
+                    <a:lnR w="6350" cap="flat" cmpd="sng" algn="ctr">
+                      <a:solidFill>
+                        <a:srgbClr val="D8DEE4"/>
+                      </a:solidFill>
+                      <a:prstDash val="solid"/>
+                      <a:round/>
+                      <a:headEnd type="none" w="med" len="med"/>
+                      <a:tailEnd type="none" w="med" len="med"/>
+                    </a:lnR>
+                    <a:lnT w="6350" cap="flat" cmpd="sng" algn="ctr">
+                      <a:solidFill>
+                        <a:srgbClr val="D8DEE4"/>
+                      </a:solidFill>
+                      <a:prstDash val="solid"/>
+                      <a:round/>
+                      <a:headEnd type="none" w="med" len="med"/>
+                      <a:tailEnd type="none" w="med" len="med"/>
+                    </a:lnT>
+                    <a:lnB w="6350" cap="flat" cmpd="sng" algn="ctr">
+                      <a:solidFill>
+                        <a:srgbClr val="D8DEE4"/>
+                      </a:solidFill>
+                      <a:prstDash val="solid"/>
+                      <a:round/>
+                      <a:headEnd type="none" w="med" len="med"/>
+                      <a:tailEnd type="none" w="med" len="med"/>
+                    </a:lnB>
+                  </a:tcPr>
+                </a:tc>
+                <a:tc>
+                  <a:txBody>
+                    <a:bodyPr/>
+                    <a:lstStyle/>
+                    <a:p>
+                      <a:pPr marL="0" indent="0">
+                        <a:buNone/>
+                      </a:pPr>
+                      <a:r>
+                        <a:rPr lang="en-US" sz="1200" dirty="0">
+                          <a:solidFill>
+                            <a:srgbClr val="16202B"/>
+                          </a:solidFill>
+                          <a:latin typeface="Calibri" pitchFamily="34" charset="0"/>
+                          <a:ea typeface="Calibri" pitchFamily="34" charset="-122"/>
+                          <a:cs typeface="Calibri" pitchFamily="34" charset="-120"/>
+                        </a:rPr>
+                        <a:t>Closes the loop: sense, judge, act — no operator trigger and no new hardware; every pilgrim already carries the sensor.</a:t>
+                      </a:r>
+                      <a:endParaRPr lang="en-US" sz="1200" dirty="0">
+                        <a:latin typeface="Calibri" charset="0"/>
+                        <a:ea typeface="Calibri" charset="0"/>
+                        <a:cs typeface="Calibri" charset="0"/>
+                      </a:endParaRPr>
+                    </a:p>
+                  </a:txBody>
+                  <a:tcPr anchor="ctr">
+                    <a:lnL w="6350" cap="flat" cmpd="sng" algn="ctr">
+                      <a:solidFill>
+                        <a:srgbClr val="D8DEE4"/>
+                      </a:solidFill>
+                      <a:prstDash val="solid"/>
+                      <a:round/>
+                      <a:headEnd type="none" w="med" len="med"/>
+                      <a:tailEnd type="none" w="med" len="med"/>
+                    </a:lnL>
+                    <a:lnR w="6350" cap="flat" cmpd="sng" algn="ctr">
+                      <a:solidFill>
+                        <a:srgbClr val="D8DEE4"/>
+                      </a:solidFill>
+                      <a:prstDash val="solid"/>
+                      <a:round/>
+                      <a:headEnd type="none" w="med" len="med"/>
+                      <a:tailEnd type="none" w="med" len="med"/>
+                    </a:lnR>
+                    <a:lnT w="6350" cap="flat" cmpd="sng" algn="ctr">
+                      <a:solidFill>
+                        <a:srgbClr val="D8DEE4"/>
+                      </a:solidFill>
+                      <a:prstDash val="solid"/>
+                      <a:round/>
+                      <a:headEnd type="none" w="med" len="med"/>
+                      <a:tailEnd type="none" w="med" len="med"/>
+                    </a:lnT>
+                    <a:lnB w="6350" cap="flat" cmpd="sng" algn="ctr">
+                      <a:solidFill>
+                        <a:srgbClr val="D8DEE4"/>
+                      </a:solidFill>
+                      <a:prstDash val="solid"/>
+                      <a:round/>
+                      <a:headEnd type="none" w="med" len="med"/>
+                      <a:tailEnd type="none" w="med" len="med"/>
+                    </a:lnB>
+                  </a:tcPr>
+                </a:tc>
+                <a:extLst>
+                  <a:ext uri="{0D108BD9-81ED-4DB2-BD59-A6C34878D82A}">
+                    <a16:rowId xmlns:a16="http://schemas.microsoft.com/office/drawing/2014/main" val="10001"/>
+                  </a:ext>
+                </a:extLst>
+              </a:tr>
+              <a:tr h="941832">
+                <a:tc>
+                  <a:txBody>
+                    <a:bodyPr/>
+                    <a:lstStyle/>
+                    <a:p>
+                      <a:pPr marL="0" indent="0">
+                        <a:buNone/>
+                      </a:pPr>
+                      <a:r>
+                        <a:rPr lang="en-US" sz="1200" dirty="0">
+                          <a:solidFill>
+                            <a:srgbClr val="16202B"/>
+                          </a:solidFill>
+                          <a:latin typeface="Calibri" pitchFamily="34" charset="0"/>
+                          <a:ea typeface="Calibri" pitchFamily="34" charset="-122"/>
+                          <a:cs typeface="Calibri" pitchFamily="34" charset="-120"/>
+                        </a:rPr>
+                        <a:t>Agents that raise QoD when congestion rises — Nokia × Summit Tech at MWC26, for an 8K stream</a:t>
+                      </a:r>
+                      <a:endParaRPr lang="en-US" sz="1200" dirty="0">
+                        <a:latin typeface="Calibri" charset="0"/>
+                        <a:ea typeface="Calibri" charset="0"/>
+                        <a:cs typeface="Calibri" charset="0"/>
+                      </a:endParaRPr>
+                    </a:p>
+                  </a:txBody>
+                  <a:tcPr anchor="ctr">
+                    <a:lnL w="6350" cap="flat" cmpd="sng" algn="ctr">
+                      <a:solidFill>
+                        <a:srgbClr val="D8DEE4"/>
+                      </a:solidFill>
+                      <a:prstDash val="solid"/>
+                      <a:round/>
+                      <a:headEnd type="none" w="med" len="med"/>
+                      <a:tailEnd type="none" w="med" len="med"/>
+                    </a:lnL>
+                    <a:lnR w="6350" cap="flat" cmpd="sng" algn="ctr">
+                      <a:solidFill>
+                        <a:srgbClr val="D8DEE4"/>
+                      </a:solidFill>
+                      <a:prstDash val="solid"/>
+                      <a:round/>
+                      <a:headEnd type="none" w="med" len="med"/>
+                      <a:tailEnd type="none" w="med" len="med"/>
+                    </a:lnR>
+                    <a:lnT w="6350" cap="flat" cmpd="sng" algn="ctr">
+                      <a:solidFill>
+                        <a:srgbClr val="D8DEE4"/>
+                      </a:solidFill>
+                      <a:prstDash val="solid"/>
+                      <a:round/>
+                      <a:headEnd type="none" w="med" len="med"/>
+                      <a:tailEnd type="none" w="med" len="med"/>
+                    </a:lnT>
+                    <a:lnB w="6350" cap="flat" cmpd="sng" algn="ctr">
+                      <a:solidFill>
+                        <a:srgbClr val="D8DEE4"/>
+                      </a:solidFill>
+                      <a:prstDash val="solid"/>
+                      <a:round/>
+                      <a:headEnd type="none" w="med" len="med"/>
+                      <a:tailEnd type="none" w="med" len="med"/>
+                    </a:lnB>
+                  </a:tcPr>
+                </a:tc>
+                <a:tc>
+                  <a:txBody>
+                    <a:bodyPr/>
+                    <a:lstStyle/>
+                    <a:p>
+                      <a:pPr marL="0" indent="0">
+                        <a:buNone/>
+                      </a:pPr>
+                      <a:r>
+                        <a:rPr lang="en-US" sz="1200" dirty="0">
+                          <a:solidFill>
+                            <a:srgbClr val="16202B"/>
+                          </a:solidFill>
+                          <a:latin typeface="Calibri" pitchFamily="34" charset="0"/>
+                          <a:ea typeface="Calibri" pitchFamily="34" charset="-122"/>
+                          <a:cs typeface="Calibri" pitchFamily="34" charset="-120"/>
+                        </a:rPr>
+                        <a:t>Weighs the evidence: every reading carries its confidence; the agent asks whether a falling reading is dispersal or blindness, and decides when that doubt is worth more API calls.</a:t>
+                      </a:r>
+                      <a:endParaRPr lang="en-US" sz="1200" dirty="0">
+                        <a:latin typeface="Calibri" charset="0"/>
+                        <a:ea typeface="Calibri" charset="0"/>
+                        <a:cs typeface="Calibri" charset="0"/>
+                      </a:endParaRPr>
+                    </a:p>
+                  </a:txBody>
+                  <a:tcPr anchor="ctr">
+                    <a:lnL w="6350" cap="flat" cmpd="sng" algn="ctr">
+                      <a:solidFill>
+                        <a:srgbClr val="D8DEE4"/>
+                      </a:solidFill>
+                      <a:prstDash val="solid"/>
+                      <a:round/>
+                      <a:headEnd type="none" w="med" len="med"/>
+                      <a:tailEnd type="none" w="med" len="med"/>
+                    </a:lnL>
+                    <a:lnR w="6350" cap="flat" cmpd="sng" algn="ctr">
+                      <a:solidFill>
+                        <a:srgbClr val="D8DEE4"/>
+                      </a:solidFill>
+                      <a:prstDash val="solid"/>
+                      <a:round/>
+                      <a:headEnd type="none" w="med" len="med"/>
+                      <a:tailEnd type="none" w="med" len="med"/>
+                    </a:lnR>
+                    <a:lnT w="6350" cap="flat" cmpd="sng" algn="ctr">
+                      <a:solidFill>
+                        <a:srgbClr val="D8DEE4"/>
+                      </a:solidFill>
+                      <a:prstDash val="solid"/>
+                      <a:round/>
+                      <a:headEnd type="none" w="med" len="med"/>
+                      <a:tailEnd type="none" w="med" len="med"/>
+                    </a:lnT>
+                    <a:lnB w="6350" cap="flat" cmpd="sng" algn="ctr">
+                      <a:solidFill>
+                        <a:srgbClr val="D8DEE4"/>
+                      </a:solidFill>
+                      <a:prstDash val="solid"/>
+                      <a:round/>
+                      <a:headEnd type="none" w="med" len="med"/>
+                      <a:tailEnd type="none" w="med" len="med"/>
+                    </a:lnB>
+                  </a:tcPr>
+                </a:tc>
+                <a:extLst>
+                  <a:ext uri="{0D108BD9-81ED-4DB2-BD59-A6C34878D82A}">
+                    <a16:rowId xmlns:a16="http://schemas.microsoft.com/office/drawing/2014/main" val="10002"/>
+                  </a:ext>
+                </a:extLst>
+              </a:tr>
+              <a:tr h="941832">
+                <a:tc>
+                  <a:txBody>
+                    <a:bodyPr/>
+                    <a:lstStyle/>
+                    <a:p>
+                      <a:pPr marL="0" indent="0">
+                        <a:buNone/>
+                      </a:pPr>
+                      <a:r>
+                        <a:rPr lang="en-US" sz="1200" dirty="0">
+                          <a:solidFill>
+                            <a:srgbClr val="16202B"/>
+                          </a:solidFill>
+                          <a:latin typeface="Calibri" pitchFamily="34" charset="0"/>
+                          <a:ea typeface="Calibri" pitchFamily="34" charset="-122"/>
+                          <a:cs typeface="Calibri" pitchFamily="34" charset="-120"/>
+                        </a:rPr>
+                        <a:t>A SIM-swap check gating a payment — Orange's banking agent, July 2026</a:t>
+                      </a:r>
+                      <a:endParaRPr lang="en-US" sz="1200" dirty="0">
+                        <a:latin typeface="Calibri" charset="0"/>
+                        <a:ea typeface="Calibri" charset="0"/>
+                        <a:cs typeface="Calibri" charset="0"/>
+                      </a:endParaRPr>
+                    </a:p>
+                  </a:txBody>
+                  <a:tcPr anchor="ctr">
+                    <a:lnL w="6350" cap="flat" cmpd="sng" algn="ctr">
+                      <a:solidFill>
+                        <a:srgbClr val="D8DEE4"/>
+                      </a:solidFill>
+                      <a:prstDash val="solid"/>
+                      <a:round/>
+                      <a:headEnd type="none" w="med" len="med"/>
+                      <a:tailEnd type="none" w="med" len="med"/>
+                    </a:lnL>
+                    <a:lnR w="6350" cap="flat" cmpd="sng" algn="ctr">
+                      <a:solidFill>
+                        <a:srgbClr val="D8DEE4"/>
+                      </a:solidFill>
+                      <a:prstDash val="solid"/>
+                      <a:round/>
+                      <a:headEnd type="none" w="med" len="med"/>
+                      <a:tailEnd type="none" w="med" len="med"/>
+                    </a:lnR>
+                    <a:lnT w="6350" cap="flat" cmpd="sng" algn="ctr">
+                      <a:solidFill>
+                        <a:srgbClr val="D8DEE4"/>
+                      </a:solidFill>
+                      <a:prstDash val="solid"/>
+                      <a:round/>
+                      <a:headEnd type="none" w="med" len="med"/>
+                      <a:tailEnd type="none" w="med" len="med"/>
+                    </a:lnT>
+                    <a:lnB w="6350" cap="flat" cmpd="sng" algn="ctr">
+                      <a:solidFill>
+                        <a:srgbClr val="D8DEE4"/>
+                      </a:solidFill>
+                      <a:prstDash val="solid"/>
+                      <a:round/>
+                      <a:headEnd type="none" w="med" len="med"/>
+                      <a:tailEnd type="none" w="med" len="med"/>
+                    </a:lnB>
+                  </a:tcPr>
+                </a:tc>
+                <a:tc>
+                  <a:txBody>
+                    <a:bodyPr/>
+                    <a:lstStyle/>
+                    <a:p>
+                      <a:pPr marL="0" indent="0">
+                        <a:buNone/>
+                      </a:pPr>
+                      <a:r>
+                        <a:rPr lang="en-US" sz="1200" dirty="0">
+                          <a:solidFill>
+                            <a:srgbClr val="16202B"/>
+                          </a:solidFill>
+                          <a:latin typeface="Calibri" pitchFamily="34" charset="0"/>
+                          <a:ea typeface="Calibri" pitchFamily="34" charset="-122"/>
+                          <a:cs typeface="Calibri" pitchFamily="34" charset="-120"/>
+                        </a:rPr>
+                        <a:t>Gates spectrum, not money: SIM swap, roaming and location verification decide who gets priority bandwidth. No model, no elevation — it fails closed.</a:t>
+                      </a:r>
+                      <a:endParaRPr lang="en-US" sz="1200" dirty="0">
+                        <a:latin typeface="Calibri" charset="0"/>
+                        <a:ea typeface="Calibri" charset="0"/>
+                        <a:cs typeface="Calibri" charset="0"/>
+                      </a:endParaRPr>
+                    </a:p>
+                  </a:txBody>
+                  <a:tcPr anchor="ctr">
+                    <a:lnL w="6350" cap="flat" cmpd="sng" algn="ctr">
+                      <a:solidFill>
+                        <a:srgbClr val="D8DEE4"/>
+                      </a:solidFill>
+                      <a:prstDash val="solid"/>
+                      <a:round/>
+                      <a:headEnd type="none" w="med" len="med"/>
+                      <a:tailEnd type="none" w="med" len="med"/>
+                    </a:lnL>
+                    <a:lnR w="6350" cap="flat" cmpd="sng" algn="ctr">
+                      <a:solidFill>
+                        <a:srgbClr val="D8DEE4"/>
+                      </a:solidFill>
+                      <a:prstDash val="solid"/>
+                      <a:round/>
+                      <a:headEnd type="none" w="med" len="med"/>
+                      <a:tailEnd type="none" w="med" len="med"/>
+                    </a:lnR>
+                    <a:lnT w="6350" cap="flat" cmpd="sng" algn="ctr">
+                      <a:solidFill>
+                        <a:srgbClr val="D8DEE4"/>
+                      </a:solidFill>
+                      <a:prstDash val="solid"/>
+                      <a:round/>
+                      <a:headEnd type="none" w="med" len="med"/>
+                      <a:tailEnd type="none" w="med" len="med"/>
+                    </a:lnT>
+                    <a:lnB w="6350" cap="flat" cmpd="sng" algn="ctr">
+                      <a:solidFill>
+                        <a:srgbClr val="D8DEE4"/>
+                      </a:solidFill>
+                      <a:prstDash val="solid"/>
+                      <a:round/>
+                      <a:headEnd type="none" w="med" len="med"/>
+                      <a:tailEnd type="none" w="med" len="med"/>
+                    </a:lnB>
+                  </a:tcPr>
+                </a:tc>
+                <a:extLst>
+                  <a:ext uri="{0D108BD9-81ED-4DB2-BD59-A6C34878D82A}">
+                    <a16:rowId xmlns:a16="http://schemas.microsoft.com/office/drawing/2014/main" val="10003"/>
+                  </a:ext>
+                </a:extLst>
+              </a:tr>
+            </a:tbl>
+          </a:graphicData>
+        </a:graphic>
+      </p:graphicFrame>
+      <p:sp>
+        <p:nvSpPr>
+          <p:cNvPr id="5" name="Shape 2"/>
+          <p:cNvSpPr/>
+          <p:nvPr/>
+        </p:nvSpPr>
+        <p:spPr>
+          <a:xfrm>
+            <a:off x="8092440" y="1417320"/>
+            <a:ext cx="3566160" cy="4709160"/>
+          </a:xfrm>
+          <a:prstGeom prst="rect">
+            <a:avLst/>
+          </a:prstGeom>
+          <a:solidFill>
+            <a:srgbClr val="0F1B2D"/>
+          </a:solidFill>
+          <a:ln/>
+        </p:spPr>
+      </p:sp>
+      <p:sp>
+        <p:nvSpPr>
+          <p:cNvPr id="6" name="Text 3"/>
+          <p:cNvSpPr/>
+          <p:nvPr/>
+        </p:nvSpPr>
+        <p:spPr>
+          <a:xfrm>
+            <a:off x="8321040" y="1600200"/>
+            <a:ext cx="3108960" cy="365760"/>
+          </a:xfrm>
+          <a:prstGeom prst="rect">
+            <a:avLst/>
+          </a:prstGeom>
+          <a:noFill/>
+          <a:ln/>
+        </p:spPr>
+        <p:txBody>
+          <a:bodyPr wrap="square" lIns="0" tIns="0" rIns="0" bIns="0" rtlCol="0" anchor="ctr"/>
+          <a:lstStyle/>
+          <a:p>
+            <a:pPr marL="0" indent="0">
+              <a:buNone/>
+            </a:pPr>
+            <a:r>
+              <a:rPr lang="en-US" sz="1500" b="1" dirty="0">
+                <a:solidFill>
+                  <a:srgbClr val="FFFFFF"/>
+                </a:solidFill>
+                <a:latin typeface="Cambria" pitchFamily="34" charset="0"/>
+                <a:ea typeface="Cambria" pitchFamily="34" charset="-122"/>
+                <a:cs typeface="Cambria" pitchFamily="34" charset="-120"/>
+              </a:rPr>
+              <a:t>What the control room gains</a:t>
+            </a:r>
+            <a:endParaRPr lang="en-US" sz="1500" dirty="0"/>
+          </a:p>
+        </p:txBody>
+      </p:sp>
+      <p:sp>
+        <p:nvSpPr>
+          <p:cNvPr id="7" name="Text 4"/>
+          <p:cNvSpPr/>
+          <p:nvPr/>
+        </p:nvSpPr>
+        <p:spPr>
+          <a:xfrm>
+            <a:off x="8321040" y="2057400"/>
+            <a:ext cx="3108960" cy="411480"/>
+          </a:xfrm>
+          <a:prstGeom prst="rect">
+            <a:avLst/>
+          </a:prstGeom>
+          <a:noFill/>
+          <a:ln/>
+        </p:spPr>
+        <p:txBody>
+          <a:bodyPr wrap="square" lIns="0" tIns="0" rIns="0" bIns="0" rtlCol="0" anchor="ctr"/>
+          <a:lstStyle/>
+          <a:p>
+            <a:pPr marL="0" indent="0">
+              <a:lnSpc>
+                <a:spcPct val="115000"/>
+              </a:lnSpc>
+              <a:buNone/>
+            </a:pPr>
+            <a:r>
+              <a:rPr lang="en-US" sz="1200" dirty="0">
+                <a:solidFill>
+                  <a:srgbClr val="EDEFE9"/>
+                </a:solidFill>
+                <a:latin typeface="Calibri" pitchFamily="34" charset="0"/>
+                <a:ea typeface="Calibri" pitchFamily="34" charset="-122"/>
+                <a:cs typeface="Calibri" pitchFamily="34" charset="-120"/>
+              </a:rPr>
+              <a:t>• Earlier warning — no new hardware</a:t>
+            </a:r>
+            <a:endParaRPr lang="en-US" sz="1200" dirty="0"/>
+          </a:p>
+        </p:txBody>
+      </p:sp>
+      <p:sp>
+        <p:nvSpPr>
+          <p:cNvPr id="8" name="Text 5"/>
+          <p:cNvSpPr/>
+          <p:nvPr/>
+        </p:nvSpPr>
+        <p:spPr>
+          <a:xfrm>
+            <a:off x="8321040" y="2514600"/>
+            <a:ext cx="3108960" cy="411480"/>
+          </a:xfrm>
+          <a:prstGeom prst="rect">
+            <a:avLst/>
+          </a:prstGeom>
+          <a:noFill/>
+          <a:ln/>
+        </p:spPr>
+        <p:txBody>
+          <a:bodyPr wrap="square" lIns="0" tIns="0" rIns="0" bIns="0" rtlCol="0" anchor="ctr"/>
+          <a:lstStyle/>
+          <a:p>
+            <a:pPr marL="0" indent="0">
+              <a:lnSpc>
+                <a:spcPct val="115000"/>
+              </a:lnSpc>
+              <a:buNone/>
+            </a:pPr>
+            <a:r>
+              <a:rPr lang="en-US" sz="1200" dirty="0">
+                <a:solidFill>
+                  <a:srgbClr val="EDEFE9"/>
+                </a:solidFill>
+                <a:latin typeface="Calibri" pitchFamily="34" charset="0"/>
+                <a:ea typeface="Calibri" pitchFamily="34" charset="-122"/>
+                <a:cs typeface="Calibri" pitchFamily="34" charset="-120"/>
+              </a:rPr>
+              <a:t>• No false comfort from a confident-looking “Low”</a:t>
+            </a:r>
+            <a:endParaRPr lang="en-US" sz="1200" dirty="0"/>
+          </a:p>
+        </p:txBody>
+      </p:sp>
+      <p:sp>
+        <p:nvSpPr>
+          <p:cNvPr id="9" name="Text 6"/>
+          <p:cNvSpPr/>
+          <p:nvPr/>
+        </p:nvSpPr>
+        <p:spPr>
+          <a:xfrm>
+            <a:off x="8321040" y="2971800"/>
+            <a:ext cx="3108960" cy="411480"/>
+          </a:xfrm>
+          <a:prstGeom prst="rect">
+            <a:avLst/>
+          </a:prstGeom>
+          <a:noFill/>
+          <a:ln/>
+        </p:spPr>
+        <p:txBody>
+          <a:bodyPr wrap="square" lIns="0" tIns="0" rIns="0" bIns="0" rtlCol="0" anchor="ctr"/>
+          <a:lstStyle/>
+          <a:p>
+            <a:pPr marL="0" indent="0">
+              <a:lnSpc>
+                <a:spcPct val="115000"/>
+              </a:lnSpc>
+              <a:buNone/>
+            </a:pPr>
+            <a:r>
+              <a:rPr lang="en-US" sz="1200" dirty="0">
+                <a:solidFill>
+                  <a:srgbClr val="EDEFE9"/>
+                </a:solidFill>
+                <a:latin typeface="Calibri" pitchFamily="34" charset="0"/>
+                <a:ea typeface="Calibri" pitchFamily="34" charset="-122"/>
+                <a:cs typeface="Calibri" pitchFamily="34" charset="-120"/>
+              </a:rPr>
+              <a:t>• Priority bandwidth an impersonator cannot obtain</a:t>
+            </a:r>
+            <a:endParaRPr lang="en-US" sz="1200" dirty="0"/>
+          </a:p>
+        </p:txBody>
+      </p:sp>
+      <p:sp>
+        <p:nvSpPr>
+          <p:cNvPr id="10" name="Text 7"/>
+          <p:cNvSpPr/>
+          <p:nvPr/>
+        </p:nvSpPr>
+        <p:spPr>
+          <a:xfrm>
+            <a:off x="8321040" y="3429000"/>
+            <a:ext cx="3108960" cy="411480"/>
+          </a:xfrm>
+          <a:prstGeom prst="rect">
+            <a:avLst/>
+          </a:prstGeom>
+          <a:noFill/>
+          <a:ln/>
+        </p:spPr>
+        <p:txBody>
+          <a:bodyPr wrap="square" lIns="0" tIns="0" rIns="0" bIns="0" rtlCol="0" anchor="ctr"/>
+          <a:lstStyle/>
+          <a:p>
+            <a:pPr marL="0" indent="0">
+              <a:lnSpc>
+                <a:spcPct val="115000"/>
+              </a:lnSpc>
+              <a:buNone/>
+            </a:pPr>
+            <a:r>
+              <a:rPr lang="en-US" sz="1200" dirty="0">
+                <a:solidFill>
+                  <a:srgbClr val="EDEFE9"/>
+                </a:solidFill>
+                <a:latin typeface="Calibri" pitchFamily="34" charset="0"/>
+                <a:ea typeface="Calibri" pitchFamily="34" charset="-122"/>
+                <a:cs typeface="Calibri" pitchFamily="34" charset="-120"/>
+              </a:rPr>
+              <a:t>• Every action explains itself — provenance on every call</a:t>
+            </a:r>
+            <a:endParaRPr lang="en-US" sz="1200" dirty="0"/>
+          </a:p>
+        </p:txBody>
+      </p:sp>
+      <p:sp>
+        <p:nvSpPr>
+          <p:cNvPr id="4" name="Shape 8"/>
+          <p:cNvSpPr/>
+          <p:nvPr/>
+        </p:nvSpPr>
+        <p:spPr>
+          <a:xfrm>
+            <a:off x="8321040" y="3977640"/>
+            <a:ext cx="2880360" cy="0"/>
+          </a:xfrm>
+          <a:prstGeom prst="line">
+            <a:avLst/>
+          </a:prstGeom>
+          <a:noFill/>
+          <a:ln w="6350">
+            <a:solidFill>
+              <a:srgbClr val="9FB0C7"/>
+            </a:solidFill>
+            <a:prstDash val="solid"/>
+          </a:ln>
+        </p:spPr>
+      </p:sp>
+      <p:sp>
+        <p:nvSpPr>
+          <p:cNvPr id="12" name="Text 9"/>
+          <p:cNvSpPr/>
+          <p:nvPr/>
+        </p:nvSpPr>
+        <p:spPr>
+          <a:xfrm>
+            <a:off x="8321040" y="4160520"/>
+            <a:ext cx="3108960" cy="822960"/>
+          </a:xfrm>
+          <a:prstGeom prst="rect">
+            <a:avLst/>
+          </a:prstGeom>
+          <a:noFill/>
+          <a:ln/>
+        </p:spPr>
+        <p:txBody>
+          <a:bodyPr wrap="square" lIns="0" tIns="0" rIns="0" bIns="0" rtlCol="0" anchor="ctr"/>
+          <a:lstStyle/>
+          <a:p>
+            <a:pPr marL="0" indent="0">
+              <a:lnSpc>
+                <a:spcPct val="120000"/>
+              </a:lnSpc>
+              <a:buNone/>
+            </a:pPr>
+            <a:r>
+              <a:rPr lang="en-US" sz="1150" i="1" dirty="0">
+                <a:solidFill>
+                  <a:srgbClr val="C7922E"/>
+                </a:solidFill>
+                <a:latin typeface="Calibri" pitchFamily="34" charset="0"/>
+                <a:ea typeface="Calibri" pitchFamily="34" charset="-122"/>
+                <a:cs typeface="Calibri" pitchFamily="34" charset="-120"/>
+              </a:rPr>
+              <a:t>Sources: Lemaire et al., PLOS ONE 2024 · Orange Flux Vision, Paris 2024 · Nokia × Summit Tech, MWC26 · Orange Developer, Jul 2026 · KFUPM US 12,417,639</a:t>
+            </a:r>
+            <a:endParaRPr lang="en-US" sz="1150" dirty="0"/>
+          </a:p>
+        </p:txBody>
+      </p:sp>
+      <p:sp>
+        <p:nvSpPr>
+          <p:cNvPr id="13" name="Text 10"/>
+          <p:cNvSpPr/>
+          <p:nvPr/>
+        </p:nvSpPr>
+        <p:spPr>
+          <a:xfrm>
+            <a:off x="11368735" y="6400800"/>
+            <a:ext cx="457200" cy="274320"/>
+          </a:xfrm>
+          <a:prstGeom prst="rect">
+            <a:avLst/>
+          </a:prstGeom>
+          <a:noFill/>
+          <a:ln/>
+        </p:spPr>
+        <p:txBody>
+          <a:bodyPr wrap="square" lIns="0" tIns="0" rIns="0" bIns="0" rtlCol="0" anchor="ctr"/>
+          <a:lstStyle/>
+          <a:p>
+            <a:pPr marL="0" indent="0" algn="r">
+              <a:buNone/>
+            </a:pPr>
+            <a:r>
+              <a:rPr lang="en-US" sz="1000" dirty="0">
+                <a:solidFill>
+                  <a:srgbClr val="5B6B7A"/>
+                </a:solidFill>
+                <a:latin typeface="Courier New" pitchFamily="34" charset="0"/>
+                <a:ea typeface="Courier New" pitchFamily="34" charset="-122"/>
+                <a:cs typeface="Courier New" pitchFamily="34" charset="-120"/>
+              </a:rPr>
+              <a:t>12</a:t>
+            </a:r>
+            <a:endParaRPr lang="en-US" sz="1000" dirty="0"/>
           </a:p>
         </p:txBody>
       </p:sp>
@@ -9398,7 +10437,7 @@
                 <a:ea typeface="Cambria" pitchFamily="34" charset="-122"/>
                 <a:cs typeface="Cambria" pitchFamily="34" charset="-120"/>
               </a:rPr>
-              <a:t>5</a:t>
+              <a:t>7</a:t>
             </a:r>
             <a:endParaRPr lang="en-US" sz="2600" dirty="0"/>
           </a:p>
@@ -9440,7 +10479,7 @@
                 <a:ea typeface="Calibri" pitchFamily="34" charset="-122"/>
                 <a:cs typeface="Calibri" pitchFamily="34" charset="-120"/>
               </a:rPr>
-              <a:t>API families exercised live end-to-end</a:t>
+              <a:t>CAMARA APIs exercised live — six inside the cycle</a:t>
             </a:r>
             <a:endParaRPr lang="en-US" sz="1100" dirty="0"/>
           </a:p>
@@ -9479,7 +10518,7 @@
                 <a:ea typeface="Cambria" pitchFamily="34" charset="-122"/>
                 <a:cs typeface="Cambria" pitchFamily="34" charset="-120"/>
               </a:rPr>
-              <a:t>21</a:t>
+              <a:t>53</a:t>
             </a:r>
             <a:endParaRPr lang="en-US" sz="2600" dirty="0"/>
           </a:p>
@@ -9521,7 +10560,7 @@
                 <a:ea typeface="Calibri" pitchFamily="34" charset="-122"/>
                 <a:cs typeface="Calibri" pitchFamily="34" charset="-120"/>
               </a:rPr>
-              <a:t>tests on the confidence-weighting core</a:t>
+              <a:t>automated tests — CI on every push</a:t>
             </a:r>
             <a:endParaRPr lang="en-US" sz="1100" dirty="0"/>
           </a:p>
@@ -13017,7 +14056,7 @@
                 <a:ea typeface="Calibri" pitchFamily="34" charset="-122"/>
                 <a:cs typeface="Calibri" pitchFamily="34" charset="-120"/>
               </a:rPr>
-              <a:t>Idea Phase deliverable is the reasoning, not a polished UI — full operator console and demo video land in the Phase 2 prototype (Sep submission).</a:t>
+              <a:t>Prototype phase: operator console live at sakina.streamlit.app · narrated demo video · 53 tests · CI on every push · replay mode with zero credentials.</a:t>
             </a:r>
             <a:endParaRPr lang="en-US" sz="1200" dirty="0"/>
           </a:p>
@@ -13317,7 +14356,7 @@
                 <a:ea typeface="Cambria" pitchFamily="34" charset="-122"/>
                 <a:cs typeface="Cambria" pitchFamily="34" charset="-120"/>
               </a:rPr>
-              <a:t>5/5</a:t>
+              <a:t>7/7</a:t>
             </a:r>
             <a:endParaRPr lang="en-US" sz="3000" dirty="0"/>
           </a:p>
@@ -13359,7 +14398,7 @@
                 <a:ea typeface="Calibri" pitchFamily="34" charset="-122"/>
                 <a:cs typeface="Calibri" pitchFamily="34" charset="-120"/>
               </a:rPr>
-              <a:t>APIs used by the agent verified live (congestion, location, device_status, sim_swap, QoD)</a:t>
+              <a:t>CAMARA APIs verified live — congestion, location, location verify, device status, SIM swap, QoD, geofencing</a:t>
             </a:r>
             <a:endParaRPr lang="en-US" sz="1150" dirty="0"/>
           </a:p>
